--- a/reports/ThuyetTrinh_KIS_CLIP.pptx
+++ b/reports/ThuyetTrinh_KIS_CLIP.pptx
@@ -4,6 +4,9 @@
   <p:sldMasterIdLst>
     <p:sldMasterId id="2147483648" r:id="rId1"/>
   </p:sldMasterIdLst>
+  <p:notesMasterIdLst>
+    <p:notesMasterId r:id="rId21"/>
+  </p:notesMasterIdLst>
   <p:sldIdLst>
     <p:sldId id="256" r:id="rId2"/>
     <p:sldId id="257" r:id="rId3"/>
@@ -25,10 +28,7 @@
     <p:sldId id="273" r:id="rId19"/>
     <p:sldId id="274" r:id="rId20"/>
   </p:sldIdLst>
-  <p:notesMasterIdLst>
-    <p:notesMasterId r:id="rId21"/>
-  </p:notesMasterIdLst>
-  <p:sldSz cx="9144000" cy="5143500"/>
+  <p:sldSz cx="9144000" cy="5143500" type="screen16x9"/>
   <p:notesSz cx="5143500" cy="9144000"/>
   <p:defaultTextStyle>
     <a:lvl1pPr marL="0" algn="l" defTabSz="914400" rtl="0" eaLnBrk="1" latinLnBrk="0" hangingPunct="1">
@@ -125,7 +125,7 @@
   <p:extLst>
     <p:ext uri="{521415D9-36F7-43E2-AB2F-B90AF26B5E84}">
       <p14:sectionLst xmlns:p14="http://schemas.microsoft.com/office/powerpoint/2010/main">
-        <p14:section name="Mở đầu" id="{c1be4fe7-ba00-70c3-33fe-6cde2250458d}">
+        <p14:section name="Mở đầu" id="{C1BE4FE7-BA00-70C3-33FE-6CDE2250458D}">
           <p14:sldIdLst>
             <p14:sldId id="256"/>
             <p14:sldId id="257"/>
@@ -133,7 +133,7 @@
             <p14:sldId id="259"/>
           </p14:sldIdLst>
         </p14:section>
-        <p14:section name="Dữ liệu" id="{6d1e3df1-fed2-94bd-b6c3-a965865d067b}">
+        <p14:section name="Dữ liệu" id="{6D1E3DF1-FED2-94BD-B6C3-A965865D067B}">
           <p14:sldIdLst>
             <p14:sldId id="260"/>
             <p14:sldId id="261"/>
@@ -142,7 +142,7 @@
             <p14:sldId id="264"/>
           </p14:sldIdLst>
         </p14:section>
-        <p14:section name="Mô hình" id="{da4126f6-41b8-c7ef-ac9c-bc23ddd1d015}">
+        <p14:section name="Mô hình" id="{DA4126F6-41B8-C7EF-AC9C-BC23DDD1D015}">
           <p14:sldIdLst>
             <p14:sldId id="265"/>
             <p14:sldId id="266"/>
@@ -151,14 +151,14 @@
             <p14:sldId id="269"/>
           </p14:sldIdLst>
         </p14:section>
-        <p14:section name="Hệ thống" id="{258d4534-5292-b2ce-5fa1-296eae758654}">
+        <p14:section name="Hệ thống" id="{258D4534-5292-B2CE-5FA1-296EAE758654}">
           <p14:sldIdLst>
             <p14:sldId id="270"/>
             <p14:sldId id="271"/>
             <p14:sldId id="272"/>
           </p14:sldIdLst>
         </p14:section>
-        <p14:section name="Kết luận" id="{a1bf25a7-fe4d-8e8c-22ab-cd2f55a8f298}">
+        <p14:section name="Kết luận" id="{A1BF25A7-FE4D-8E8C-22AB-CD2F55A8F298}">
           <p14:sldIdLst>
             <p14:sldId id="273"/>
             <p14:sldId id="274"/>
@@ -174,9 +174,11 @@
 </file>
 
 <file path=ppt/charts/chart1.xml><?xml version="1.0" encoding="utf-8"?>
-<c:chartSpace xmlns:c="http://schemas.openxmlformats.org/drawingml/2006/chart" xmlns:a="http://schemas.openxmlformats.org/drawingml/2006/main" xmlns:r="http://schemas.openxmlformats.org/officeDocument/2006/relationships">
+<c:chartSpace xmlns:c="http://schemas.openxmlformats.org/drawingml/2006/chart" xmlns:a="http://schemas.openxmlformats.org/drawingml/2006/main" xmlns:r="http://schemas.openxmlformats.org/officeDocument/2006/relationships" xmlns:c16r2="http://schemas.microsoft.com/office/drawing/2015/06/chart">
   <c:date1904 val="0"/>
+  <c:lang val="en-US"/>
   <c:roundedCorners val="1"/>
+  <c:style val="2"/>
   <c:chart>
     <c:title>
       <c:tx>
@@ -193,7 +195,7 @@
               </a:defRPr>
             </a:pPr>
             <a:r>
-              <a:rPr sz="1400" b="0" i="0" u="none" strike="noStrike">
+              <a:rPr lang="en-US" sz="1400" b="0" i="0" u="none" strike="noStrike">
                 <a:solidFill>
                   <a:srgbClr val="1F2A2E"/>
                 </a:solidFill>
@@ -204,7 +206,6 @@
           </a:p>
         </c:rich>
       </c:tx>
-      <c:layout/>
       <c:overlay val="0"/>
     </c:title>
     <c:autoTitleDeleted val="0"/>
@@ -248,6 +249,11 @@
               </a:solidFill>
               <a:effectLst/>
             </c:spPr>
+            <c:extLst>
+              <c:ext xmlns:c16="http://schemas.microsoft.com/office/drawing/2014/chart" uri="{C3380CC4-5D6E-409C-BE32-E72D297353CC}">
+                <c16:uniqueId val="{00000001-030B-AE40-9604-6EDA16077B63}"/>
+              </c:ext>
+            </c:extLst>
           </c:dPt>
           <c:dPt>
             <c:idx val="1"/>
@@ -258,6 +264,11 @@
               </a:solidFill>
               <a:effectLst/>
             </c:spPr>
+            <c:extLst>
+              <c:ext xmlns:c16="http://schemas.microsoft.com/office/drawing/2014/chart" uri="{C3380CC4-5D6E-409C-BE32-E72D297353CC}">
+                <c16:uniqueId val="{00000003-030B-AE40-9604-6EDA16077B63}"/>
+              </c:ext>
+            </c:extLst>
           </c:dPt>
           <c:dLbls>
             <c:dLbl>
@@ -276,6 +287,7 @@
                       <a:latin typeface="+mn-lt"/>
                     </a:defRPr>
                   </a:pPr>
+                  <a:endParaRPr lang="en-VN"/>
                 </a:p>
               </c:txPr>
               <c:showLegendKey val="0"/>
@@ -284,6 +296,12 @@
               <c:showSerName val="0"/>
               <c:showPercent val="0"/>
               <c:showBubbleSize val="0"/>
+              <c:extLst>
+                <c:ext xmlns:c15="http://schemas.microsoft.com/office/drawing/2012/chart" uri="{CE6537A1-D6FC-4f65-9D91-7224C49458BB}"/>
+                <c:ext xmlns:c16="http://schemas.microsoft.com/office/drawing/2014/chart" uri="{C3380CC4-5D6E-409C-BE32-E72D297353CC}">
+                  <c16:uniqueId val="{00000001-030B-AE40-9604-6EDA16077B63}"/>
+                </c:ext>
+              </c:extLst>
             </c:dLbl>
             <c:dLbl>
               <c:idx val="1"/>
@@ -301,6 +319,7 @@
                       <a:latin typeface="+mn-lt"/>
                     </a:defRPr>
                   </a:pPr>
+                  <a:endParaRPr lang="en-VN"/>
                 </a:p>
               </c:txPr>
               <c:showLegendKey val="0"/>
@@ -309,8 +328,21 @@
               <c:showSerName val="0"/>
               <c:showPercent val="0"/>
               <c:showBubbleSize val="0"/>
+              <c:extLst>
+                <c:ext xmlns:c15="http://schemas.microsoft.com/office/drawing/2012/chart" uri="{CE6537A1-D6FC-4f65-9D91-7224C49458BB}"/>
+                <c:ext xmlns:c16="http://schemas.microsoft.com/office/drawing/2014/chart" uri="{C3380CC4-5D6E-409C-BE32-E72D297353CC}">
+                  <c16:uniqueId val="{00000003-030B-AE40-9604-6EDA16077B63}"/>
+                </c:ext>
+              </c:extLst>
             </c:dLbl>
             <c:numFmt formatCode="General" sourceLinked="0"/>
+            <c:spPr>
+              <a:noFill/>
+              <a:ln>
+                <a:noFill/>
+              </a:ln>
+              <a:effectLst/>
+            </c:spPr>
             <c:txPr>
               <a:bodyPr/>
               <a:lstStyle/>
@@ -323,6 +355,7 @@
                     <a:latin typeface="Arial"/>
                   </a:defRPr>
                 </a:pPr>
+                <a:endParaRPr lang="en-VN"/>
               </a:p>
             </c:txPr>
             <c:showLegendKey val="0"/>
@@ -332,6 +365,9 @@
             <c:showPercent val="1"/>
             <c:showBubbleSize val="0"/>
             <c:showLeaderLines val="0"/>
+            <c:extLst>
+              <c:ext xmlns:c15="http://schemas.microsoft.com/office/drawing/2012/chart" uri="{CE6537A1-D6FC-4f65-9D91-7224C49458BB}"/>
+            </c:extLst>
           </c:dLbls>
           <c:cat>
             <c:strRef>
@@ -351,6 +387,7 @@
             <c:numRef>
               <c:f>Sheet1!$B$2:$B$3</c:f>
               <c:numCache>
+                <c:formatCode>General</c:formatCode>
                 <c:ptCount val="2"/>
                 <c:pt idx="0">
                   <c:v>6895</c:v>
@@ -361,7 +398,21 @@
               </c:numCache>
             </c:numRef>
           </c:val>
+          <c:extLst>
+            <c:ext xmlns:c16="http://schemas.microsoft.com/office/drawing/2014/chart" uri="{C3380CC4-5D6E-409C-BE32-E72D297353CC}">
+              <c16:uniqueId val="{00000004-030B-AE40-9604-6EDA16077B63}"/>
+            </c:ext>
+          </c:extLst>
         </c:ser>
+        <c:dLbls>
+          <c:showLegendKey val="0"/>
+          <c:showVal val="0"/>
+          <c:showCatName val="0"/>
+          <c:showSerName val="0"/>
+          <c:showPercent val="0"/>
+          <c:showBubbleSize val="0"/>
+          <c:showLeaderLines val="0"/>
+        </c:dLbls>
         <c:firstSliceAng val="0"/>
         <c:holeSize val="55"/>
       </c:doughnutChart>
@@ -389,12 +440,13 @@
               <a:cs typeface="+mn-lt"/>
             </a:defRPr>
           </a:pPr>
-          <a:endParaRPr lang="en-US"/>
+          <a:endParaRPr lang="en-VN"/>
         </a:p>
       </c:txPr>
     </c:legend>
     <c:plotVisOnly val="1"/>
     <c:dispBlanksAs val="span"/>
+    <c:showDLblsOverMax val="1"/>
   </c:chart>
   <c:spPr>
     <a:noFill/>
@@ -410,9 +462,11 @@
 </file>
 
 <file path=ppt/charts/chart2.xml><?xml version="1.0" encoding="utf-8"?>
-<c:chartSpace xmlns:c="http://schemas.openxmlformats.org/drawingml/2006/chart" xmlns:a="http://schemas.openxmlformats.org/drawingml/2006/main" xmlns:r="http://schemas.openxmlformats.org/officeDocument/2006/relationships">
+<c:chartSpace xmlns:c="http://schemas.openxmlformats.org/drawingml/2006/chart" xmlns:a="http://schemas.openxmlformats.org/drawingml/2006/main" xmlns:r="http://schemas.openxmlformats.org/officeDocument/2006/relationships" xmlns:c16r2="http://schemas.microsoft.com/office/drawing/2015/06/chart">
   <c:date1904 val="0"/>
+  <c:lang val="en-US"/>
   <c:roundedCorners val="1"/>
+  <c:style val="2"/>
   <c:chart>
     <c:title>
       <c:tx>
@@ -429,7 +483,7 @@
               </a:defRPr>
             </a:pPr>
             <a:r>
-              <a:rPr sz="1400" b="0" i="0" u="none" strike="noStrike">
+              <a:rPr lang="en-US" sz="1400" b="0" i="0" u="none" strike="noStrike">
                 <a:solidFill>
                   <a:srgbClr val="1F2A2E"/>
                 </a:solidFill>
@@ -440,7 +494,6 @@
           </a:p>
         </c:rich>
       </c:tx>
-      <c:layout/>
       <c:overlay val="0"/>
     </c:title>
     <c:autoTitleDeleted val="0"/>
@@ -473,18 +526,26 @@
           <c:invertIfNegative val="0"/>
           <c:dLbls>
             <c:numFmt formatCode="0" sourceLinked="0"/>
+            <c:spPr>
+              <a:noFill/>
+              <a:ln>
+                <a:noFill/>
+              </a:ln>
+              <a:effectLst/>
+            </c:spPr>
             <c:txPr>
               <a:bodyPr/>
               <a:lstStyle/>
               <a:p>
                 <a:pPr>
-                  <a:defRPr b="0" i="0" strike="noStrike" sz="1100" u="none">
+                  <a:defRPr sz="1100" b="0" i="0" u="none" strike="noStrike">
                     <a:solidFill>
                       <a:srgbClr val="1F2A2E"/>
                     </a:solidFill>
                     <a:latin typeface="+mn-lt"/>
                   </a:defRPr>
                 </a:pPr>
+                <a:endParaRPr lang="en-VN"/>
               </a:p>
             </c:txPr>
             <c:showLegendKey val="0"/>
@@ -494,34 +555,37 @@
             <c:showPercent val="0"/>
             <c:showBubbleSize val="0"/>
             <c:showLeaderLines val="0"/>
+            <c:extLst>
+              <c:ext xmlns:c15="http://schemas.microsoft.com/office/drawing/2012/chart" uri="{CE6537A1-D6FC-4f65-9D91-7224C49458BB}">
+                <c15:showLeaderLines val="0"/>
+              </c:ext>
+            </c:extLst>
           </c:dLbls>
           <c:cat>
-            <c:multiLvlStrRef>
+            <c:strRef>
               <c:f>Sheet1!$A$2:$A$7</c:f>
-              <c:multiLvlStrCache>
+              <c:strCache>
                 <c:ptCount val="6"/>
-                <c:lvl>
-                  <c:pt idx="0">
-                    <c:v>Bản vẽ / bản đồ</c:v>
-                  </c:pt>
-                  <c:pt idx="1">
-                    <c:v>Tượng</c:v>
-                  </c:pt>
-                  <c:pt idx="2">
-                    <c:v>Chi tiết</c:v>
-                  </c:pt>
-                  <c:pt idx="3">
-                    <c:v>Nội thất</c:v>
-                  </c:pt>
-                  <c:pt idx="4">
-                    <c:v>Khác</c:v>
-                  </c:pt>
-                  <c:pt idx="5">
-                    <c:v>Ngoại thất</c:v>
-                  </c:pt>
-                </c:lvl>
-              </c:multiLvlStrCache>
-            </c:multiLvlStrRef>
+                <c:pt idx="0">
+                  <c:v>Bản vẽ / bản đồ</c:v>
+                </c:pt>
+                <c:pt idx="1">
+                  <c:v>Tượng</c:v>
+                </c:pt>
+                <c:pt idx="2">
+                  <c:v>Chi tiết</c:v>
+                </c:pt>
+                <c:pt idx="3">
+                  <c:v>Nội thất</c:v>
+                </c:pt>
+                <c:pt idx="4">
+                  <c:v>Khác</c:v>
+                </c:pt>
+                <c:pt idx="5">
+                  <c:v>Ngoại thất</c:v>
+                </c:pt>
+              </c:strCache>
+            </c:strRef>
           </c:cat>
           <c:val>
             <c:numRef>
@@ -550,36 +614,23 @@
               </c:numCache>
             </c:numRef>
           </c:val>
+          <c:extLst>
+            <c:ext xmlns:c16="http://schemas.microsoft.com/office/drawing/2014/chart" uri="{C3380CC4-5D6E-409C-BE32-E72D297353CC}">
+              <c16:uniqueId val="{00000000-6A08-5843-BB03-A51292EBF3DA}"/>
+            </c:ext>
+          </c:extLst>
         </c:ser>
         <c:dLbls>
-          <c:numFmt formatCode="0" sourceLinked="0"/>
-          <c:txPr>
-            <a:bodyPr/>
-            <a:lstStyle/>
-            <a:p>
-              <a:pPr>
-                <a:defRPr b="0" i="0" strike="noStrike" sz="1100" u="none">
-                  <a:solidFill>
-                    <a:srgbClr val="1F2A2E"/>
-                  </a:solidFill>
-                  <a:latin typeface="+mn-lt"/>
-                </a:defRPr>
-              </a:pPr>
-            </a:p>
-          </c:txPr>
           <c:showLegendKey val="0"/>
           <c:showVal val="1"/>
           <c:showCatName val="0"/>
           <c:showSerName val="0"/>
           <c:showPercent val="0"/>
           <c:showBubbleSize val="0"/>
-          <c:showLeaderLines val="0"/>
         </c:dLbls>
         <c:gapWidth val="150"/>
-        <c:overlap val="0"/>
         <c:axId val="2094734554"/>
         <c:axId val="2094734552"/>
-        <c:axId val="2094734556"/>
       </c:barChart>
       <c:catAx>
         <c:axId val="2094734554"/>
@@ -613,13 +664,14 @@
                 <a:latin typeface="+mn-lt"/>
               </a:defRPr>
             </a:pPr>
-            <a:endParaRPr lang="en-US"/>
+            <a:endParaRPr lang="en-VN"/>
           </a:p>
         </c:txPr>
         <c:crossAx val="2094734552"/>
         <c:crosses val="autoZero"/>
         <c:auto val="1"/>
         <c:lblAlgn val="ctr"/>
+        <c:lblOffset val="100"/>
         <c:noMultiLvlLbl val="1"/>
       </c:catAx>
       <c:valAx>
@@ -634,30 +686,6 @@
         <c:majorTickMark val="out"/>
         <c:minorTickMark val="none"/>
         <c:tickLblPos val="low"/>
-        <c:spPr>
-          <a:ln w="12700" cap="flat">
-            <a:solidFill>
-              <a:srgbClr val="888888"/>
-            </a:solidFill>
-            <a:prstDash val="solid"/>
-            <a:round/>
-          </a:ln>
-        </c:spPr>
-        <c:txPr>
-          <a:bodyPr/>
-          <a:lstStyle/>
-          <a:p>
-            <a:pPr>
-              <a:defRPr sz="1200" b="0" i="0" u="none" strike="noStrike">
-                <a:solidFill>
-                  <a:srgbClr val="000000"/>
-                </a:solidFill>
-                <a:latin typeface="+mn-lt"/>
-              </a:defRPr>
-            </a:pPr>
-            <a:endParaRPr lang="en-US"/>
-          </a:p>
-        </c:txPr>
         <c:crossAx val="2094734554"/>
         <c:crosses val="autoZero"/>
         <c:crossBetween val="between"/>
@@ -672,6 +700,7 @@
     </c:plotArea>
     <c:plotVisOnly val="1"/>
     <c:dispBlanksAs val="span"/>
+    <c:showDLblsOverMax val="1"/>
   </c:chart>
   <c:spPr>
     <a:noFill/>
@@ -687,9 +716,11 @@
 </file>
 
 <file path=ppt/charts/chart3.xml><?xml version="1.0" encoding="utf-8"?>
-<c:chartSpace xmlns:c="http://schemas.openxmlformats.org/drawingml/2006/chart" xmlns:a="http://schemas.openxmlformats.org/drawingml/2006/main" xmlns:r="http://schemas.openxmlformats.org/officeDocument/2006/relationships">
+<c:chartSpace xmlns:c="http://schemas.openxmlformats.org/drawingml/2006/chart" xmlns:a="http://schemas.openxmlformats.org/drawingml/2006/main" xmlns:r="http://schemas.openxmlformats.org/officeDocument/2006/relationships" xmlns:c16r2="http://schemas.microsoft.com/office/drawing/2015/06/chart">
   <c:date1904 val="0"/>
+  <c:lang val="en-US"/>
   <c:roundedCorners val="1"/>
+  <c:style val="2"/>
   <c:chart>
     <c:autoTitleDeleted val="1"/>
     <c:plotArea>
@@ -721,18 +752,26 @@
           <c:invertIfNegative val="0"/>
           <c:dLbls>
             <c:numFmt formatCode="0.0&quot;%&quot;" sourceLinked="0"/>
+            <c:spPr>
+              <a:noFill/>
+              <a:ln>
+                <a:noFill/>
+              </a:ln>
+              <a:effectLst/>
+            </c:spPr>
             <c:txPr>
               <a:bodyPr/>
               <a:lstStyle/>
               <a:p>
                 <a:pPr>
-                  <a:defRPr b="0" i="0" strike="noStrike" sz="1100" u="none">
+                  <a:defRPr sz="1100" b="0" i="0" u="none" strike="noStrike">
                     <a:solidFill>
                       <a:srgbClr val="1F2A2E"/>
                     </a:solidFill>
                     <a:latin typeface="+mn-lt"/>
                   </a:defRPr>
                 </a:pPr>
+                <a:endParaRPr lang="en-VN"/>
               </a:p>
             </c:txPr>
             <c:showLegendKey val="0"/>
@@ -742,25 +781,28 @@
             <c:showPercent val="0"/>
             <c:showBubbleSize val="0"/>
             <c:showLeaderLines val="0"/>
+            <c:extLst>
+              <c:ext xmlns:c15="http://schemas.microsoft.com/office/drawing/2012/chart" uri="{CE6537A1-D6FC-4f65-9D91-7224C49458BB}">
+                <c15:showLeaderLines val="0"/>
+              </c:ext>
+            </c:extLst>
           </c:dLbls>
           <c:cat>
-            <c:multiLvlStrRef>
+            <c:strRef>
               <c:f>Sheet1!$A$2:$A$4</c:f>
-              <c:multiLvlStrCache>
+              <c:strCache>
                 <c:ptCount val="3"/>
-                <c:lvl>
-                  <c:pt idx="0">
-                    <c:v>Đúng ngay kết quả đầu</c:v>
-                  </c:pt>
-                  <c:pt idx="1">
-                    <c:v>Có trong top 10</c:v>
-                  </c:pt>
-                  <c:pt idx="2">
-                    <c:v>Có trong top 10 (cả kho 7.756 ảnh)</c:v>
-                  </c:pt>
-                </c:lvl>
-              </c:multiLvlStrCache>
-            </c:multiLvlStrRef>
+                <c:pt idx="0">
+                  <c:v>Đúng ngay kết quả đầu</c:v>
+                </c:pt>
+                <c:pt idx="1">
+                  <c:v>Có trong top 10</c:v>
+                </c:pt>
+                <c:pt idx="2">
+                  <c:v>Có trong top 10 (cả kho 7.756 ảnh)</c:v>
+                </c:pt>
+              </c:strCache>
+            </c:strRef>
           </c:cat>
           <c:val>
             <c:numRef>
@@ -780,6 +822,11 @@
               </c:numCache>
             </c:numRef>
           </c:val>
+          <c:extLst>
+            <c:ext xmlns:c16="http://schemas.microsoft.com/office/drawing/2014/chart" uri="{C3380CC4-5D6E-409C-BE32-E72D297353CC}">
+              <c16:uniqueId val="{00000000-0384-C942-B38A-47BC0EDD6908}"/>
+            </c:ext>
+          </c:extLst>
         </c:ser>
         <c:ser>
           <c:idx val="1"/>
@@ -804,18 +851,26 @@
           <c:invertIfNegative val="0"/>
           <c:dLbls>
             <c:numFmt formatCode="0.0&quot;%&quot;" sourceLinked="0"/>
+            <c:spPr>
+              <a:noFill/>
+              <a:ln>
+                <a:noFill/>
+              </a:ln>
+              <a:effectLst/>
+            </c:spPr>
             <c:txPr>
               <a:bodyPr/>
               <a:lstStyle/>
               <a:p>
                 <a:pPr>
-                  <a:defRPr b="0" i="0" strike="noStrike" sz="1100" u="none">
+                  <a:defRPr sz="1100" b="0" i="0" u="none" strike="noStrike">
                     <a:solidFill>
                       <a:srgbClr val="1F2A2E"/>
                     </a:solidFill>
                     <a:latin typeface="+mn-lt"/>
                   </a:defRPr>
                 </a:pPr>
+                <a:endParaRPr lang="en-VN"/>
               </a:p>
             </c:txPr>
             <c:showLegendKey val="0"/>
@@ -825,25 +880,28 @@
             <c:showPercent val="0"/>
             <c:showBubbleSize val="0"/>
             <c:showLeaderLines val="0"/>
+            <c:extLst>
+              <c:ext xmlns:c15="http://schemas.microsoft.com/office/drawing/2012/chart" uri="{CE6537A1-D6FC-4f65-9D91-7224C49458BB}">
+                <c15:showLeaderLines val="0"/>
+              </c:ext>
+            </c:extLst>
           </c:dLbls>
           <c:cat>
-            <c:multiLvlStrRef>
+            <c:strRef>
               <c:f>Sheet1!$A$2:$A$4</c:f>
-              <c:multiLvlStrCache>
+              <c:strCache>
                 <c:ptCount val="3"/>
-                <c:lvl>
-                  <c:pt idx="0">
-                    <c:v>Đúng ngay kết quả đầu</c:v>
-                  </c:pt>
-                  <c:pt idx="1">
-                    <c:v>Có trong top 10</c:v>
-                  </c:pt>
-                  <c:pt idx="2">
-                    <c:v>Có trong top 10 (cả kho 7.756 ảnh)</c:v>
-                  </c:pt>
-                </c:lvl>
-              </c:multiLvlStrCache>
-            </c:multiLvlStrRef>
+                <c:pt idx="0">
+                  <c:v>Đúng ngay kết quả đầu</c:v>
+                </c:pt>
+                <c:pt idx="1">
+                  <c:v>Có trong top 10</c:v>
+                </c:pt>
+                <c:pt idx="2">
+                  <c:v>Có trong top 10 (cả kho 7.756 ảnh)</c:v>
+                </c:pt>
+              </c:strCache>
+            </c:strRef>
           </c:cat>
           <c:val>
             <c:numRef>
@@ -863,36 +921,23 @@
               </c:numCache>
             </c:numRef>
           </c:val>
+          <c:extLst>
+            <c:ext xmlns:c16="http://schemas.microsoft.com/office/drawing/2014/chart" uri="{C3380CC4-5D6E-409C-BE32-E72D297353CC}">
+              <c16:uniqueId val="{00000001-0384-C942-B38A-47BC0EDD6908}"/>
+            </c:ext>
+          </c:extLst>
         </c:ser>
         <c:dLbls>
-          <c:numFmt formatCode="0.0&quot;%&quot;" sourceLinked="0"/>
-          <c:txPr>
-            <a:bodyPr/>
-            <a:lstStyle/>
-            <a:p>
-              <a:pPr>
-                <a:defRPr b="0" i="0" strike="noStrike" sz="1100" u="none">
-                  <a:solidFill>
-                    <a:srgbClr val="1F2A2E"/>
-                  </a:solidFill>
-                  <a:latin typeface="+mn-lt"/>
-                </a:defRPr>
-              </a:pPr>
-            </a:p>
-          </c:txPr>
           <c:showLegendKey val="0"/>
           <c:showVal val="1"/>
           <c:showCatName val="0"/>
           <c:showSerName val="0"/>
           <c:showPercent val="0"/>
           <c:showBubbleSize val="0"/>
-          <c:showLeaderLines val="0"/>
         </c:dLbls>
         <c:gapWidth val="60"/>
-        <c:overlap val="0"/>
         <c:axId val="2094734554"/>
         <c:axId val="2094734552"/>
-        <c:axId val="2094734556"/>
       </c:barChart>
       <c:catAx>
         <c:axId val="2094734554"/>
@@ -926,13 +971,14 @@
                 <a:latin typeface="+mn-lt"/>
               </a:defRPr>
             </a:pPr>
-            <a:endParaRPr lang="en-US"/>
+            <a:endParaRPr lang="en-VN"/>
           </a:p>
         </c:txPr>
         <c:crossAx val="2094734552"/>
         <c:crosses val="autoZero"/>
         <c:auto val="1"/>
         <c:lblAlgn val="ctr"/>
+        <c:lblOffset val="100"/>
         <c:noMultiLvlLbl val="1"/>
       </c:catAx>
       <c:valAx>
@@ -947,30 +993,6 @@
         <c:majorTickMark val="out"/>
         <c:minorTickMark val="none"/>
         <c:tickLblPos val="nextTo"/>
-        <c:spPr>
-          <a:ln w="12700" cap="flat">
-            <a:solidFill>
-              <a:srgbClr val="888888"/>
-            </a:solidFill>
-            <a:prstDash val="solid"/>
-            <a:round/>
-          </a:ln>
-        </c:spPr>
-        <c:txPr>
-          <a:bodyPr/>
-          <a:lstStyle/>
-          <a:p>
-            <a:pPr>
-              <a:defRPr sz="1200" b="0" i="0" u="none" strike="noStrike">
-                <a:solidFill>
-                  <a:srgbClr val="000000"/>
-                </a:solidFill>
-                <a:latin typeface="+mn-lt"/>
-              </a:defRPr>
-            </a:pPr>
-            <a:endParaRPr lang="en-US"/>
-          </a:p>
-        </c:txPr>
         <c:crossAx val="2094734554"/>
         <c:crosses val="autoZero"/>
         <c:crossBetween val="between"/>
@@ -999,12 +1021,13 @@
               <a:cs typeface="+mn-lt"/>
             </a:defRPr>
           </a:pPr>
-          <a:endParaRPr lang="en-US"/>
+          <a:endParaRPr lang="en-VN"/>
         </a:p>
       </c:txPr>
     </c:legend>
     <c:plotVisOnly val="1"/>
     <c:dispBlanksAs val="span"/>
+    <c:showDLblsOverMax val="1"/>
   </c:chart>
   <c:spPr>
     <a:noFill/>
@@ -1020,9 +1043,11 @@
 </file>
 
 <file path=ppt/charts/chart4.xml><?xml version="1.0" encoding="utf-8"?>
-<c:chartSpace xmlns:c="http://schemas.openxmlformats.org/drawingml/2006/chart" xmlns:a="http://schemas.openxmlformats.org/drawingml/2006/main" xmlns:r="http://schemas.openxmlformats.org/officeDocument/2006/relationships">
+<c:chartSpace xmlns:c="http://schemas.openxmlformats.org/drawingml/2006/chart" xmlns:a="http://schemas.openxmlformats.org/drawingml/2006/main" xmlns:r="http://schemas.openxmlformats.org/officeDocument/2006/relationships" xmlns:c16r2="http://schemas.microsoft.com/office/drawing/2015/06/chart">
   <c:date1904 val="0"/>
+  <c:lang val="en-US"/>
   <c:roundedCorners val="1"/>
+  <c:style val="2"/>
   <c:chart>
     <c:title>
       <c:tx>
@@ -1039,7 +1064,7 @@
               </a:defRPr>
             </a:pPr>
             <a:r>
-              <a:rPr sz="1300" b="0" i="0" u="none" strike="noStrike">
+              <a:rPr lang="en-US" sz="1300" b="0" i="0" u="none" strike="noStrike">
                 <a:solidFill>
                   <a:srgbClr val="1F2A2E"/>
                 </a:solidFill>
@@ -1050,7 +1075,6 @@
           </a:p>
         </c:rich>
       </c:tx>
-      <c:layout/>
       <c:overlay val="0"/>
     </c:title>
     <c:autoTitleDeleted val="0"/>
@@ -1083,18 +1107,26 @@
           <c:invertIfNegative val="0"/>
           <c:dLbls>
             <c:numFmt formatCode="0&quot;%&quot;" sourceLinked="0"/>
+            <c:spPr>
+              <a:noFill/>
+              <a:ln>
+                <a:noFill/>
+              </a:ln>
+              <a:effectLst/>
+            </c:spPr>
             <c:txPr>
               <a:bodyPr/>
               <a:lstStyle/>
               <a:p>
                 <a:pPr>
-                  <a:defRPr b="0" i="0" strike="noStrike" sz="1100" u="none">
+                  <a:defRPr sz="1100" b="0" i="0" u="none" strike="noStrike">
                     <a:solidFill>
                       <a:srgbClr val="1F2A2E"/>
                     </a:solidFill>
                     <a:latin typeface="+mn-lt"/>
                   </a:defRPr>
                 </a:pPr>
+                <a:endParaRPr lang="en-VN"/>
               </a:p>
             </c:txPr>
             <c:showLegendKey val="0"/>
@@ -1104,28 +1136,31 @@
             <c:showPercent val="0"/>
             <c:showBubbleSize val="0"/>
             <c:showLeaderLines val="0"/>
+            <c:extLst>
+              <c:ext xmlns:c15="http://schemas.microsoft.com/office/drawing/2012/chart" uri="{CE6537A1-D6FC-4f65-9D91-7224C49458BB}">
+                <c15:showLeaderLines val="0"/>
+              </c:ext>
+            </c:extLst>
           </c:dLbls>
           <c:cat>
-            <c:multiLvlStrRef>
+            <c:strRef>
               <c:f>Sheet1!$A$2:$A$5</c:f>
-              <c:multiLvlStrCache>
+              <c:strCache>
                 <c:ptCount val="4"/>
-                <c:lvl>
-                  <c:pt idx="0">
-                    <c:v>Cổng</c:v>
-                  </c:pt>
-                  <c:pt idx="1">
-                    <c:v>Bảo tháp</c:v>
-                  </c:pt>
-                  <c:pt idx="2">
-                    <c:v>Chùa Linh Phước</c:v>
-                  </c:pt>
-                  <c:pt idx="3">
-                    <c:v>Vườn</c:v>
-                  </c:pt>
-                </c:lvl>
-              </c:multiLvlStrCache>
-            </c:multiLvlStrRef>
+                <c:pt idx="0">
+                  <c:v>Cổng</c:v>
+                </c:pt>
+                <c:pt idx="1">
+                  <c:v>Bảo tháp</c:v>
+                </c:pt>
+                <c:pt idx="2">
+                  <c:v>Chùa Linh Phước</c:v>
+                </c:pt>
+                <c:pt idx="3">
+                  <c:v>Vườn</c:v>
+                </c:pt>
+              </c:strCache>
+            </c:strRef>
           </c:cat>
           <c:val>
             <c:numRef>
@@ -1134,13 +1169,13 @@
                 <c:formatCode>General</c:formatCode>
                 <c:ptCount val="4"/>
                 <c:pt idx="0">
-                  <c:v>32.2</c:v>
+                  <c:v>32.200000000000003</c:v>
                 </c:pt>
                 <c:pt idx="1">
                   <c:v>48.7</c:v>
                 </c:pt>
                 <c:pt idx="2">
-                  <c:v>65.4</c:v>
+                  <c:v>65.400000000000006</c:v>
                 </c:pt>
                 <c:pt idx="3">
                   <c:v>85.2</c:v>
@@ -1148,6 +1183,11 @@
               </c:numCache>
             </c:numRef>
           </c:val>
+          <c:extLst>
+            <c:ext xmlns:c16="http://schemas.microsoft.com/office/drawing/2014/chart" uri="{C3380CC4-5D6E-409C-BE32-E72D297353CC}">
+              <c16:uniqueId val="{00000000-ED8F-8047-AEA4-80AC00A05B7C}"/>
+            </c:ext>
+          </c:extLst>
         </c:ser>
         <c:ser>
           <c:idx val="1"/>
@@ -1172,18 +1212,26 @@
           <c:invertIfNegative val="0"/>
           <c:dLbls>
             <c:numFmt formatCode="0&quot;%&quot;" sourceLinked="0"/>
+            <c:spPr>
+              <a:noFill/>
+              <a:ln>
+                <a:noFill/>
+              </a:ln>
+              <a:effectLst/>
+            </c:spPr>
             <c:txPr>
               <a:bodyPr/>
               <a:lstStyle/>
               <a:p>
                 <a:pPr>
-                  <a:defRPr b="0" i="0" strike="noStrike" sz="1100" u="none">
+                  <a:defRPr sz="1100" b="0" i="0" u="none" strike="noStrike">
                     <a:solidFill>
                       <a:srgbClr val="1F2A2E"/>
                     </a:solidFill>
                     <a:latin typeface="+mn-lt"/>
                   </a:defRPr>
                 </a:pPr>
+                <a:endParaRPr lang="en-VN"/>
               </a:p>
             </c:txPr>
             <c:showLegendKey val="0"/>
@@ -1193,28 +1241,31 @@
             <c:showPercent val="0"/>
             <c:showBubbleSize val="0"/>
             <c:showLeaderLines val="0"/>
+            <c:extLst>
+              <c:ext xmlns:c15="http://schemas.microsoft.com/office/drawing/2012/chart" uri="{CE6537A1-D6FC-4f65-9D91-7224C49458BB}">
+                <c15:showLeaderLines val="0"/>
+              </c:ext>
+            </c:extLst>
           </c:dLbls>
           <c:cat>
-            <c:multiLvlStrRef>
+            <c:strRef>
               <c:f>Sheet1!$A$2:$A$5</c:f>
-              <c:multiLvlStrCache>
+              <c:strCache>
                 <c:ptCount val="4"/>
-                <c:lvl>
-                  <c:pt idx="0">
-                    <c:v>Cổng</c:v>
-                  </c:pt>
-                  <c:pt idx="1">
-                    <c:v>Bảo tháp</c:v>
-                  </c:pt>
-                  <c:pt idx="2">
-                    <c:v>Chùa Linh Phước</c:v>
-                  </c:pt>
-                  <c:pt idx="3">
-                    <c:v>Vườn</c:v>
-                  </c:pt>
-                </c:lvl>
-              </c:multiLvlStrCache>
-            </c:multiLvlStrRef>
+                <c:pt idx="0">
+                  <c:v>Cổng</c:v>
+                </c:pt>
+                <c:pt idx="1">
+                  <c:v>Bảo tháp</c:v>
+                </c:pt>
+                <c:pt idx="2">
+                  <c:v>Chùa Linh Phước</c:v>
+                </c:pt>
+                <c:pt idx="3">
+                  <c:v>Vườn</c:v>
+                </c:pt>
+              </c:strCache>
+            </c:strRef>
           </c:cat>
           <c:val>
             <c:numRef>
@@ -1237,36 +1288,23 @@
               </c:numCache>
             </c:numRef>
           </c:val>
+          <c:extLst>
+            <c:ext xmlns:c16="http://schemas.microsoft.com/office/drawing/2014/chart" uri="{C3380CC4-5D6E-409C-BE32-E72D297353CC}">
+              <c16:uniqueId val="{00000001-ED8F-8047-AEA4-80AC00A05B7C}"/>
+            </c:ext>
+          </c:extLst>
         </c:ser>
         <c:dLbls>
-          <c:numFmt formatCode="0&quot;%&quot;" sourceLinked="0"/>
-          <c:txPr>
-            <a:bodyPr/>
-            <a:lstStyle/>
-            <a:p>
-              <a:pPr>
-                <a:defRPr b="0" i="0" strike="noStrike" sz="1100" u="none">
-                  <a:solidFill>
-                    <a:srgbClr val="1F2A2E"/>
-                  </a:solidFill>
-                  <a:latin typeface="+mn-lt"/>
-                </a:defRPr>
-              </a:pPr>
-            </a:p>
-          </c:txPr>
           <c:showLegendKey val="0"/>
           <c:showVal val="1"/>
           <c:showCatName val="0"/>
           <c:showSerName val="0"/>
           <c:showPercent val="0"/>
           <c:showBubbleSize val="0"/>
-          <c:showLeaderLines val="0"/>
         </c:dLbls>
         <c:gapWidth val="60"/>
-        <c:overlap val="0"/>
         <c:axId val="2094734554"/>
         <c:axId val="2094734552"/>
-        <c:axId val="2094734556"/>
       </c:barChart>
       <c:catAx>
         <c:axId val="2094734554"/>
@@ -1300,13 +1338,14 @@
                 <a:latin typeface="+mn-lt"/>
               </a:defRPr>
             </a:pPr>
-            <a:endParaRPr lang="en-US"/>
+            <a:endParaRPr lang="en-VN"/>
           </a:p>
         </c:txPr>
         <c:crossAx val="2094734552"/>
         <c:crosses val="autoZero"/>
         <c:auto val="1"/>
         <c:lblAlgn val="ctr"/>
+        <c:lblOffset val="100"/>
         <c:noMultiLvlLbl val="1"/>
       </c:catAx>
       <c:valAx>
@@ -1321,30 +1360,6 @@
         <c:majorTickMark val="out"/>
         <c:minorTickMark val="none"/>
         <c:tickLblPos val="nextTo"/>
-        <c:spPr>
-          <a:ln w="12700" cap="flat">
-            <a:solidFill>
-              <a:srgbClr val="888888"/>
-            </a:solidFill>
-            <a:prstDash val="solid"/>
-            <a:round/>
-          </a:ln>
-        </c:spPr>
-        <c:txPr>
-          <a:bodyPr/>
-          <a:lstStyle/>
-          <a:p>
-            <a:pPr>
-              <a:defRPr sz="1200" b="0" i="0" u="none" strike="noStrike">
-                <a:solidFill>
-                  <a:srgbClr val="000000"/>
-                </a:solidFill>
-                <a:latin typeface="+mn-lt"/>
-              </a:defRPr>
-            </a:pPr>
-            <a:endParaRPr lang="en-US"/>
-          </a:p>
-        </c:txPr>
         <c:crossAx val="2094734554"/>
         <c:crosses val="autoZero"/>
         <c:crossBetween val="between"/>
@@ -1373,12 +1388,13 @@
               <a:cs typeface="+mn-lt"/>
             </a:defRPr>
           </a:pPr>
-          <a:endParaRPr lang="en-US"/>
+          <a:endParaRPr lang="en-VN"/>
         </a:p>
       </c:txPr>
     </c:legend>
     <c:plotVisOnly val="1"/>
     <c:dispBlanksAs val="span"/>
+    <c:showDLblsOverMax val="1"/>
   </c:chart>
   <c:spPr>
     <a:noFill/>
@@ -1415,234 +1431,10 @@
           <a:chExt cx="0" cy="0"/>
         </a:xfrm>
       </p:grpSpPr>
-      <p:sp>
-        <p:nvSpPr>
-          <p:cNvPr id="2" name="Header Placeholder 1"/>
-          <p:cNvSpPr>
-            <a:spLocks noGrp="1"/>
-          </p:cNvSpPr>
-          <p:nvPr>
-            <p:ph type="hdr" sz="quarter"/>
-          </p:nvPr>
-        </p:nvSpPr>
-        <p:spPr>
-          <a:xfrm>
-            <a:off x="0" y="0"/>
-            <a:ext cx="2971800" cy="458788"/>
-          </a:xfrm>
-          <a:prstGeom prst="rect">
-            <a:avLst/>
-          </a:prstGeom>
-        </p:spPr>
-        <p:txBody>
-          <a:bodyPr vert="horz" lIns="91440" tIns="45720" rIns="91440" bIns="45720" rtlCol="0"/>
-          <a:lstStyle>
-            <a:lvl1pPr algn="l">
-              <a:defRPr sz="1200"/>
-            </a:lvl1pPr>
-          </a:lstStyle>
-          <a:p>
-            <a:endParaRPr lang="en-US"/>
-          </a:p>
-        </p:txBody>
-      </p:sp>
-      <p:sp>
-        <p:nvSpPr>
-          <p:cNvPr id="3" name="Date Placeholder 2"/>
-          <p:cNvSpPr>
-            <a:spLocks noGrp="1"/>
-          </p:cNvSpPr>
-          <p:nvPr>
-            <p:ph type="dt" idx="1"/>
-          </p:nvPr>
-        </p:nvSpPr>
-        <p:spPr>
-          <a:xfrm>
-            <a:off x="3884613" y="0"/>
-            <a:ext cx="2971800" cy="458788"/>
-          </a:xfrm>
-          <a:prstGeom prst="rect">
-            <a:avLst/>
-          </a:prstGeom>
-        </p:spPr>
-        <p:txBody>
-          <a:bodyPr vert="horz" lIns="91440" tIns="45720" rIns="91440" bIns="45720" rtlCol="0"/>
-          <a:lstStyle>
-            <a:lvl1pPr algn="r">
-              <a:defRPr sz="1200"/>
-            </a:lvl1pPr>
-          </a:lstStyle>
-          <a:p>
-            <a:fld id="{5282F153-3F37-0F45-9E97-73ACFA13230C}" type="datetimeFigureOut">
-              <a:rPr lang="en-US"/>
-              <a:t>7/23/19</a:t>
-            </a:fld>
-            <a:endParaRPr lang="en-US"/>
-          </a:p>
-        </p:txBody>
-      </p:sp>
-      <p:sp>
-        <p:nvSpPr>
-          <p:cNvPr id="4" name="Slide Image Placeholder 3"/>
-          <p:cNvSpPr>
-            <a:spLocks noGrp="1" noRot="1" noChangeAspect="1"/>
-          </p:cNvSpPr>
-          <p:nvPr>
-            <p:ph type="sldImg" idx="2"/>
-          </p:nvPr>
-        </p:nvSpPr>
-        <p:spPr>
-          <a:xfrm>
-            <a:off x="685800" y="1143000"/>
-            <a:ext cx="5486400" cy="3086100"/>
-          </a:xfrm>
-          <a:prstGeom prst="rect">
-            <a:avLst/>
-          </a:prstGeom>
-          <a:noFill/>
-          <a:ln w="12700">
-            <a:solidFill>
-              <a:prstClr val="black"/>
-            </a:solidFill>
-          </a:ln>
-        </p:spPr>
-        <p:txBody>
-          <a:bodyPr vert="horz" lIns="91440" tIns="45720" rIns="91440" bIns="45720" rtlCol="0" anchor="ctr"/>
-          <a:lstStyle/>
-          <a:p>
-            <a:endParaRPr lang="en-US"/>
-          </a:p>
-        </p:txBody>
-      </p:sp>
-      <p:sp>
-        <p:nvSpPr>
-          <p:cNvPr id="5" name="Notes Placeholder 4"/>
-          <p:cNvSpPr>
-            <a:spLocks noGrp="1"/>
-          </p:cNvSpPr>
-          <p:nvPr>
-            <p:ph type="body" sz="quarter" idx="3"/>
-          </p:nvPr>
-        </p:nvSpPr>
-        <p:spPr>
-          <a:xfrm>
-            <a:off x="685800" y="4400550"/>
-            <a:ext cx="5486400" cy="3600450"/>
-          </a:xfrm>
-          <a:prstGeom prst="rect">
-            <a:avLst/>
-          </a:prstGeom>
-        </p:spPr>
-        <p:txBody>
-          <a:bodyPr vert="horz" lIns="91440" tIns="45720" rIns="91440" bIns="45720" rtlCol="0"/>
-          <a:lstStyle/>
-          <a:p>
-            <a:pPr lvl="0"/>
-            <a:r>
-              <a:rPr lang="en-US"/>
-              <a:t>Click to edit Master text styles</a:t>
-            </a:r>
-          </a:p>
-          <a:p>
-            <a:pPr lvl="1"/>
-            <a:r>
-              <a:rPr lang="en-US"/>
-              <a:t>Second level</a:t>
-            </a:r>
-          </a:p>
-          <a:p>
-            <a:pPr lvl="2"/>
-            <a:r>
-              <a:rPr lang="en-US"/>
-              <a:t>Third level</a:t>
-            </a:r>
-          </a:p>
-          <a:p>
-            <a:pPr lvl="3"/>
-            <a:r>
-              <a:rPr lang="en-US"/>
-              <a:t>Fourth level</a:t>
-            </a:r>
-          </a:p>
-          <a:p>
-            <a:pPr lvl="4"/>
-            <a:r>
-              <a:rPr lang="en-US"/>
-              <a:t>Fifth level</a:t>
-            </a:r>
-          </a:p>
-        </p:txBody>
-      </p:sp>
-      <p:sp>
-        <p:nvSpPr>
-          <p:cNvPr id="6" name="Footer Placeholder 5"/>
-          <p:cNvSpPr>
-            <a:spLocks noGrp="1"/>
-          </p:cNvSpPr>
-          <p:nvPr>
-            <p:ph type="ftr" sz="quarter" idx="4"/>
-          </p:nvPr>
-        </p:nvSpPr>
-        <p:spPr>
-          <a:xfrm>
-            <a:off x="0" y="8685213"/>
-            <a:ext cx="2971800" cy="458787"/>
-          </a:xfrm>
-          <a:prstGeom prst="rect">
-            <a:avLst/>
-          </a:prstGeom>
-        </p:spPr>
-        <p:txBody>
-          <a:bodyPr vert="horz" lIns="91440" tIns="45720" rIns="91440" bIns="45720" rtlCol="0" anchor="b"/>
-          <a:lstStyle>
-            <a:lvl1pPr algn="l">
-              <a:defRPr sz="1200"/>
-            </a:lvl1pPr>
-          </a:lstStyle>
-          <a:p>
-            <a:endParaRPr lang="en-US"/>
-          </a:p>
-        </p:txBody>
-      </p:sp>
-      <p:sp>
-        <p:nvSpPr>
-          <p:cNvPr id="7" name="Slide Number Placeholder 6"/>
-          <p:cNvSpPr>
-            <a:spLocks noGrp="1"/>
-          </p:cNvSpPr>
-          <p:nvPr>
-            <p:ph type="sldNum" sz="quarter" idx="5"/>
-          </p:nvPr>
-        </p:nvSpPr>
-        <p:spPr>
-          <a:xfrm>
-            <a:off x="3884613" y="8685213"/>
-            <a:ext cx="2971800" cy="458787"/>
-          </a:xfrm>
-          <a:prstGeom prst="rect">
-            <a:avLst/>
-          </a:prstGeom>
-        </p:spPr>
-        <p:txBody>
-          <a:bodyPr vert="horz" lIns="91440" tIns="45720" rIns="91440" bIns="45720" rtlCol="0" anchor="b"/>
-          <a:lstStyle>
-            <a:lvl1pPr algn="r">
-              <a:defRPr sz="1200"/>
-            </a:lvl1pPr>
-          </a:lstStyle>
-          <a:p>
-            <a:fld id="{CE5E9CC1-C706-0F49-92D6-E571CC5EEA8F}" type="slidenum">
-              <a:rPr lang="en-US"/>
-              <a:t>‹#›</a:t>
-            </a:fld>
-            <a:endParaRPr lang="en-US"/>
-          </a:p>
-        </p:txBody>
-      </p:sp>
     </p:spTree>
     <p:extLst>
       <p:ext uri="{BB962C8B-B14F-4D97-AF65-F5344CB8AC3E}">
-        <p14:creationId xmlns:p14="http://schemas.microsoft.com/office/powerpoint/2010/main" val="1024086991"/>
+        <p14:creationId xmlns:p14="http://schemas.microsoft.com/office/powerpoint/2010/main" val="3675792342"/>
       </p:ext>
     </p:extLst>
   </p:cSld>
@@ -1790,7 +1582,6 @@
               <a:rPr lang="en-US" dirty="0"/>
               <a:t>Chào thầy và các bạn. Đề tài của em là xây dựng hệ thống tìm ảnh kiến trúc Việt Nam bằng lời mô tả. Nói ngắn gọn: người dùng gõ một câu như 'cổng chùa có rồng trên mái', hoặc đưa vào một tấm ảnh, và hệ thống trả về những ảnh phù hợp nhất trong kho gần 7.800 ảnh. Phần chính của đề tài là dạy lại mô hình CLIP để nó hiểu ảnh kiến trúc Việt Nam tốt hơn. Em sẽ trình bày theo thứ tự: bài toán, cách em chuẩn bị dữ liệu, cách dạy lại mô hình và kết quả, rồi tới hệ thống và phần demo.</a:t>
             </a:r>
-            <a:endParaRPr lang="en-US" dirty="0"/>
           </a:p>
         </p:txBody>
       </p:sp>
@@ -1878,7 +1669,6 @@
               <a:rPr lang="en-US" dirty="0"/>
               <a:t>CLIP là mô hình của OpenAI. Ý tưởng rất đơn giản: nó biến cả ảnh và câu chữ thành những điểm trên cùng một bản đồ. Ảnh và câu có cùng ý thì nằm gần nhau, như hình ở giữa: chấm đỏ là ảnh, chấm vàng là câu. Tìm kiếm khi đó chỉ là tìm những ảnh nằm gần câu người dùng gõ. Vấn đề là CLIP học từ ảnh trên internet nói chung, nên chưa quen với kiến trúc Việt Nam. Khi em thử tìm trong toàn kho bằng CLIP gốc, chỉ khoảng một nửa số mô tả tìm thấy ảnh đúng trong 10 kết quả đầu.</a:t>
             </a:r>
-            <a:endParaRPr lang="en-US" dirty="0"/>
           </a:p>
         </p:txBody>
       </p:sp>
@@ -1966,7 +1756,6 @@
               <a:rPr lang="en-US" dirty="0"/>
               <a:t>Cách dạy lại khá trực quan. Mỗi lượt, mô hình nhận 256 ảnh và 256 mô tả, nhiệm vụ là ghép đúng ảnh với mô tả của nó. Làm đi làm lại, mô hình học được ảnh nào đi với cách mô tả nào. Em không dạy lại toàn bộ mà chỉ chỉnh 4 tầng cuối, khoảng 27% số tham số, để mô hình không quên những gì đã biết. Nhờ tính sẵn phần không thay đổi, việc train chạy được trên laptop, mất khoảng 65 phút. Và để chấm điểm công bằng, em tách riêng 776 ảnh mà mô hình không được thấy khi học.</a:t>
             </a:r>
-            <a:endParaRPr lang="en-US" dirty="0"/>
           </a:p>
         </p:txBody>
       </p:sp>
@@ -2054,7 +1843,6 @@
               <a:rPr lang="en-US" dirty="0"/>
               <a:t>Đây là kết quả quan trọng nhất. Em lấy mô tả của 776 ảnh để riêng làm câu tìm kiếm, xem mô hình có tìm ra đúng ảnh không. Với CLIP gốc, 47% trường hợp ảnh đúng nằm ngay kết quả đầu tiên; sau khi dạy lại, con số này là 77%. Khi tìm trong cả kho gần 7.800 ảnh, khó hơn nhiều, tỉ lệ ảnh đúng nằm trong 10 kết quả đầu tăng từ 52% lên 86%. Nói cách khác, trước đây gần một nửa số lần tìm không thấy ảnh đúng ở trang đầu, giờ chỉ còn khoảng 14%.</a:t>
             </a:r>
-            <a:endParaRPr lang="en-US" dirty="0"/>
           </a:p>
         </p:txBody>
       </p:sp>
@@ -2142,7 +1930,6 @@
               <a:rPr lang="en-US" dirty="0"/>
               <a:t>Đây là một ví dụ cụ thể. Câu tìm kiếm mô tả cổng chùa Đại Bi: cổng sắt có chữ vạn, biển tên chùa, mái có rồng. Hàng trên là 5 kết quả đầu của CLIP gốc, hàng dưới là của mô hình đã dạy lại; khung đen là ảnh đúng. CLIP gốc cũng hiểu ý chung, ảnh đầu tiên của nó vẫn là cổng Đại Bi nhưng là một tấm khác, và nó xen vào các ảnh chi tiết rồng trên mái, nên ảnh đúng bị đẩy xuống tận hạng 79. Mô hình mới đưa ảnh đúng lên hạng 1 và trả về toàn ảnh cổng có biển chữ. Em lưu ý ví dụ này được chọn để minh họa; con số khách quan là ở slide trước.</a:t>
             </a:r>
-            <a:endParaRPr lang="en-US" dirty="0"/>
           </a:p>
         </p:txBody>
       </p:sp>
@@ -2230,7 +2017,6 @@
               <a:rPr lang="en-US" dirty="0"/>
               <a:t>Với tìm ảnh giống ảnh, mức cải thiện nhỏ hơn: tính chung, trong 10 ảnh giống nhất, tỉ lệ cùng công trình tăng từ 53 lên 58%. Điều này dễ hiểu vì mô hình được dạy để ghép ảnh với mô tả, chứ không được dạy trực tiếp so ảnh với ảnh. Nhìn theo từng nhóm thì rõ hơn: cổng, bảo tháp, chùa Linh Phước tăng 8 đến 12 điểm, còn cảnh vườn thì không đổi, vì ít chi tiết kiến trúc để học.</a:t>
             </a:r>
-            <a:endParaRPr lang="en-US" dirty="0"/>
           </a:p>
         </p:txBody>
       </p:sp>
@@ -2318,7 +2104,6 @@
               <a:rPr lang="en-US" dirty="0"/>
               <a:t>Khi tìm bằng mô tả, hệ thống chạy ba cách cùng lúc. Cách thứ nhất so từ khóa, mạnh với tên riêng như CHÙA ĐẠI BI. Cách thứ hai so ý nghĩa: gõ 'place of worship', nơi thờ tự, hệ thống ra nhà thờ và đình làng dù trong mô tả không có từ nào trùng. Cách thứ ba là nơi CLIP đã dạy lại được dùng: so câu trực tiếp với tấm ảnh. Ví dụ 'ladder against a wall', cái thang dựa tường, nó tìm ra cả những ảnh có thang mà mô tả không nhắc tới. Ba danh sách được trộn lại: ảnh được nhiều cách cùng xếp cao sẽ lên đầu.</a:t>
             </a:r>
-            <a:endParaRPr lang="en-US" dirty="0"/>
           </a:p>
         </p:txBody>
       </p:sp>
@@ -2406,7 +2191,6 @@
               <a:rPr lang="en-US" dirty="0"/>
               <a:t>Về mặt kỹ thuật, hệ thống gồm ba phần. Giao diện web để người dùng tìm kiếm và thêm ảnh. Máy chủ viết bằng FastAPI nhận yêu cầu, gọi mô hình và trộn kết quả. Qdrant là cơ sở dữ liệu lưu 'tọa độ' của từng ảnh và mô tả trên bản đồ mà em nói lúc nãy, cùng với kho chứa file ảnh. Mô hình CLIP đã dạy lại chạy trong máy chủ. Khi đổi mô hình, chỉ cần tính lại tọa độ cho các ảnh, khoảng 7 phút cho cả kho.</a:t>
             </a:r>
-            <a:endParaRPr lang="en-US" dirty="0"/>
           </a:p>
         </p:txBody>
       </p:sp>
@@ -2494,7 +2278,6 @@
               <a:rPr lang="en-US" dirty="0"/>
               <a:t>Bây giờ em demo trực tiếp. [Chuyển sang trình duyệt, mở localhost:8000.] Một: gõ 'brick Cham tower'. Các bạn thấy mỗi ảnh có nhãn cho biết nó được tìm ra bằng từ khóa, ý nghĩa hay nội dung ảnh. Hai: gõ 'place of worship', thử chế độ Chỉ từ khóa, kết quả sai, có cả cây cầu; chuyển sang Kết hợp thì ra nhà thờ, đình làng. Ba: bấm vào một ảnh, chọn Tìm ảnh tương đồng. Bốn: dán một ảnh từ ngoài vào để tìm bằng ảnh mẫu. [Nếu demo lỗi: quay lại slide ví dụ để giải thích bằng hình.]</a:t>
             </a:r>
-            <a:endParaRPr lang="en-US" dirty="0"/>
           </a:p>
         </p:txBody>
       </p:sp>
@@ -2582,7 +2365,6 @@
               <a:rPr lang="en-US" dirty="0"/>
               <a:t>Về hạn chế: hệ thống mới tìm bằng tiếng Anh. Câu dùng để chấm điểm do AI viết nên dài và chi tiết hơn câu người dùng thật gõ, nên con số thực tế có thể thấp hơn một chút. Tìm ảnh giống ảnh mới cải thiện ít. Và theo ước lượng, khoảng 4% mô tả vẫn có thể sai. Hướng tiếp theo là hỗ trợ tiếng Việt, xây bộ câu hỏi do người thật viết để chấm điểm, dạy thêm cách so ảnh với ảnh, và thử mô hình lớn hơn khi có GPU.</a:t>
             </a:r>
-            <a:endParaRPr lang="en-US" dirty="0"/>
           </a:p>
         </p:txBody>
       </p:sp>
@@ -2670,7 +2452,6 @@
               <a:rPr lang="en-US" dirty="0"/>
               <a:t>Tóm lại, em đã làm ba việc: dùng hai AI viết và kiểm tra chéo mô tả cho gần 7.800 ảnh kiến trúc Việt Nam; dạy lại CLIP ngay trên laptop, giúp tỉ lệ tìm đúng ở kết quả đầu tăng từ 47 lên 77%; và xây dựng hệ thống web tìm bằng mô tả hoặc bằng ảnh. Em xin cảm ơn thầy và các bạn đã lắng nghe, em sẵn sàng nhận câu hỏi.</a:t>
             </a:r>
-            <a:endParaRPr lang="en-US" dirty="0"/>
           </a:p>
         </p:txBody>
       </p:sp>
@@ -2758,7 +2539,6 @@
               <a:rPr lang="en-US" dirty="0"/>
               <a:t>Vấn đề bắt đầu từ kho ảnh Wikimedia Commons. Ở đó có rất nhiều ảnh kiến trúc Việt Nam với giấy phép mở, nhưng phần mô tả do người tải lên tự viết nên thường rất sơ sài: có ảnh không có mô tả, có ảnh chỉ ghi tên địa danh. Vì vậy hiện nay chỉ tìm được theo tên tệp hoặc theo danh mục. Trong khi đó, người dùng thường muốn tìm theo cái họ nhìn thấy, ví dụ 'cổng chùa có tượng rồng trên mái'. Đề tài này giải quyết đúng khoảng trống đó: tìm ảnh theo nội dung.</a:t>
             </a:r>
-            <a:endParaRPr lang="en-US" dirty="0"/>
           </a:p>
         </p:txBody>
       </p:sp>
@@ -2846,7 +2626,6 @@
               <a:rPr lang="en-US" dirty="0"/>
               <a:t>Hệ thống làm được ba việc. Thứ nhất, tìm bằng lời mô tả: gõ một câu tiếng Anh, hệ thống trả về những ảnh khớp nhất. Thứ hai, tìm bằng ảnh mẫu: đưa vào một tấm ảnh, hệ thống tìm các ảnh có nội dung giống. Thứ ba, có thể thêm ảnh mới vào kho, và ảnh đó tìm được ngay. Lát nữa em sẽ demo cả ba việc này.</a:t>
             </a:r>
-            <a:endParaRPr lang="en-US" dirty="0"/>
           </a:p>
         </p:txBody>
       </p:sp>
@@ -2934,7 +2713,6 @@
               <a:rPr lang="en-US" dirty="0"/>
               <a:t>Toàn bộ đề tài gồm bốn bước. Một, thu thập ảnh từ Wikimedia Commons và làm sạch. Hai, dùng AI viết mô tả cho từng ảnh, vì ảnh gốc hầu như không có mô tả dùng được. Ba, dùng các cặp ảnh và mô tả đó để dạy lại mô hình CLIP. Đây là phần chính. Bốn, đưa mô hình vào một hệ thống tìm kiếm có giao diện web.</a:t>
             </a:r>
-            <a:endParaRPr lang="en-US" dirty="0"/>
           </a:p>
         </p:txBody>
       </p:sp>
@@ -3022,7 +2800,6 @@
               <a:rPr lang="en-US" dirty="0"/>
               <a:t>Em lấy ảnh từ danh mục 'Architecture of Vietnam' trên Wikimedia Commons, tải được 7.846 ảnh, kèm thông tin như tác giả, giấy phép, danh mục, tọa độ. Sau đó em lọc bỏ 84 ảnh: ảnh quá nhỏ, ảnh toàn cảnh quá dài vì khi đưa vào mô hình sẽ bị cắt mất phần lớn, và ảnh trùng nhau. Ảnh trùng được phát hiện bằng một loại dấu vân tay của ảnh, gọi là perceptual hash. Còn lại 7.762 ảnh sạch.</a:t>
             </a:r>
-            <a:endParaRPr lang="en-US" dirty="0"/>
           </a:p>
         </p:txBody>
       </p:sp>
@@ -3110,7 +2887,6 @@
               <a:rPr lang="en-US" dirty="0"/>
               <a:t>Ảnh có rồi, nhưng không có mô tả. Viết tay gần 7.800 mô tả thì không khả thi, nên em dùng hai mô hình AI có khả năng đọc ảnh là Qwen và Gemma, chạy ngay trên máy. Cả hai nhận cùng một yêu cầu: mô tả bằng tiếng Anh, khoảng 15 đến 40 từ, chỉ tả những gì nhìn thấy. Em cấm AI đoán tên công trình, vì nếu nó đoán sai thì mô hình sẽ học sai. Mô tả thu được giống cách người dùng thật gõ khi tìm kiếm, ví dụ như câu bên phải.</a:t>
             </a:r>
-            <a:endParaRPr lang="en-US" dirty="0"/>
           </a:p>
         </p:txBody>
       </p:sp>
@@ -3198,7 +2974,6 @@
               <a:rPr lang="en-US" dirty="0"/>
               <a:t>Làm sao biết AI viết đúng? Em dùng cách kiểm tra chéo. Mỗi ảnh có hai mô tả từ hai AI khác nhau. Nếu hai mô tả có ý giống nhau, rất khó có chuyện cả hai cùng sai theo một kiểu, nên em giữ mô tả của Qwen. Nếu hai mô tả khác nhau nhiều, có thể một trong hai đã sai, và em xem ảnh để chọn lại hoặc tự viết lại. Để chọn ngưỡng thế nào là giống nhau, em chấm tay 100 ảnh mẫu, thấy mô tả của Qwen đúng 94 trên 100. Kết quả: khoảng 89% số ảnh được chấp nhận tự động, chỉ 861 ảnh, khoảng 11%, cần người xem.</a:t>
             </a:r>
-            <a:endParaRPr lang="en-US" dirty="0"/>
           </a:p>
         </p:txBody>
       </p:sp>
@@ -3286,7 +3061,6 @@
               <a:rPr lang="en-US" dirty="0"/>
               <a:t>Đây là vài ví dụ thật cho thấy vì sao cần kiểm tra chéo. Một bức phù điêu đá màu xanh, Qwen lại tả thành cảnh dưới nước có cá bơi. Một cổng đình, Qwen tự đoán tên đình dù em đã yêu cầu không đoán. Ở hai trường hợp này em chọn mô tả của Gemma. Có trường hợp cả hai đều sai, em phải tự viết lại. Trong 861 ảnh xem lại, em đổi 318 ảnh so với lựa chọn mặc định.</a:t>
             </a:r>
-            <a:endParaRPr lang="en-US" dirty="0"/>
           </a:p>
         </p:txBody>
       </p:sp>
@@ -3374,7 +3148,6 @@
               <a:rPr lang="en-US" dirty="0"/>
               <a:t>Sau bước này em có 7.756 cặp ảnh và mô tả, mỗi mô tả trung bình 27 từ. Phần lớn là ảnh mặt ngoài công trình, nhưng cũng có nội thất, chi tiết trang trí, tượng và bản vẽ. Đây là dữ liệu dùng để dạy lại mô hình ở phần tiếp theo.</a:t>
             </a:r>
-            <a:endParaRPr lang="en-US" dirty="0"/>
           </a:p>
         </p:txBody>
       </p:sp>
@@ -3452,6 +3225,7 @@
         <a:solidFill>
           <a:schemeClr val="tx1"/>
         </a:solidFill>
+        <a:effectLst/>
       </p:bgPr>
     </p:bg>
     <p:spTree>
@@ -3471,9 +3245,11 @@
       <p:sp>
         <p:nvSpPr>
           <p:cNvPr id="2" name="Text 0"/>
-          <p:cNvSpPr/>
+          <p:cNvSpPr>
+            <a:spLocks noGrp="1"/>
+          </p:cNvSpPr>
           <p:nvPr>
-            <p:ph idx="100" type="title" hasCustomPrompt="1"/>
+            <p:ph type="title" idx="100" hasCustomPrompt="1"/>
           </p:nvPr>
         </p:nvSpPr>
         <p:spPr>
@@ -3490,7 +3266,7 @@
         <p:txBody>
           <a:bodyPr wrap="square" rtlCol="0"/>
           <a:lstStyle>
-            <a:lvl1pPr algn="l" indent="0" marL="0">
+            <a:lvl1pPr marL="0" indent="0" algn="l">
               <a:buNone/>
               <a:defRPr lang="en-US" sz="3600" b="1" dirty="0">
                 <a:solidFill>
@@ -3503,7 +3279,7 @@
             </a:lvl1pPr>
           </a:lstStyle>
           <a:p>
-            <a:pPr algn="l" indent="0" marL="0">
+            <a:pPr marL="0" indent="0" algn="l">
               <a:buNone/>
             </a:pPr>
             <a:endParaRPr lang="en-US" sz="3600" dirty="0"/>
@@ -3513,9 +3289,11 @@
       <p:sp>
         <p:nvSpPr>
           <p:cNvPr id="3" name="Text 0"/>
-          <p:cNvSpPr/>
+          <p:cNvSpPr>
+            <a:spLocks noGrp="1"/>
+          </p:cNvSpPr>
           <p:nvPr>
-            <p:ph idx="101" type="body" hasCustomPrompt="1"/>
+            <p:ph type="body" idx="101" hasCustomPrompt="1"/>
           </p:nvPr>
         </p:nvSpPr>
         <p:spPr>
@@ -3532,7 +3310,7 @@
         <p:txBody>
           <a:bodyPr wrap="square" rtlCol="0"/>
           <a:lstStyle>
-            <a:lvl1pPr algn="l" indent="0" marL="0">
+            <a:lvl1pPr marL="0" indent="0" algn="l">
               <a:buNone/>
               <a:defRPr lang="en-US" sz="1600" dirty="0">
                 <a:solidFill>
@@ -3542,7 +3320,7 @@
             </a:lvl1pPr>
           </a:lstStyle>
           <a:p>
-            <a:pPr algn="l" indent="0" marL="0">
+            <a:pPr marL="0" indent="0" algn="l">
               <a:buNone/>
             </a:pPr>
             <a:endParaRPr lang="en-US" sz="1600" dirty="0"/>
@@ -3565,6 +3343,7 @@
         <a:solidFill>
           <a:schemeClr val="tx1"/>
         </a:solidFill>
+        <a:effectLst/>
       </p:bgPr>
     </p:bg>
     <p:spTree>
@@ -3584,9 +3363,11 @@
       <p:sp>
         <p:nvSpPr>
           <p:cNvPr id="2" name="Text 0"/>
-          <p:cNvSpPr/>
+          <p:cNvSpPr>
+            <a:spLocks noGrp="1"/>
+          </p:cNvSpPr>
           <p:nvPr>
-            <p:ph idx="100" type="title" hasCustomPrompt="1"/>
+            <p:ph type="title" idx="100" hasCustomPrompt="1"/>
           </p:nvPr>
         </p:nvSpPr>
         <p:spPr>
@@ -3603,7 +3384,7 @@
         <p:txBody>
           <a:bodyPr wrap="square" rtlCol="0"/>
           <a:lstStyle>
-            <a:lvl1pPr algn="l" indent="0" marL="0">
+            <a:lvl1pPr marL="0" indent="0" algn="l">
               <a:buNone/>
               <a:defRPr lang="en-US" sz="3400" b="1" dirty="0">
                 <a:solidFill>
@@ -3616,7 +3397,7 @@
             </a:lvl1pPr>
           </a:lstStyle>
           <a:p>
-            <a:pPr algn="l" indent="0" marL="0">
+            <a:pPr marL="0" indent="0" algn="l">
               <a:buNone/>
             </a:pPr>
             <a:endParaRPr lang="en-US" sz="3400" dirty="0"/>
@@ -3626,9 +3407,11 @@
       <p:sp>
         <p:nvSpPr>
           <p:cNvPr id="3" name="Text 0"/>
-          <p:cNvSpPr/>
+          <p:cNvSpPr>
+            <a:spLocks noGrp="1"/>
+          </p:cNvSpPr>
           <p:nvPr>
-            <p:ph idx="101" type="body" hasCustomPrompt="1"/>
+            <p:ph type="body" idx="101" hasCustomPrompt="1"/>
           </p:nvPr>
         </p:nvSpPr>
         <p:spPr>
@@ -3645,7 +3428,7 @@
         <p:txBody>
           <a:bodyPr wrap="square" rtlCol="0"/>
           <a:lstStyle>
-            <a:lvl1pPr algn="l" indent="0" marL="0">
+            <a:lvl1pPr marL="0" indent="0" algn="l">
               <a:buNone/>
               <a:defRPr lang="en-US" sz="1600" dirty="0">
                 <a:solidFill>
@@ -3655,7 +3438,7 @@
             </a:lvl1pPr>
           </a:lstStyle>
           <a:p>
-            <a:pPr algn="l" indent="0" marL="0">
+            <a:pPr marL="0" indent="0" algn="l">
               <a:buNone/>
             </a:pPr>
             <a:endParaRPr lang="en-US" sz="1600" dirty="0"/>
@@ -3682,7 +3465,7 @@
           </a:prstGeom>
           <a:extLst>
             <a:ext uri="{C572A759-6A51-4108-AA02-DFA0A04FC94B}">
-              <ma14:wrappingTextBoxFlag xmlns:ma14="http://schemas.microsoft.com/office/mac/drawingml/2011/main" val="0"/>
+              <ma14:wrappingTextBoxFlag xmlns:ma14="http://schemas.microsoft.com/office/mac/drawingml/2011/main" xmlns="" val="0"/>
             </a:ext>
           </a:extLst>
         </p:spPr>
@@ -3700,8 +3483,8 @@
           <a:p>
             <a:pPr algn="l"/>
             <a:fld id="{F7021451-1387-4CA6-816F-3879F97B5CBC}" type="slidenum">
-              <a:rPr b="0" lang="en-US"/>
-              <a:t>1003</a:t>
+              <a:rPr lang="en-US" b="0"/>
+              <a:t>‹#›</a:t>
             </a:fld>
             <a:endParaRPr lang="en-US"/>
           </a:p>
@@ -3723,6 +3506,7 @@
         <a:solidFill>
           <a:schemeClr val="tx1"/>
         </a:solidFill>
+        <a:effectLst/>
       </p:bgPr>
     </p:bg>
     <p:spTree>
@@ -3742,9 +3526,11 @@
       <p:sp>
         <p:nvSpPr>
           <p:cNvPr id="2" name="Text 0"/>
-          <p:cNvSpPr/>
+          <p:cNvSpPr>
+            <a:spLocks noGrp="1"/>
+          </p:cNvSpPr>
           <p:nvPr>
-            <p:ph idx="100" type="title" hasCustomPrompt="1"/>
+            <p:ph type="title" idx="100" hasCustomPrompt="1"/>
           </p:nvPr>
         </p:nvSpPr>
         <p:spPr>
@@ -3761,7 +3547,7 @@
         <p:txBody>
           <a:bodyPr wrap="square" rtlCol="0"/>
           <a:lstStyle>
-            <a:lvl1pPr algn="l" indent="0" marL="0">
+            <a:lvl1pPr marL="0" indent="0" algn="l">
               <a:buNone/>
               <a:defRPr lang="en-US" sz="3400" b="1" dirty="0">
                 <a:solidFill>
@@ -3774,7 +3560,7 @@
             </a:lvl1pPr>
           </a:lstStyle>
           <a:p>
-            <a:pPr algn="l" indent="0" marL="0">
+            <a:pPr marL="0" indent="0" algn="l">
               <a:buNone/>
             </a:pPr>
             <a:endParaRPr lang="en-US" sz="3400" dirty="0"/>
@@ -3784,9 +3570,11 @@
       <p:sp>
         <p:nvSpPr>
           <p:cNvPr id="3" name="Text 0"/>
-          <p:cNvSpPr/>
+          <p:cNvSpPr>
+            <a:spLocks noGrp="1"/>
+          </p:cNvSpPr>
           <p:nvPr>
-            <p:ph idx="101" type="body" hasCustomPrompt="1"/>
+            <p:ph type="body" idx="101" hasCustomPrompt="1"/>
           </p:nvPr>
         </p:nvSpPr>
         <p:spPr>
@@ -3803,7 +3591,7 @@
         <p:txBody>
           <a:bodyPr wrap="square" rtlCol="0"/>
           <a:lstStyle>
-            <a:lvl1pPr algn="l" indent="0" marL="0">
+            <a:lvl1pPr marL="0" indent="0" algn="l">
               <a:buNone/>
               <a:defRPr lang="en-US" sz="1800" dirty="0">
                 <a:solidFill>
@@ -3813,7 +3601,7 @@
             </a:lvl1pPr>
           </a:lstStyle>
           <a:p>
-            <a:pPr algn="l" indent="0" marL="0">
+            <a:pPr marL="0" indent="0" algn="l">
               <a:buNone/>
             </a:pPr>
             <a:endParaRPr lang="en-US" sz="1800" dirty="0"/>
@@ -3836,6 +3624,7 @@
         <a:solidFill>
           <a:schemeClr val="bg1"/>
         </a:solidFill>
+        <a:effectLst/>
       </p:bgPr>
     </p:bg>
     <p:spTree>
@@ -3855,9 +3644,11 @@
       <p:sp>
         <p:nvSpPr>
           <p:cNvPr id="2" name="Text 0"/>
-          <p:cNvSpPr/>
+          <p:cNvSpPr>
+            <a:spLocks noGrp="1"/>
+          </p:cNvSpPr>
           <p:nvPr>
-            <p:ph idx="100" type="title" hasCustomPrompt="1"/>
+            <p:ph type="title" idx="100" hasCustomPrompt="1"/>
           </p:nvPr>
         </p:nvSpPr>
         <p:spPr>
@@ -3874,7 +3665,7 @@
         <p:txBody>
           <a:bodyPr wrap="square" rtlCol="0"/>
           <a:lstStyle>
-            <a:lvl1pPr algn="l" indent="0" marL="0">
+            <a:lvl1pPr marL="0" indent="0" algn="l">
               <a:buNone/>
               <a:defRPr lang="en-US" sz="2800" b="1" dirty="0">
                 <a:solidFill>
@@ -3887,7 +3678,7 @@
             </a:lvl1pPr>
           </a:lstStyle>
           <a:p>
-            <a:pPr algn="l" indent="0" marL="0">
+            <a:pPr marL="0" indent="0" algn="l">
               <a:buNone/>
             </a:pPr>
             <a:endParaRPr lang="en-US" sz="2800" dirty="0"/>
@@ -3914,7 +3705,7 @@
           </a:prstGeom>
           <a:extLst>
             <a:ext uri="{C572A759-6A51-4108-AA02-DFA0A04FC94B}">
-              <ma14:wrappingTextBoxFlag xmlns:ma14="http://schemas.microsoft.com/office/mac/drawingml/2011/main" val="0"/>
+              <ma14:wrappingTextBoxFlag xmlns:ma14="http://schemas.microsoft.com/office/mac/drawingml/2011/main" xmlns="" val="0"/>
             </a:ext>
           </a:extLst>
         </p:spPr>
@@ -3932,8 +3723,8 @@
           <a:p>
             <a:pPr algn="l"/>
             <a:fld id="{F7021451-1387-4CA6-816F-3879F97B5CBC}" type="slidenum">
-              <a:rPr b="0" lang="en-US"/>
-              <a:t>1005</a:t>
+              <a:rPr lang="en-US" b="0"/>
+              <a:t>‹#›</a:t>
             </a:fld>
             <a:endParaRPr lang="en-US"/>
           </a:p>
@@ -3950,6 +3741,11 @@
 <file path=ppt/slideMasters/slideMaster1.xml><?xml version="1.0" encoding="utf-8"?>
 <p:sldMaster xmlns:a="http://schemas.openxmlformats.org/drawingml/2006/main" xmlns:r="http://schemas.openxmlformats.org/officeDocument/2006/relationships" xmlns:p="http://schemas.openxmlformats.org/presentationml/2006/main">
   <p:cSld>
+    <p:bg>
+      <p:bgRef idx="1001">
+        <a:schemeClr val="bg1"/>
+      </p:bgRef>
+    </p:bg>
     <p:spTree>
       <p:nvGrpSpPr>
         <p:cNvPr id="1" name=""/>
@@ -3984,7 +3780,7 @@
           </a:prstGeom>
           <a:extLst>
             <a:ext uri="{C572A759-6A51-4108-AA02-DFA0A04FC94B}">
-              <ma14:wrappingTextBoxFlag xmlns:ma14="http://schemas.microsoft.com/office/mac/drawingml/2011/main" val="0"/>
+              <ma14:wrappingTextBoxFlag xmlns:ma14="http://schemas.microsoft.com/office/mac/drawingml/2011/main" xmlns="" val="0"/>
             </a:ext>
           </a:extLst>
         </p:spPr>
@@ -4002,8 +3798,8 @@
           <a:p>
             <a:pPr algn="l"/>
             <a:fld id="{F7021451-1387-4CA6-816F-3879F97B5CBC}" type="slidenum">
-              <a:rPr b="0" lang="en-US"/>
-              <a:t>null</a:t>
+              <a:rPr lang="en-US" b="0"/>
+              <a:t>‹#›</a:t>
             </a:fld>
             <a:endParaRPr lang="en-US"/>
           </a:p>
@@ -4293,9 +4089,11 @@
       <p:sp>
         <p:nvSpPr>
           <p:cNvPr id="2" name="Text 0"/>
-          <p:cNvSpPr/>
+          <p:cNvSpPr>
+            <a:spLocks noGrp="1"/>
+          </p:cNvSpPr>
           <p:nvPr>
-            <p:ph idx="100" type="title" hasCustomPrompt="1"/>
+            <p:ph type="title" idx="100" hasCustomPrompt="1"/>
           </p:nvPr>
         </p:nvSpPr>
         <p:spPr>
@@ -4313,7 +4111,7 @@
           <a:bodyPr wrap="square" rtlCol="0" anchor="b"/>
           <a:lstStyle/>
           <a:p>
-            <a:pPr algn="l" indent="0" marL="0">
+            <a:pPr marL="0" indent="0" algn="l">
               <a:buNone/>
             </a:pPr>
             <a:r>
@@ -4334,15 +4132,17 @@
       <p:sp>
         <p:nvSpPr>
           <p:cNvPr id="3" name="Text 0"/>
-          <p:cNvSpPr/>
+          <p:cNvSpPr>
+            <a:spLocks noGrp="1"/>
+          </p:cNvSpPr>
           <p:nvPr>
-            <p:ph idx="101" type="body" hasCustomPrompt="1"/>
+            <p:ph type="body" idx="101" hasCustomPrompt="1"/>
           </p:nvPr>
         </p:nvSpPr>
         <p:spPr>
           <a:xfrm>
-            <a:off x="640080" y="2926080"/>
-            <a:ext cx="7863840" cy="1097280"/>
+            <a:off x="640080" y="2926079"/>
+            <a:ext cx="7863840" cy="1854077"/>
           </a:xfrm>
           <a:prstGeom prst="rect">
             <a:avLst/>
@@ -4354,7 +4154,7 @@
           <a:bodyPr wrap="square" rtlCol="0" anchor="t"/>
           <a:lstStyle/>
           <a:p>
-            <a:pPr algn="l" indent="0" marL="0">
+            <a:pPr marL="0" indent="0" algn="l">
               <a:buNone/>
             </a:pPr>
             <a:r>
@@ -4363,21 +4163,484 @@
                   <a:schemeClr val="accent6"/>
                 </a:solidFill>
               </a:rPr>
-              <a:t>Dạy lại mô hình CLIP bằng mô tả do AI viết, rồi đưa vào một hệ thống tìm kiếm</a:t>
-            </a:r>
+              <a:t>Dạy lại mô hình CLIP bằng mô tả do AI viết, rồi đưa vào một hệ thống </a:t>
+            </a:r>
+            <a:r>
+              <a:rPr lang="en-US" sz="1600" dirty="0" err="1">
+                <a:solidFill>
+                  <a:schemeClr val="accent6"/>
+                </a:solidFill>
+              </a:rPr>
+              <a:t>tìm</a:t>
+            </a:r>
+            <a:r>
+              <a:rPr lang="en-US" sz="1600" dirty="0">
+                <a:solidFill>
+                  <a:schemeClr val="accent6"/>
+                </a:solidFill>
+              </a:rPr>
+              <a:t> </a:t>
+            </a:r>
+            <a:r>
+              <a:rPr lang="en-US" sz="1600" dirty="0" err="1">
+                <a:solidFill>
+                  <a:schemeClr val="accent6"/>
+                </a:solidFill>
+              </a:rPr>
+              <a:t>kiếm</a:t>
+            </a:r>
+            <a:endParaRPr lang="en-US" sz="1600" dirty="0">
+              <a:solidFill>
+                <a:schemeClr val="accent6"/>
+              </a:solidFill>
+            </a:endParaRPr>
+          </a:p>
+          <a:p>
+            <a:pPr marL="0" indent="0" algn="l">
+              <a:buNone/>
+            </a:pPr>
             <a:endParaRPr lang="en-US" sz="1600" dirty="0"/>
           </a:p>
           <a:p>
-            <a:pPr algn="l" indent="0" marL="0">
+            <a:pPr marL="0" indent="0" algn="l">
               <a:buNone/>
             </a:pPr>
             <a:r>
+              <a:rPr lang="en-US" sz="1600" dirty="0" err="1">
+                <a:solidFill>
+                  <a:schemeClr val="accent6"/>
+                </a:solidFill>
+              </a:rPr>
+              <a:t>Võ</a:t>
+            </a:r>
+            <a:r>
               <a:rPr lang="en-US" sz="1600" dirty="0">
                 <a:solidFill>
                   <a:schemeClr val="accent6"/>
                 </a:solidFill>
               </a:rPr>
-              <a:t>[Họ tên] · [Lớp / học phần] · [Ngày báo cáo]</a:t>
+              <a:t> </a:t>
+            </a:r>
+            <a:r>
+              <a:rPr lang="en-US" sz="1600" dirty="0" err="1">
+                <a:solidFill>
+                  <a:schemeClr val="accent6"/>
+                </a:solidFill>
+              </a:rPr>
+              <a:t>Duy</a:t>
+            </a:r>
+            <a:r>
+              <a:rPr lang="en-US" sz="1600" dirty="0">
+                <a:solidFill>
+                  <a:schemeClr val="accent6"/>
+                </a:solidFill>
+              </a:rPr>
+              <a:t> </a:t>
+            </a:r>
+            <a:r>
+              <a:rPr lang="en-US" sz="1600" dirty="0" err="1">
+                <a:solidFill>
+                  <a:schemeClr val="accent6"/>
+                </a:solidFill>
+              </a:rPr>
+              <a:t>Luân</a:t>
+            </a:r>
+            <a:r>
+              <a:rPr lang="en-US" sz="1600" dirty="0">
+                <a:solidFill>
+                  <a:schemeClr val="accent6"/>
+                </a:solidFill>
+              </a:rPr>
+              <a:t> – </a:t>
+            </a:r>
+            <a:r>
+              <a:rPr lang="en-US" sz="1600" dirty="0" err="1">
+                <a:solidFill>
+                  <a:schemeClr val="accent6"/>
+                </a:solidFill>
+              </a:rPr>
+              <a:t>Nguyễn</a:t>
+            </a:r>
+            <a:r>
+              <a:rPr lang="en-US" sz="1600" dirty="0">
+                <a:solidFill>
+                  <a:schemeClr val="accent6"/>
+                </a:solidFill>
+              </a:rPr>
+              <a:t> </a:t>
+            </a:r>
+            <a:r>
+              <a:rPr lang="en-US" sz="1600" dirty="0" err="1">
+                <a:solidFill>
+                  <a:schemeClr val="accent6"/>
+                </a:solidFill>
+              </a:rPr>
+              <a:t>Huỳnh</a:t>
+            </a:r>
+            <a:r>
+              <a:rPr lang="en-US" sz="1600" dirty="0">
+                <a:solidFill>
+                  <a:schemeClr val="accent6"/>
+                </a:solidFill>
+              </a:rPr>
+              <a:t> </a:t>
+            </a:r>
+            <a:r>
+              <a:rPr lang="en-US" sz="1600" dirty="0" err="1">
+                <a:solidFill>
+                  <a:schemeClr val="accent6"/>
+                </a:solidFill>
+              </a:rPr>
+              <a:t>Duyên</a:t>
+            </a:r>
+            <a:r>
+              <a:rPr lang="en-US" sz="1600" dirty="0">
+                <a:solidFill>
+                  <a:schemeClr val="accent6"/>
+                </a:solidFill>
+              </a:rPr>
+              <a:t> </a:t>
+            </a:r>
+          </a:p>
+          <a:p>
+            <a:pPr marL="0" indent="0" algn="l">
+              <a:buNone/>
+            </a:pPr>
+            <a:endParaRPr lang="en-US" sz="1600" dirty="0">
+              <a:solidFill>
+                <a:schemeClr val="accent6"/>
+              </a:solidFill>
+            </a:endParaRPr>
+          </a:p>
+          <a:p>
+            <a:r>
+              <a:rPr lang="en-US" sz="1600" dirty="0">
+                <a:solidFill>
+                  <a:schemeClr val="accent6"/>
+                </a:solidFill>
+              </a:rPr>
+              <a:t>[ ] </a:t>
+            </a:r>
+            <a:r>
+              <a:rPr lang="en-US" sz="1600" dirty="0" err="1">
+                <a:solidFill>
+                  <a:schemeClr val="accent6"/>
+                </a:solidFill>
+              </a:rPr>
+              <a:t>Học</a:t>
+            </a:r>
+            <a:r>
+              <a:rPr lang="en-US" sz="1600" dirty="0">
+                <a:solidFill>
+                  <a:schemeClr val="accent6"/>
+                </a:solidFill>
+              </a:rPr>
+              <a:t> </a:t>
+            </a:r>
+            <a:r>
+              <a:rPr lang="en-US" sz="1600" dirty="0" err="1">
+                <a:solidFill>
+                  <a:schemeClr val="accent6"/>
+                </a:solidFill>
+              </a:rPr>
+              <a:t>phần</a:t>
+            </a:r>
+            <a:r>
+              <a:rPr lang="en-US" sz="1600" dirty="0">
+                <a:solidFill>
+                  <a:schemeClr val="accent6"/>
+                </a:solidFill>
+              </a:rPr>
+              <a:t> : </a:t>
+            </a:r>
+            <a:r>
+              <a:rPr lang="en-US" sz="1600" dirty="0" err="1">
+                <a:solidFill>
+                  <a:schemeClr val="accent6"/>
+                </a:solidFill>
+              </a:rPr>
+              <a:t>Trí</a:t>
+            </a:r>
+            <a:r>
+              <a:rPr lang="en-US" sz="1600" dirty="0">
+                <a:solidFill>
+                  <a:schemeClr val="accent6"/>
+                </a:solidFill>
+              </a:rPr>
+              <a:t> </a:t>
+            </a:r>
+            <a:r>
+              <a:rPr lang="en-US" sz="1600" dirty="0" err="1">
+                <a:solidFill>
+                  <a:schemeClr val="accent6"/>
+                </a:solidFill>
+              </a:rPr>
+              <a:t>tuệ</a:t>
+            </a:r>
+            <a:r>
+              <a:rPr lang="en-US" sz="1600" dirty="0">
+                <a:solidFill>
+                  <a:schemeClr val="accent6"/>
+                </a:solidFill>
+              </a:rPr>
+              <a:t> </a:t>
+            </a:r>
+            <a:r>
+              <a:rPr lang="en-US" sz="1600" dirty="0" err="1">
+                <a:solidFill>
+                  <a:schemeClr val="accent6"/>
+                </a:solidFill>
+              </a:rPr>
+              <a:t>nhân</a:t>
+            </a:r>
+            <a:r>
+              <a:rPr lang="en-US" sz="1600" dirty="0">
+                <a:solidFill>
+                  <a:schemeClr val="accent6"/>
+                </a:solidFill>
+              </a:rPr>
+              <a:t> </a:t>
+            </a:r>
+            <a:r>
+              <a:rPr lang="en-US" sz="1600" dirty="0" err="1">
+                <a:solidFill>
+                  <a:schemeClr val="accent6"/>
+                </a:solidFill>
+              </a:rPr>
+              <a:t>tạo</a:t>
+            </a:r>
+            <a:r>
+              <a:rPr lang="en-US" sz="1600" dirty="0">
+                <a:solidFill>
+                  <a:schemeClr val="accent6"/>
+                </a:solidFill>
+              </a:rPr>
+              <a:t> </a:t>
+            </a:r>
+            <a:r>
+              <a:rPr lang="en-US" sz="1600" dirty="0" err="1">
+                <a:solidFill>
+                  <a:schemeClr val="accent6"/>
+                </a:solidFill>
+              </a:rPr>
+              <a:t>nâng</a:t>
+            </a:r>
+            <a:r>
+              <a:rPr lang="en-US" sz="1600" dirty="0">
+                <a:solidFill>
+                  <a:schemeClr val="accent6"/>
+                </a:solidFill>
+              </a:rPr>
+              <a:t> </a:t>
+            </a:r>
+            <a:r>
+              <a:rPr lang="en-US" sz="1600" dirty="0" err="1">
+                <a:solidFill>
+                  <a:schemeClr val="accent6"/>
+                </a:solidFill>
+              </a:rPr>
+              <a:t>cao</a:t>
+            </a:r>
+            <a:r>
+              <a:rPr lang="en-US" dirty="0"/>
+              <a:t> </a:t>
+            </a:r>
+            <a:r>
+              <a:rPr lang="en-US" sz="1600" dirty="0">
+                <a:solidFill>
+                  <a:schemeClr val="accent6"/>
+                </a:solidFill>
+              </a:rPr>
+              <a:t>· GVHD: </a:t>
+            </a:r>
+            <a:r>
+              <a:rPr lang="en-US" sz="1600" dirty="0" err="1">
+                <a:solidFill>
+                  <a:schemeClr val="accent6"/>
+                </a:solidFill>
+              </a:rPr>
+              <a:t>Nguyễn</a:t>
+            </a:r>
+            <a:r>
+              <a:rPr lang="en-US" sz="1600" dirty="0">
+                <a:solidFill>
+                  <a:schemeClr val="accent6"/>
+                </a:solidFill>
+              </a:rPr>
+              <a:t> </a:t>
+            </a:r>
+            <a:r>
+              <a:rPr lang="en-US" sz="1600" dirty="0" err="1">
+                <a:solidFill>
+                  <a:schemeClr val="accent6"/>
+                </a:solidFill>
+              </a:rPr>
+              <a:t>Thị</a:t>
+            </a:r>
+            <a:r>
+              <a:rPr lang="en-US" dirty="0"/>
+              <a:t> </a:t>
+            </a:r>
+            <a:r>
+              <a:rPr lang="en-US" dirty="0" err="1"/>
+              <a:t>Khánh</a:t>
+            </a:r>
+            <a:r>
+              <a:rPr lang="en-US" sz="1600" dirty="0">
+                <a:solidFill>
+                  <a:schemeClr val="accent6"/>
+                </a:solidFill>
+              </a:rPr>
+              <a:t> </a:t>
+            </a:r>
+            <a:r>
+              <a:rPr lang="en-US" sz="1600" dirty="0" err="1">
+                <a:solidFill>
+                  <a:schemeClr val="accent6"/>
+                </a:solidFill>
+              </a:rPr>
+              <a:t>Tiên</a:t>
+            </a:r>
+            <a:endParaRPr lang="en-US" sz="1600" dirty="0">
+              <a:solidFill>
+                <a:schemeClr val="accent6"/>
+              </a:solidFill>
+            </a:endParaRPr>
+          </a:p>
+          <a:p>
+            <a:r>
+              <a:rPr lang="en-US" sz="1600" dirty="0">
+                <a:solidFill>
+                  <a:schemeClr val="accent6"/>
+                </a:solidFill>
+              </a:rPr>
+              <a:t>[ ] </a:t>
+            </a:r>
+            <a:r>
+              <a:rPr lang="en-US" sz="1600" dirty="0" err="1">
+                <a:solidFill>
+                  <a:schemeClr val="accent6"/>
+                </a:solidFill>
+              </a:rPr>
+              <a:t>Học</a:t>
+            </a:r>
+            <a:r>
+              <a:rPr lang="en-US" sz="1600" dirty="0">
+                <a:solidFill>
+                  <a:schemeClr val="accent6"/>
+                </a:solidFill>
+              </a:rPr>
+              <a:t> </a:t>
+            </a:r>
+            <a:r>
+              <a:rPr lang="en-US" sz="1600" dirty="0" err="1">
+                <a:solidFill>
+                  <a:schemeClr val="accent6"/>
+                </a:solidFill>
+              </a:rPr>
+              <a:t>phần</a:t>
+            </a:r>
+            <a:r>
+              <a:rPr lang="en-US" sz="1600" dirty="0">
+                <a:solidFill>
+                  <a:schemeClr val="accent6"/>
+                </a:solidFill>
+              </a:rPr>
+              <a:t> : </a:t>
+            </a:r>
+            <a:r>
+              <a:rPr lang="en-US" sz="1600" dirty="0" err="1">
+                <a:solidFill>
+                  <a:schemeClr val="accent6"/>
+                </a:solidFill>
+              </a:rPr>
+              <a:t>Khai</a:t>
+            </a:r>
+            <a:r>
+              <a:rPr lang="en-US" sz="1600" dirty="0">
+                <a:solidFill>
+                  <a:schemeClr val="accent6"/>
+                </a:solidFill>
+              </a:rPr>
+              <a:t> </a:t>
+            </a:r>
+            <a:r>
+              <a:rPr lang="en-US" sz="1600" dirty="0" err="1">
+                <a:solidFill>
+                  <a:schemeClr val="accent6"/>
+                </a:solidFill>
+              </a:rPr>
+              <a:t>thác</a:t>
+            </a:r>
+            <a:r>
+              <a:rPr lang="en-US" sz="1600" dirty="0">
+                <a:solidFill>
+                  <a:schemeClr val="accent6"/>
+                </a:solidFill>
+              </a:rPr>
+              <a:t> </a:t>
+            </a:r>
+            <a:r>
+              <a:rPr lang="en-US" sz="1600" dirty="0" err="1">
+                <a:solidFill>
+                  <a:schemeClr val="accent6"/>
+                </a:solidFill>
+              </a:rPr>
+              <a:t>dữ</a:t>
+            </a:r>
+            <a:r>
+              <a:rPr lang="en-US" sz="1600" dirty="0">
+                <a:solidFill>
+                  <a:schemeClr val="accent6"/>
+                </a:solidFill>
+              </a:rPr>
+              <a:t> lieu · GVHD: </a:t>
+            </a:r>
+            <a:r>
+              <a:rPr lang="en-US" sz="1600" dirty="0" err="1">
+                <a:solidFill>
+                  <a:schemeClr val="accent6"/>
+                </a:solidFill>
+              </a:rPr>
+              <a:t>Trần</a:t>
+            </a:r>
+            <a:r>
+              <a:rPr lang="en-US" sz="1600" dirty="0">
+                <a:solidFill>
+                  <a:schemeClr val="accent6"/>
+                </a:solidFill>
+              </a:rPr>
+              <a:t> </a:t>
+            </a:r>
+            <a:r>
+              <a:rPr lang="en-US" sz="1600" dirty="0" err="1">
+                <a:solidFill>
+                  <a:schemeClr val="accent6"/>
+                </a:solidFill>
+              </a:rPr>
+              <a:t>Thái</a:t>
+            </a:r>
+            <a:r>
+              <a:rPr lang="en-US" sz="1600" dirty="0">
+                <a:solidFill>
+                  <a:schemeClr val="accent6"/>
+                </a:solidFill>
+              </a:rPr>
+              <a:t> Vinh</a:t>
+            </a:r>
+            <a:endParaRPr lang="en-US" dirty="0"/>
+          </a:p>
+          <a:p>
+            <a:pPr marL="0" indent="0" algn="l">
+              <a:buNone/>
+            </a:pPr>
+            <a:r>
+              <a:rPr lang="en-US" sz="1600" dirty="0">
+                <a:solidFill>
+                  <a:schemeClr val="accent6"/>
+                </a:solidFill>
+              </a:rPr>
+              <a:t> </a:t>
             </a:r>
             <a:endParaRPr lang="en-US" sz="1600" dirty="0"/>
           </a:p>
@@ -4411,9 +4674,11 @@
       <p:sp>
         <p:nvSpPr>
           <p:cNvPr id="2" name="Text 0"/>
-          <p:cNvSpPr/>
+          <p:cNvSpPr>
+            <a:spLocks noGrp="1"/>
+          </p:cNvSpPr>
           <p:nvPr>
-            <p:ph idx="100" type="title" hasCustomPrompt="1"/>
+            <p:ph type="title" idx="100" hasCustomPrompt="1"/>
           </p:nvPr>
         </p:nvSpPr>
         <p:spPr>
@@ -4431,7 +4696,7 @@
           <a:bodyPr wrap="square" lIns="0" tIns="0" rIns="0" bIns="0" rtlCol="0" anchor="ctr"/>
           <a:lstStyle/>
           <a:p>
-            <a:pPr algn="l" indent="0" marL="0">
+            <a:pPr marL="0" indent="0" algn="l">
               <a:buNone/>
             </a:pPr>
             <a:r>
@@ -4503,14 +4768,14 @@
       </p:sp>
       <p:pic>
         <p:nvPicPr>
-          <p:cNvPr id="5" name="icon-80" descr="preencoded.png">    </p:cNvPr>
+          <p:cNvPr id="5" name="icon-80" descr="preencoded.png"/>
           <p:cNvPicPr>
             <a:picLocks noChangeAspect="1"/>
           </p:cNvPicPr>
           <p:nvPr/>
         </p:nvPicPr>
         <p:blipFill>
-          <a:blip r:embed="rId1"/>
+          <a:blip r:embed="rId3"/>
           <a:stretch>
             <a:fillRect/>
           </a:stretch>
@@ -4546,7 +4811,7 @@
           <a:bodyPr wrap="square" lIns="0" tIns="0" rIns="0" bIns="0" rtlCol="0" anchor="t"/>
           <a:lstStyle/>
           <a:p>
-            <a:pPr indent="0" marL="0">
+            <a:pPr marL="0" indent="0">
               <a:buNone/>
             </a:pPr>
             <a:r>
@@ -4615,14 +4880,14 @@
       </p:sp>
       <p:pic>
         <p:nvPicPr>
-          <p:cNvPr id="9" name="icon-84" descr="preencoded.png">    </p:cNvPr>
+          <p:cNvPr id="9" name="icon-84" descr="preencoded.png"/>
           <p:cNvPicPr>
             <a:picLocks noChangeAspect="1"/>
           </p:cNvPicPr>
           <p:nvPr/>
         </p:nvPicPr>
         <p:blipFill>
-          <a:blip r:embed="rId2"/>
+          <a:blip r:embed="rId4"/>
           <a:stretch>
             <a:fillRect/>
           </a:stretch>
@@ -4658,7 +4923,7 @@
           <a:bodyPr wrap="square" lIns="0" tIns="0" rIns="0" bIns="0" rtlCol="0" anchor="t"/>
           <a:lstStyle/>
           <a:p>
-            <a:pPr indent="0" marL="0">
+            <a:pPr marL="0" indent="0">
               <a:buNone/>
             </a:pPr>
             <a:r>
@@ -4896,7 +5161,7 @@
           <a:bodyPr wrap="square" lIns="0" tIns="0" rIns="0" bIns="0" rtlCol="0" anchor="t"/>
           <a:lstStyle/>
           <a:p>
-            <a:pPr indent="0" marL="0">
+            <a:pPr marL="0" indent="0">
               <a:buNone/>
             </a:pPr>
             <a:r>
@@ -4932,7 +5197,7 @@
           <a:bodyPr wrap="square" lIns="0" tIns="0" rIns="0" bIns="0" rtlCol="0" anchor="t"/>
           <a:lstStyle/>
           <a:p>
-            <a:pPr indent="0" marL="0">
+            <a:pPr marL="0" indent="0">
               <a:buNone/>
             </a:pPr>
             <a:r>
@@ -4968,7 +5233,7 @@
           <a:bodyPr wrap="square" lIns="0" tIns="0" rIns="0" bIns="0" rtlCol="0" anchor="t"/>
           <a:lstStyle/>
           <a:p>
-            <a:pPr indent="0" marL="0">
+            <a:pPr marL="0" indent="0">
               <a:buNone/>
             </a:pPr>
             <a:r>
@@ -4982,7 +5247,7 @@
             <a:endParaRPr lang="en-US" sz="1300" dirty="0"/>
           </a:p>
           <a:p>
-            <a:pPr indent="0" marL="0">
+            <a:pPr marL="0" indent="0">
               <a:buNone/>
             </a:pPr>
             <a:r>
@@ -4996,7 +5261,7 @@
             <a:endParaRPr lang="en-US" sz="1300" dirty="0"/>
           </a:p>
           <a:p>
-            <a:pPr indent="0" marL="0">
+            <a:pPr marL="0" indent="0">
               <a:buNone/>
             </a:pPr>
             <a:r>
@@ -5010,7 +5275,7 @@
             <a:endParaRPr lang="en-US" sz="1300" dirty="0"/>
           </a:p>
           <a:p>
-            <a:pPr indent="0" marL="0">
+            <a:pPr marL="0" indent="0">
               <a:buNone/>
             </a:pPr>
             <a:r>
@@ -5024,7 +5289,7 @@
             <a:endParaRPr lang="en-US" sz="1300" dirty="0"/>
           </a:p>
           <a:p>
-            <a:pPr indent="0" marL="0">
+            <a:pPr marL="0" indent="0">
               <a:buNone/>
             </a:pPr>
             <a:r>
@@ -5059,7 +5324,7 @@
           </a:prstGeom>
           <a:extLst>
             <a:ext uri="{C572A759-6A51-4108-AA02-DFA0A04FC94B}">
-              <ma14:wrappingTextBoxFlag xmlns:ma14="http://schemas.microsoft.com/office/mac/drawingml/2011/main" val="0"/>
+              <ma14:wrappingTextBoxFlag xmlns:ma14="http://schemas.microsoft.com/office/mac/drawingml/2011/main" xmlns="" val="0"/>
             </a:ext>
           </a:extLst>
         </p:spPr>
@@ -5077,7 +5342,7 @@
           <a:p>
             <a:pPr algn="l"/>
             <a:fld id="{F7021451-1387-4CA6-816F-3879F97B5CBC}" type="slidenum">
-              <a:rPr b="0" lang="en-US"/>
+              <a:rPr lang="en-US" b="0"/>
               <a:t>10</a:t>
             </a:fld>
             <a:endParaRPr lang="en-US"/>
@@ -5112,9 +5377,11 @@
       <p:sp>
         <p:nvSpPr>
           <p:cNvPr id="2" name="Text 0"/>
-          <p:cNvSpPr/>
+          <p:cNvSpPr>
+            <a:spLocks noGrp="1"/>
+          </p:cNvSpPr>
           <p:nvPr>
-            <p:ph idx="100" type="title" hasCustomPrompt="1"/>
+            <p:ph type="title" idx="100" hasCustomPrompt="1"/>
           </p:nvPr>
         </p:nvSpPr>
         <p:spPr>
@@ -5132,7 +5399,7 @@
           <a:bodyPr wrap="square" lIns="0" tIns="0" rIns="0" bIns="0" rtlCol="0" anchor="ctr"/>
           <a:lstStyle/>
           <a:p>
-            <a:pPr algn="l" indent="0" marL="0">
+            <a:pPr marL="0" indent="0" algn="l">
               <a:buNone/>
             </a:pPr>
             <a:r>
@@ -5204,14 +5471,14 @@
       </p:sp>
       <p:pic>
         <p:nvPicPr>
-          <p:cNvPr id="5" name="icon-99" descr="preencoded.png">    </p:cNvPr>
+          <p:cNvPr id="5" name="icon-99" descr="preencoded.png"/>
           <p:cNvPicPr>
             <a:picLocks noChangeAspect="1"/>
           </p:cNvPicPr>
           <p:nvPr/>
         </p:nvPicPr>
         <p:blipFill>
-          <a:blip r:embed="rId1"/>
+          <a:blip r:embed="rId3"/>
           <a:stretch>
             <a:fillRect/>
           </a:stretch>
@@ -5247,7 +5514,7 @@
           <a:bodyPr wrap="square" lIns="0" tIns="0" rIns="0" bIns="0" rtlCol="0" anchor="t"/>
           <a:lstStyle/>
           <a:p>
-            <a:pPr indent="0" marL="0">
+            <a:pPr marL="0" indent="0">
               <a:buNone/>
             </a:pPr>
             <a:r>
@@ -5283,7 +5550,7 @@
           <a:bodyPr wrap="square" lIns="0" tIns="0" rIns="0" bIns="0" rtlCol="0" anchor="t"/>
           <a:lstStyle/>
           <a:p>
-            <a:pPr indent="0" marL="0">
+            <a:pPr marL="0" indent="0">
               <a:buNone/>
             </a:pPr>
             <a:r>
@@ -5352,14 +5619,14 @@
       </p:sp>
       <p:pic>
         <p:nvPicPr>
-          <p:cNvPr id="10" name="icon-104" descr="preencoded.png">    </p:cNvPr>
+          <p:cNvPr id="10" name="icon-104" descr="preencoded.png"/>
           <p:cNvPicPr>
             <a:picLocks noChangeAspect="1"/>
           </p:cNvPicPr>
           <p:nvPr/>
         </p:nvPicPr>
         <p:blipFill>
-          <a:blip r:embed="rId2"/>
+          <a:blip r:embed="rId4"/>
           <a:stretch>
             <a:fillRect/>
           </a:stretch>
@@ -5395,7 +5662,7 @@
           <a:bodyPr wrap="square" lIns="0" tIns="0" rIns="0" bIns="0" rtlCol="0" anchor="t"/>
           <a:lstStyle/>
           <a:p>
-            <a:pPr indent="0" marL="0">
+            <a:pPr marL="0" indent="0">
               <a:buNone/>
             </a:pPr>
             <a:r>
@@ -5431,7 +5698,7 @@
           <a:bodyPr wrap="square" lIns="0" tIns="0" rIns="0" bIns="0" rtlCol="0" anchor="t"/>
           <a:lstStyle/>
           <a:p>
-            <a:pPr indent="0" marL="0">
+            <a:pPr marL="0" indent="0">
               <a:buNone/>
             </a:pPr>
             <a:r>
@@ -5500,14 +5767,14 @@
       </p:sp>
       <p:pic>
         <p:nvPicPr>
-          <p:cNvPr id="15" name="icon-109" descr="preencoded.png">    </p:cNvPr>
+          <p:cNvPr id="15" name="icon-109" descr="preencoded.png"/>
           <p:cNvPicPr>
             <a:picLocks noChangeAspect="1"/>
           </p:cNvPicPr>
           <p:nvPr/>
         </p:nvPicPr>
         <p:blipFill>
-          <a:blip r:embed="rId3"/>
+          <a:blip r:embed="rId5"/>
           <a:stretch>
             <a:fillRect/>
           </a:stretch>
@@ -5543,7 +5810,7 @@
           <a:bodyPr wrap="square" lIns="0" tIns="0" rIns="0" bIns="0" rtlCol="0" anchor="t"/>
           <a:lstStyle/>
           <a:p>
-            <a:pPr indent="0" marL="0">
+            <a:pPr marL="0" indent="0">
               <a:buNone/>
             </a:pPr>
             <a:r>
@@ -5579,7 +5846,7 @@
           <a:bodyPr wrap="square" lIns="0" tIns="0" rIns="0" bIns="0" rtlCol="0" anchor="t"/>
           <a:lstStyle/>
           <a:p>
-            <a:pPr indent="0" marL="0">
+            <a:pPr marL="0" indent="0">
               <a:buNone/>
             </a:pPr>
             <a:r>
@@ -5648,14 +5915,14 @@
       </p:sp>
       <p:pic>
         <p:nvPicPr>
-          <p:cNvPr id="20" name="icon-114" descr="preencoded.png">    </p:cNvPr>
+          <p:cNvPr id="20" name="icon-114" descr="preencoded.png"/>
           <p:cNvPicPr>
             <a:picLocks noChangeAspect="1"/>
           </p:cNvPicPr>
           <p:nvPr/>
         </p:nvPicPr>
         <p:blipFill>
-          <a:blip r:embed="rId4"/>
+          <a:blip r:embed="rId6"/>
           <a:stretch>
             <a:fillRect/>
           </a:stretch>
@@ -5691,7 +5958,7 @@
           <a:bodyPr wrap="square" lIns="0" tIns="0" rIns="0" bIns="0" rtlCol="0" anchor="t"/>
           <a:lstStyle/>
           <a:p>
-            <a:pPr indent="0" marL="0">
+            <a:pPr marL="0" indent="0">
               <a:buNone/>
             </a:pPr>
             <a:r>
@@ -5727,7 +5994,7 @@
           <a:bodyPr wrap="square" lIns="0" tIns="0" rIns="0" bIns="0" rtlCol="0" anchor="t"/>
           <a:lstStyle/>
           <a:p>
-            <a:pPr indent="0" marL="0">
+            <a:pPr marL="0" indent="0">
               <a:buNone/>
             </a:pPr>
             <a:r>
@@ -5762,7 +6029,7 @@
           </a:prstGeom>
           <a:extLst>
             <a:ext uri="{C572A759-6A51-4108-AA02-DFA0A04FC94B}">
-              <ma14:wrappingTextBoxFlag xmlns:ma14="http://schemas.microsoft.com/office/mac/drawingml/2011/main" val="0"/>
+              <ma14:wrappingTextBoxFlag xmlns:ma14="http://schemas.microsoft.com/office/mac/drawingml/2011/main" xmlns="" val="0"/>
             </a:ext>
           </a:extLst>
         </p:spPr>
@@ -5780,7 +6047,7 @@
           <a:p>
             <a:pPr algn="l"/>
             <a:fld id="{F7021451-1387-4CA6-816F-3879F97B5CBC}" type="slidenum">
-              <a:rPr b="0" lang="en-US"/>
+              <a:rPr lang="en-US" b="0"/>
               <a:t>11</a:t>
             </a:fld>
             <a:endParaRPr lang="en-US"/>
@@ -5815,9 +6082,11 @@
       <p:sp>
         <p:nvSpPr>
           <p:cNvPr id="2" name="Text 0"/>
-          <p:cNvSpPr/>
+          <p:cNvSpPr>
+            <a:spLocks noGrp="1"/>
+          </p:cNvSpPr>
           <p:nvPr>
-            <p:ph idx="100" type="title" hasCustomPrompt="1"/>
+            <p:ph type="title" idx="100" hasCustomPrompt="1"/>
           </p:nvPr>
         </p:nvSpPr>
         <p:spPr>
@@ -5835,7 +6104,7 @@
           <a:bodyPr wrap="square" lIns="0" tIns="0" rIns="0" bIns="0" rtlCol="0" anchor="ctr"/>
           <a:lstStyle/>
           <a:p>
-            <a:pPr algn="l" indent="0" marL="0">
+            <a:pPr marL="0" indent="0" algn="l">
               <a:buNone/>
             </a:pPr>
             <a:r>
@@ -5855,7 +6124,7 @@
       </p:sp>
       <p:graphicFrame>
         <p:nvGraphicFramePr>
-          <p:cNvPr id="3" name="chart-117" descr=""/>
+          <p:cNvPr id="3" name="chart-117"/>
           <p:cNvGraphicFramePr/>
           <p:nvPr/>
         </p:nvGraphicFramePr>
@@ -5863,9 +6132,9 @@
           <a:off x="457200" y="1143000"/>
           <a:ext cx="5394960" cy="3429000"/>
         </p:xfrm>
-        <a:graphic xmlns:a="http://schemas.openxmlformats.org/drawingml/2006/main">
+        <a:graphic>
           <a:graphicData uri="http://schemas.openxmlformats.org/drawingml/2006/chart">
-            <c:chart xmlns:c="http://schemas.openxmlformats.org/drawingml/2006/chart" r:id="rId1"/>
+            <c:chart xmlns:c="http://schemas.openxmlformats.org/drawingml/2006/chart" xmlns:r="http://schemas.openxmlformats.org/officeDocument/2006/relationships" r:id="rId3"/>
           </a:graphicData>
         </a:graphic>
       </p:graphicFrame>
@@ -5917,7 +6186,7 @@
           <a:bodyPr wrap="square" lIns="0" tIns="0" rIns="0" bIns="0" rtlCol="0" anchor="t"/>
           <a:lstStyle/>
           <a:p>
-            <a:pPr indent="0" marL="0">
+            <a:pPr marL="0" indent="0">
               <a:buNone/>
             </a:pPr>
             <a:r>
@@ -5956,7 +6225,7 @@
           <a:bodyPr wrap="square" lIns="0" tIns="0" rIns="0" bIns="0" rtlCol="0" anchor="t"/>
           <a:lstStyle/>
           <a:p>
-            <a:pPr indent="0" marL="0">
+            <a:pPr marL="0" indent="0">
               <a:buNone/>
             </a:pPr>
             <a:r>
@@ -5992,7 +6261,7 @@
           <a:bodyPr wrap="square" lIns="0" tIns="0" rIns="0" bIns="0" rtlCol="0" anchor="t"/>
           <a:lstStyle/>
           <a:p>
-            <a:pPr indent="0" marL="0">
+            <a:pPr marL="0" indent="0">
               <a:buNone/>
             </a:pPr>
             <a:r>
@@ -6031,7 +6300,7 @@
           <a:bodyPr wrap="square" lIns="0" tIns="0" rIns="0" bIns="0" rtlCol="0" anchor="t"/>
           <a:lstStyle/>
           <a:p>
-            <a:pPr indent="0" marL="0">
+            <a:pPr marL="0" indent="0">
               <a:buNone/>
             </a:pPr>
             <a:r>
@@ -6066,7 +6335,7 @@
           </a:prstGeom>
           <a:extLst>
             <a:ext uri="{C572A759-6A51-4108-AA02-DFA0A04FC94B}">
-              <ma14:wrappingTextBoxFlag xmlns:ma14="http://schemas.microsoft.com/office/mac/drawingml/2011/main" val="0"/>
+              <ma14:wrappingTextBoxFlag xmlns:ma14="http://schemas.microsoft.com/office/mac/drawingml/2011/main" xmlns="" val="0"/>
             </a:ext>
           </a:extLst>
         </p:spPr>
@@ -6084,7 +6353,7 @@
           <a:p>
             <a:pPr algn="l"/>
             <a:fld id="{F7021451-1387-4CA6-816F-3879F97B5CBC}" type="slidenum">
-              <a:rPr b="0" lang="en-US"/>
+              <a:rPr lang="en-US" b="0"/>
               <a:t>12</a:t>
             </a:fld>
             <a:endParaRPr lang="en-US"/>
@@ -6119,9 +6388,11 @@
       <p:sp>
         <p:nvSpPr>
           <p:cNvPr id="2" name="Text 0"/>
-          <p:cNvSpPr/>
+          <p:cNvSpPr>
+            <a:spLocks noGrp="1"/>
+          </p:cNvSpPr>
           <p:nvPr>
-            <p:ph idx="100" type="title" hasCustomPrompt="1"/>
+            <p:ph type="title" idx="100" hasCustomPrompt="1"/>
           </p:nvPr>
         </p:nvSpPr>
         <p:spPr>
@@ -6139,7 +6410,7 @@
           <a:bodyPr wrap="square" lIns="0" tIns="0" rIns="0" bIns="0" rtlCol="0" anchor="ctr"/>
           <a:lstStyle/>
           <a:p>
-            <a:pPr algn="l" indent="0" marL="0">
+            <a:pPr marL="0" indent="0" algn="l">
               <a:buNone/>
             </a:pPr>
             <a:r>
@@ -6159,14 +6430,14 @@
       </p:sp>
       <p:pic>
         <p:nvPicPr>
-          <p:cNvPr id="3" name="img-123" descr="Top-5 ảnh của CLIP gốc và CLIP đã dạy lại cho câu mô tả cổng chùa Đại Bi">    </p:cNvPr>
+          <p:cNvPr id="3" name="img-123" descr="Top-5 ảnh của CLIP gốc và CLIP đã dạy lại cho câu mô tả cổng chùa Đại Bi"/>
           <p:cNvPicPr>
             <a:picLocks noChangeAspect="1"/>
           </p:cNvPicPr>
           <p:nvPr/>
         </p:nvPicPr>
         <p:blipFill>
-          <a:blip r:embed="rId1"/>
+          <a:blip r:embed="rId3"/>
           <a:stretch>
             <a:fillRect/>
           </a:stretch>
@@ -6202,7 +6473,7 @@
           <a:bodyPr wrap="square" lIns="0" tIns="0" rIns="0" bIns="0" rtlCol="0" anchor="t"/>
           <a:lstStyle/>
           <a:p>
-            <a:pPr indent="0" marL="0">
+            <a:pPr marL="0" indent="0">
               <a:buNone/>
             </a:pPr>
             <a:r>
@@ -6213,9 +6484,6 @@
               </a:rPr>
               <a:t>Câu tìm kiếm mô tả cổng chùa Đại Bi. </a:t>
             </a:r>
-            <a:pPr indent="0" marL="0">
-              <a:buNone/>
-            </a:pPr>
             <a:r>
               <a:rPr lang="en-US" sz="1300" dirty="0">
                 <a:solidFill>
@@ -6248,7 +6516,7 @@
           </a:prstGeom>
           <a:extLst>
             <a:ext uri="{C572A759-6A51-4108-AA02-DFA0A04FC94B}">
-              <ma14:wrappingTextBoxFlag xmlns:ma14="http://schemas.microsoft.com/office/mac/drawingml/2011/main" val="0"/>
+              <ma14:wrappingTextBoxFlag xmlns:ma14="http://schemas.microsoft.com/office/mac/drawingml/2011/main" xmlns="" val="0"/>
             </a:ext>
           </a:extLst>
         </p:spPr>
@@ -6266,7 +6534,7 @@
           <a:p>
             <a:pPr algn="l"/>
             <a:fld id="{F7021451-1387-4CA6-816F-3879F97B5CBC}" type="slidenum">
-              <a:rPr b="0" lang="en-US"/>
+              <a:rPr lang="en-US" b="0"/>
               <a:t>13</a:t>
             </a:fld>
             <a:endParaRPr lang="en-US"/>
@@ -6301,9 +6569,11 @@
       <p:sp>
         <p:nvSpPr>
           <p:cNvPr id="2" name="Text 0"/>
-          <p:cNvSpPr/>
+          <p:cNvSpPr>
+            <a:spLocks noGrp="1"/>
+          </p:cNvSpPr>
           <p:nvPr>
-            <p:ph idx="100" type="title" hasCustomPrompt="1"/>
+            <p:ph type="title" idx="100" hasCustomPrompt="1"/>
           </p:nvPr>
         </p:nvSpPr>
         <p:spPr>
@@ -6321,7 +6591,7 @@
           <a:bodyPr wrap="square" lIns="0" tIns="0" rIns="0" bIns="0" rtlCol="0" anchor="ctr"/>
           <a:lstStyle/>
           <a:p>
-            <a:pPr algn="l" indent="0" marL="0">
+            <a:pPr marL="0" indent="0" algn="l">
               <a:buNone/>
             </a:pPr>
             <a:r>
@@ -6341,7 +6611,7 @@
       </p:sp>
       <p:graphicFrame>
         <p:nvGraphicFramePr>
-          <p:cNvPr id="3" name="chart-125" descr=""/>
+          <p:cNvPr id="3" name="chart-125"/>
           <p:cNvGraphicFramePr/>
           <p:nvPr/>
         </p:nvGraphicFramePr>
@@ -6349,9 +6619,9 @@
           <a:off x="457200" y="1143000"/>
           <a:ext cx="5120640" cy="3429000"/>
         </p:xfrm>
-        <a:graphic xmlns:a="http://schemas.openxmlformats.org/drawingml/2006/main">
+        <a:graphic>
           <a:graphicData uri="http://schemas.openxmlformats.org/drawingml/2006/chart">
-            <c:chart xmlns:c="http://schemas.openxmlformats.org/drawingml/2006/chart" r:id="rId1"/>
+            <c:chart xmlns:c="http://schemas.openxmlformats.org/drawingml/2006/chart" xmlns:r="http://schemas.openxmlformats.org/officeDocument/2006/relationships" r:id="rId3"/>
           </a:graphicData>
         </a:graphic>
       </p:graphicFrame>
@@ -6403,7 +6673,7 @@
           <a:bodyPr wrap="square" lIns="0" tIns="0" rIns="0" bIns="0" rtlCol="0" anchor="t"/>
           <a:lstStyle/>
           <a:p>
-            <a:pPr indent="0" marL="0">
+            <a:pPr marL="0" indent="0">
               <a:buNone/>
             </a:pPr>
             <a:r>
@@ -6442,7 +6712,7 @@
           <a:bodyPr wrap="square" lIns="0" tIns="0" rIns="0" bIns="0" rtlCol="0" anchor="t"/>
           <a:lstStyle/>
           <a:p>
-            <a:pPr indent="0" marL="0">
+            <a:pPr marL="0" indent="0">
               <a:buNone/>
             </a:pPr>
             <a:r>
@@ -6478,7 +6748,7 @@
           <a:bodyPr wrap="square" lIns="0" tIns="0" rIns="0" bIns="0" rtlCol="0" anchor="t"/>
           <a:lstStyle/>
           <a:p>
-            <a:pPr indent="0" marL="0">
+            <a:pPr marL="0" indent="0">
               <a:buNone/>
             </a:pPr>
             <a:r>
@@ -6513,7 +6783,7 @@
           </a:prstGeom>
           <a:extLst>
             <a:ext uri="{C572A759-6A51-4108-AA02-DFA0A04FC94B}">
-              <ma14:wrappingTextBoxFlag xmlns:ma14="http://schemas.microsoft.com/office/mac/drawingml/2011/main" val="0"/>
+              <ma14:wrappingTextBoxFlag xmlns:ma14="http://schemas.microsoft.com/office/mac/drawingml/2011/main" xmlns="" val="0"/>
             </a:ext>
           </a:extLst>
         </p:spPr>
@@ -6531,7 +6801,7 @@
           <a:p>
             <a:pPr algn="l"/>
             <a:fld id="{F7021451-1387-4CA6-816F-3879F97B5CBC}" type="slidenum">
-              <a:rPr b="0" lang="en-US"/>
+              <a:rPr lang="en-US" b="0"/>
               <a:t>14</a:t>
             </a:fld>
             <a:endParaRPr lang="en-US"/>
@@ -6566,9 +6836,11 @@
       <p:sp>
         <p:nvSpPr>
           <p:cNvPr id="2" name="Text 0"/>
-          <p:cNvSpPr/>
+          <p:cNvSpPr>
+            <a:spLocks noGrp="1"/>
+          </p:cNvSpPr>
           <p:nvPr>
-            <p:ph idx="100" type="title" hasCustomPrompt="1"/>
+            <p:ph type="title" idx="100" hasCustomPrompt="1"/>
           </p:nvPr>
         </p:nvSpPr>
         <p:spPr>
@@ -6586,7 +6858,7 @@
           <a:bodyPr wrap="square" lIns="0" tIns="0" rIns="0" bIns="0" rtlCol="0" anchor="ctr"/>
           <a:lstStyle/>
           <a:p>
-            <a:pPr algn="l" indent="0" marL="0">
+            <a:pPr marL="0" indent="0" algn="l">
               <a:buNone/>
             </a:pPr>
             <a:r>
@@ -6658,14 +6930,14 @@
       </p:sp>
       <p:pic>
         <p:nvPicPr>
-          <p:cNvPr id="5" name="icon-132" descr="preencoded.png">    </p:cNvPr>
+          <p:cNvPr id="5" name="icon-132" descr="preencoded.png"/>
           <p:cNvPicPr>
             <a:picLocks noChangeAspect="1"/>
           </p:cNvPicPr>
           <p:nvPr/>
         </p:nvPicPr>
         <p:blipFill>
-          <a:blip r:embed="rId1"/>
+          <a:blip r:embed="rId3"/>
           <a:stretch>
             <a:fillRect/>
           </a:stretch>
@@ -6701,7 +6973,7 @@
           <a:bodyPr wrap="square" lIns="0" tIns="0" rIns="0" bIns="0" rtlCol="0" anchor="t"/>
           <a:lstStyle/>
           <a:p>
-            <a:pPr indent="0" marL="0">
+            <a:pPr marL="0" indent="0">
               <a:buNone/>
             </a:pPr>
             <a:r>
@@ -6737,7 +7009,7 @@
           <a:bodyPr wrap="square" lIns="0" tIns="0" rIns="0" bIns="0" rtlCol="0" anchor="t"/>
           <a:lstStyle/>
           <a:p>
-            <a:pPr indent="0" marL="0">
+            <a:pPr marL="0" indent="0">
               <a:buNone/>
             </a:pPr>
             <a:r>
@@ -6773,7 +7045,7 @@
           <a:bodyPr wrap="square" lIns="0" tIns="0" rIns="0" bIns="0" rtlCol="0" anchor="t"/>
           <a:lstStyle/>
           <a:p>
-            <a:pPr indent="0" marL="0">
+            <a:pPr marL="0" indent="0">
               <a:buNone/>
             </a:pPr>
             <a:r>
@@ -6842,14 +7114,14 @@
       </p:sp>
       <p:pic>
         <p:nvPicPr>
-          <p:cNvPr id="11" name="icon-138" descr="preencoded.png">    </p:cNvPr>
+          <p:cNvPr id="11" name="icon-138" descr="preencoded.png"/>
           <p:cNvPicPr>
             <a:picLocks noChangeAspect="1"/>
           </p:cNvPicPr>
           <p:nvPr/>
         </p:nvPicPr>
         <p:blipFill>
-          <a:blip r:embed="rId2"/>
+          <a:blip r:embed="rId4"/>
           <a:stretch>
             <a:fillRect/>
           </a:stretch>
@@ -6885,7 +7157,7 @@
           <a:bodyPr wrap="square" lIns="0" tIns="0" rIns="0" bIns="0" rtlCol="0" anchor="t"/>
           <a:lstStyle/>
           <a:p>
-            <a:pPr indent="0" marL="0">
+            <a:pPr marL="0" indent="0">
               <a:buNone/>
             </a:pPr>
             <a:r>
@@ -6921,7 +7193,7 @@
           <a:bodyPr wrap="square" lIns="0" tIns="0" rIns="0" bIns="0" rtlCol="0" anchor="t"/>
           <a:lstStyle/>
           <a:p>
-            <a:pPr indent="0" marL="0">
+            <a:pPr marL="0" indent="0">
               <a:buNone/>
             </a:pPr>
             <a:r>
@@ -6957,7 +7229,7 @@
           <a:bodyPr wrap="square" lIns="0" tIns="0" rIns="0" bIns="0" rtlCol="0" anchor="t"/>
           <a:lstStyle/>
           <a:p>
-            <a:pPr indent="0" marL="0">
+            <a:pPr marL="0" indent="0">
               <a:buNone/>
             </a:pPr>
             <a:r>
@@ -7026,14 +7298,14 @@
       </p:sp>
       <p:pic>
         <p:nvPicPr>
-          <p:cNvPr id="17" name="icon-144" descr="preencoded.png">    </p:cNvPr>
+          <p:cNvPr id="17" name="icon-144" descr="preencoded.png"/>
           <p:cNvPicPr>
             <a:picLocks noChangeAspect="1"/>
           </p:cNvPicPr>
           <p:nvPr/>
         </p:nvPicPr>
         <p:blipFill>
-          <a:blip r:embed="rId3"/>
+          <a:blip r:embed="rId5"/>
           <a:stretch>
             <a:fillRect/>
           </a:stretch>
@@ -7069,7 +7341,7 @@
           <a:bodyPr wrap="square" lIns="0" tIns="0" rIns="0" bIns="0" rtlCol="0" anchor="t"/>
           <a:lstStyle/>
           <a:p>
-            <a:pPr indent="0" marL="0">
+            <a:pPr marL="0" indent="0">
               <a:buNone/>
             </a:pPr>
             <a:r>
@@ -7105,7 +7377,7 @@
           <a:bodyPr wrap="square" lIns="0" tIns="0" rIns="0" bIns="0" rtlCol="0" anchor="t"/>
           <a:lstStyle/>
           <a:p>
-            <a:pPr indent="0" marL="0">
+            <a:pPr marL="0" indent="0">
               <a:buNone/>
             </a:pPr>
             <a:r>
@@ -7141,7 +7413,7 @@
           <a:bodyPr wrap="square" lIns="0" tIns="0" rIns="0" bIns="0" rtlCol="0" anchor="t"/>
           <a:lstStyle/>
           <a:p>
-            <a:pPr indent="0" marL="0">
+            <a:pPr marL="0" indent="0">
               <a:buNone/>
             </a:pPr>
             <a:r>
@@ -7204,7 +7476,7 @@
           <a:bodyPr wrap="square" lIns="0" tIns="0" rIns="0" bIns="0" rtlCol="0" anchor="ctr"/>
           <a:lstStyle/>
           <a:p>
-            <a:pPr indent="0" marL="0">
+            <a:pPr marL="0" indent="0">
               <a:buNone/>
             </a:pPr>
             <a:r>
@@ -7239,7 +7511,7 @@
           </a:prstGeom>
           <a:extLst>
             <a:ext uri="{C572A759-6A51-4108-AA02-DFA0A04FC94B}">
-              <ma14:wrappingTextBoxFlag xmlns:ma14="http://schemas.microsoft.com/office/mac/drawingml/2011/main" val="0"/>
+              <ma14:wrappingTextBoxFlag xmlns:ma14="http://schemas.microsoft.com/office/mac/drawingml/2011/main" xmlns="" val="0"/>
             </a:ext>
           </a:extLst>
         </p:spPr>
@@ -7257,7 +7529,7 @@
           <a:p>
             <a:pPr algn="l"/>
             <a:fld id="{F7021451-1387-4CA6-816F-3879F97B5CBC}" type="slidenum">
-              <a:rPr b="0" lang="en-US"/>
+              <a:rPr lang="en-US" b="0"/>
               <a:t>15</a:t>
             </a:fld>
             <a:endParaRPr lang="en-US"/>
@@ -7292,9 +7564,11 @@
       <p:sp>
         <p:nvSpPr>
           <p:cNvPr id="2" name="Text 0"/>
-          <p:cNvSpPr/>
+          <p:cNvSpPr>
+            <a:spLocks noGrp="1"/>
+          </p:cNvSpPr>
           <p:nvPr>
-            <p:ph idx="100" type="title" hasCustomPrompt="1"/>
+            <p:ph type="title" idx="100" hasCustomPrompt="1"/>
           </p:nvPr>
         </p:nvSpPr>
         <p:spPr>
@@ -7312,7 +7586,7 @@
           <a:bodyPr wrap="square" lIns="0" tIns="0" rIns="0" bIns="0" rtlCol="0" anchor="ctr"/>
           <a:lstStyle/>
           <a:p>
-            <a:pPr algn="l" indent="0" marL="0">
+            <a:pPr marL="0" indent="0" algn="l">
               <a:buNone/>
             </a:pPr>
             <a:r>
@@ -7384,14 +7658,14 @@
       </p:sp>
       <p:pic>
         <p:nvPicPr>
-          <p:cNvPr id="5" name="icon-152" descr="preencoded.png">    </p:cNvPr>
+          <p:cNvPr id="5" name="icon-152" descr="preencoded.png"/>
           <p:cNvPicPr>
             <a:picLocks noChangeAspect="1"/>
           </p:cNvPicPr>
           <p:nvPr/>
         </p:nvPicPr>
         <p:blipFill>
-          <a:blip r:embed="rId1"/>
+          <a:blip r:embed="rId3"/>
           <a:stretch>
             <a:fillRect/>
           </a:stretch>
@@ -7427,7 +7701,7 @@
           <a:bodyPr wrap="square" lIns="0" tIns="0" rIns="0" bIns="0" rtlCol="0" anchor="t"/>
           <a:lstStyle/>
           <a:p>
-            <a:pPr algn="ctr" indent="0" marL="0">
+            <a:pPr marL="0" indent="0" algn="ctr">
               <a:buNone/>
             </a:pPr>
             <a:r>
@@ -7463,7 +7737,7 @@
           <a:bodyPr wrap="square" lIns="0" tIns="0" rIns="0" bIns="0" rtlCol="0" anchor="t"/>
           <a:lstStyle/>
           <a:p>
-            <a:pPr algn="ctr" indent="0" marL="0">
+            <a:pPr marL="0" indent="0" algn="ctr">
               <a:buNone/>
             </a:pPr>
             <a:r>
@@ -7532,14 +7806,14 @@
       </p:sp>
       <p:pic>
         <p:nvPicPr>
-          <p:cNvPr id="10" name="icon-157" descr="preencoded.png">    </p:cNvPr>
+          <p:cNvPr id="10" name="icon-157" descr="preencoded.png"/>
           <p:cNvPicPr>
             <a:picLocks noChangeAspect="1"/>
           </p:cNvPicPr>
           <p:nvPr/>
         </p:nvPicPr>
         <p:blipFill>
-          <a:blip r:embed="rId2"/>
+          <a:blip r:embed="rId4"/>
           <a:stretch>
             <a:fillRect/>
           </a:stretch>
@@ -7575,7 +7849,7 @@
           <a:bodyPr wrap="square" lIns="0" tIns="0" rIns="0" bIns="0" rtlCol="0" anchor="t"/>
           <a:lstStyle/>
           <a:p>
-            <a:pPr algn="ctr" indent="0" marL="0">
+            <a:pPr marL="0" indent="0" algn="ctr">
               <a:buNone/>
             </a:pPr>
             <a:r>
@@ -7611,7 +7885,7 @@
           <a:bodyPr wrap="square" lIns="0" tIns="0" rIns="0" bIns="0" rtlCol="0" anchor="t"/>
           <a:lstStyle/>
           <a:p>
-            <a:pPr algn="ctr" indent="0" marL="0">
+            <a:pPr marL="0" indent="0" algn="ctr">
               <a:buNone/>
             </a:pPr>
             <a:r>
@@ -7680,14 +7954,14 @@
       </p:sp>
       <p:pic>
         <p:nvPicPr>
-          <p:cNvPr id="15" name="icon-162" descr="preencoded.png">    </p:cNvPr>
+          <p:cNvPr id="15" name="icon-162" descr="preencoded.png"/>
           <p:cNvPicPr>
             <a:picLocks noChangeAspect="1"/>
           </p:cNvPicPr>
           <p:nvPr/>
         </p:nvPicPr>
         <p:blipFill>
-          <a:blip r:embed="rId3"/>
+          <a:blip r:embed="rId5"/>
           <a:stretch>
             <a:fillRect/>
           </a:stretch>
@@ -7723,7 +7997,7 @@
           <a:bodyPr wrap="square" lIns="0" tIns="0" rIns="0" bIns="0" rtlCol="0" anchor="t"/>
           <a:lstStyle/>
           <a:p>
-            <a:pPr algn="ctr" indent="0" marL="0">
+            <a:pPr marL="0" indent="0" algn="ctr">
               <a:buNone/>
             </a:pPr>
             <a:r>
@@ -7759,7 +8033,7 @@
           <a:bodyPr wrap="square" lIns="0" tIns="0" rIns="0" bIns="0" rtlCol="0" anchor="t"/>
           <a:lstStyle/>
           <a:p>
-            <a:pPr algn="ctr" indent="0" marL="0">
+            <a:pPr marL="0" indent="0" algn="ctr">
               <a:buNone/>
             </a:pPr>
             <a:r>
@@ -7851,14 +8125,14 @@
       </p:sp>
       <p:pic>
         <p:nvPicPr>
-          <p:cNvPr id="21" name="icon-168" descr="preencoded.png">    </p:cNvPr>
+          <p:cNvPr id="21" name="icon-168" descr="preencoded.png"/>
           <p:cNvPicPr>
             <a:picLocks noChangeAspect="1"/>
           </p:cNvPicPr>
           <p:nvPr/>
         </p:nvPicPr>
         <p:blipFill>
-          <a:blip r:embed="rId4"/>
+          <a:blip r:embed="rId6"/>
           <a:stretch>
             <a:fillRect/>
           </a:stretch>
@@ -7894,7 +8168,7 @@
           <a:bodyPr wrap="square" lIns="0" tIns="0" rIns="0" bIns="0" rtlCol="0" anchor="t"/>
           <a:lstStyle/>
           <a:p>
-            <a:pPr indent="0" marL="0">
+            <a:pPr marL="0" indent="0">
               <a:buNone/>
             </a:pPr>
             <a:r>
@@ -7929,7 +8203,7 @@
           </a:prstGeom>
           <a:extLst>
             <a:ext uri="{C572A759-6A51-4108-AA02-DFA0A04FC94B}">
-              <ma14:wrappingTextBoxFlag xmlns:ma14="http://schemas.microsoft.com/office/mac/drawingml/2011/main" val="0"/>
+              <ma14:wrappingTextBoxFlag xmlns:ma14="http://schemas.microsoft.com/office/mac/drawingml/2011/main" xmlns="" val="0"/>
             </a:ext>
           </a:extLst>
         </p:spPr>
@@ -7947,7 +8221,7 @@
           <a:p>
             <a:pPr algn="l"/>
             <a:fld id="{F7021451-1387-4CA6-816F-3879F97B5CBC}" type="slidenum">
-              <a:rPr b="0" lang="en-US"/>
+              <a:rPr lang="en-US" b="0"/>
               <a:t>16</a:t>
             </a:fld>
             <a:endParaRPr lang="en-US"/>
@@ -7982,9 +8256,11 @@
       <p:sp>
         <p:nvSpPr>
           <p:cNvPr id="2" name="Text 0"/>
-          <p:cNvSpPr/>
+          <p:cNvSpPr>
+            <a:spLocks noGrp="1"/>
+          </p:cNvSpPr>
           <p:nvPr>
-            <p:ph idx="100" type="title" hasCustomPrompt="1"/>
+            <p:ph type="title" idx="100" hasCustomPrompt="1"/>
           </p:nvPr>
         </p:nvSpPr>
         <p:spPr>
@@ -8002,7 +8278,7 @@
           <a:bodyPr wrap="square" lIns="0" tIns="0" rIns="0" bIns="0" rtlCol="0" anchor="ctr"/>
           <a:lstStyle/>
           <a:p>
-            <a:pPr algn="l" indent="0" marL="0">
+            <a:pPr marL="0" indent="0" algn="l">
               <a:buNone/>
             </a:pPr>
             <a:r>
@@ -8066,7 +8342,7 @@
           <a:bodyPr wrap="square" lIns="0" tIns="0" rIns="0" bIns="0" rtlCol="0" anchor="ctr"/>
           <a:lstStyle/>
           <a:p>
-            <a:pPr algn="ctr" indent="0" marL="0">
+            <a:pPr marL="0" indent="0" algn="ctr">
               <a:buNone/>
             </a:pPr>
             <a:r>
@@ -8102,7 +8378,7 @@
           <a:bodyPr wrap="square" lIns="0" tIns="0" rIns="0" bIns="0" rtlCol="0" anchor="t"/>
           <a:lstStyle/>
           <a:p>
-            <a:pPr indent="0" marL="0">
+            <a:pPr marL="0" indent="0">
               <a:buNone/>
             </a:pPr>
             <a:r>
@@ -8138,7 +8414,7 @@
           <a:bodyPr wrap="square" lIns="0" tIns="0" rIns="0" bIns="0" rtlCol="0" anchor="t"/>
           <a:lstStyle/>
           <a:p>
-            <a:pPr indent="0" marL="0">
+            <a:pPr marL="0" indent="0">
               <a:buNone/>
             </a:pPr>
             <a:r>
@@ -8199,7 +8475,7 @@
           <a:bodyPr wrap="square" lIns="0" tIns="0" rIns="0" bIns="0" rtlCol="0" anchor="ctr"/>
           <a:lstStyle/>
           <a:p>
-            <a:pPr algn="ctr" indent="0" marL="0">
+            <a:pPr marL="0" indent="0" algn="ctr">
               <a:buNone/>
             </a:pPr>
             <a:r>
@@ -8235,7 +8511,7 @@
           <a:bodyPr wrap="square" lIns="0" tIns="0" rIns="0" bIns="0" rtlCol="0" anchor="t"/>
           <a:lstStyle/>
           <a:p>
-            <a:pPr indent="0" marL="0">
+            <a:pPr marL="0" indent="0">
               <a:buNone/>
             </a:pPr>
             <a:r>
@@ -8271,7 +8547,7 @@
           <a:bodyPr wrap="square" lIns="0" tIns="0" rIns="0" bIns="0" rtlCol="0" anchor="t"/>
           <a:lstStyle/>
           <a:p>
-            <a:pPr indent="0" marL="0">
+            <a:pPr marL="0" indent="0">
               <a:buNone/>
             </a:pPr>
             <a:r>
@@ -8332,7 +8608,7 @@
           <a:bodyPr wrap="square" lIns="0" tIns="0" rIns="0" bIns="0" rtlCol="0" anchor="ctr"/>
           <a:lstStyle/>
           <a:p>
-            <a:pPr algn="ctr" indent="0" marL="0">
+            <a:pPr marL="0" indent="0" algn="ctr">
               <a:buNone/>
             </a:pPr>
             <a:r>
@@ -8368,7 +8644,7 @@
           <a:bodyPr wrap="square" lIns="0" tIns="0" rIns="0" bIns="0" rtlCol="0" anchor="t"/>
           <a:lstStyle/>
           <a:p>
-            <a:pPr indent="0" marL="0">
+            <a:pPr marL="0" indent="0">
               <a:buNone/>
             </a:pPr>
             <a:r>
@@ -8404,7 +8680,7 @@
           <a:bodyPr wrap="square" lIns="0" tIns="0" rIns="0" bIns="0" rtlCol="0" anchor="t"/>
           <a:lstStyle/>
           <a:p>
-            <a:pPr indent="0" marL="0">
+            <a:pPr marL="0" indent="0">
               <a:buNone/>
             </a:pPr>
             <a:r>
@@ -8465,7 +8741,7 @@
           <a:bodyPr wrap="square" lIns="0" tIns="0" rIns="0" bIns="0" rtlCol="0" anchor="ctr"/>
           <a:lstStyle/>
           <a:p>
-            <a:pPr algn="ctr" indent="0" marL="0">
+            <a:pPr marL="0" indent="0" algn="ctr">
               <a:buNone/>
             </a:pPr>
             <a:r>
@@ -8501,7 +8777,7 @@
           <a:bodyPr wrap="square" lIns="0" tIns="0" rIns="0" bIns="0" rtlCol="0" anchor="t"/>
           <a:lstStyle/>
           <a:p>
-            <a:pPr indent="0" marL="0">
+            <a:pPr marL="0" indent="0">
               <a:buNone/>
             </a:pPr>
             <a:r>
@@ -8537,7 +8813,7 @@
           <a:bodyPr wrap="square" lIns="0" tIns="0" rIns="0" bIns="0" rtlCol="0" anchor="t"/>
           <a:lstStyle/>
           <a:p>
-            <a:pPr indent="0" marL="0">
+            <a:pPr marL="0" indent="0">
               <a:buNone/>
             </a:pPr>
             <a:r>
@@ -8587,8 +8863,8 @@
         </p:nvSpPr>
         <p:spPr>
           <a:xfrm>
-            <a:off x="6812280" y="1554480"/>
-            <a:ext cx="822960" cy="822960"/>
+            <a:off x="6286500" y="1964008"/>
+            <a:ext cx="1874520" cy="1723979"/>
           </a:xfrm>
           <a:prstGeom prst="ellipse">
             <a:avLst/>
@@ -8606,22 +8882,22 @@
       </p:sp>
       <p:pic>
         <p:nvPicPr>
-          <p:cNvPr id="21" name="icon-188" descr="preencoded.png">    </p:cNvPr>
+          <p:cNvPr id="21" name="icon-188" descr="preencoded.png"/>
           <p:cNvPicPr>
             <a:picLocks noChangeAspect="1"/>
           </p:cNvPicPr>
           <p:nvPr/>
         </p:nvPicPr>
         <p:blipFill>
-          <a:blip r:embed="rId1"/>
+          <a:blip r:embed="rId3"/>
           <a:stretch>
             <a:fillRect/>
           </a:stretch>
         </p:blipFill>
         <p:spPr>
           <a:xfrm>
-            <a:off x="7018020" y="1760220"/>
-            <a:ext cx="411480" cy="411480"/>
+            <a:off x="6705599" y="2282283"/>
+            <a:ext cx="1047657" cy="1047657"/>
           </a:xfrm>
           <a:prstGeom prst="rect">
             <a:avLst/>
@@ -8630,14 +8906,14 @@
       </p:pic>
       <p:sp>
         <p:nvSpPr>
-          <p:cNvPr id="22" name="txt-189"/>
+          <p:cNvPr id="23" name="txt-190"/>
           <p:cNvSpPr txBox="1"/>
           <p:nvPr/>
         </p:nvSpPr>
         <p:spPr>
           <a:xfrm>
-            <a:off x="5943600" y="2606040"/>
-            <a:ext cx="2560320" cy="411480"/>
+            <a:off x="6035040" y="3108960"/>
+            <a:ext cx="2377440" cy="731520"/>
           </a:xfrm>
           <a:prstGeom prst="rect">
             <a:avLst/>
@@ -8649,53 +8925,9 @@
           <a:bodyPr wrap="square" lIns="0" tIns="0" rIns="0" bIns="0" rtlCol="0" anchor="t"/>
           <a:lstStyle/>
           <a:p>
-            <a:pPr algn="ctr" indent="0" marL="0">
+            <a:pPr marL="0" indent="0" algn="ctr">
               <a:buNone/>
             </a:pPr>
-            <a:r>
-              <a:rPr lang="en-US" sz="1800" b="1" dirty="0">
-                <a:solidFill>
-                  <a:schemeClr val="bg1"/>
-                </a:solidFill>
-              </a:rPr>
-              <a:t>localhost:8000</a:t>
-            </a:r>
-            <a:endParaRPr lang="en-US" sz="1800" dirty="0"/>
-          </a:p>
-        </p:txBody>
-      </p:sp>
-      <p:sp>
-        <p:nvSpPr>
-          <p:cNvPr id="23" name="txt-190"/>
-          <p:cNvSpPr txBox="1"/>
-          <p:nvPr/>
-        </p:nvSpPr>
-        <p:spPr>
-          <a:xfrm>
-            <a:off x="6035040" y="3108960"/>
-            <a:ext cx="2377440" cy="731520"/>
-          </a:xfrm>
-          <a:prstGeom prst="rect">
-            <a:avLst/>
-          </a:prstGeom>
-          <a:noFill/>
-          <a:ln/>
-        </p:spPr>
-        <p:txBody>
-          <a:bodyPr wrap="square" lIns="0" tIns="0" rIns="0" bIns="0" rtlCol="0" anchor="t"/>
-          <a:lstStyle/>
-          <a:p>
-            <a:pPr algn="ctr" indent="0" marL="0">
-              <a:buNone/>
-            </a:pPr>
-            <a:r>
-              <a:rPr lang="en-US" sz="1200" dirty="0">
-                <a:solidFill>
-                  <a:schemeClr val="accent6"/>
-                </a:solidFill>
-              </a:rPr>
-              <a:t>Mở trình duyệt ở địa chỉ này khi máy chủ đang chạy</a:t>
-            </a:r>
             <a:endParaRPr lang="en-US" sz="1200" dirty="0"/>
           </a:p>
         </p:txBody>
@@ -8720,7 +8952,7 @@
           </a:prstGeom>
           <a:extLst>
             <a:ext uri="{C572A759-6A51-4108-AA02-DFA0A04FC94B}">
-              <ma14:wrappingTextBoxFlag xmlns:ma14="http://schemas.microsoft.com/office/mac/drawingml/2011/main" val="0"/>
+              <ma14:wrappingTextBoxFlag xmlns:ma14="http://schemas.microsoft.com/office/mac/drawingml/2011/main" xmlns="" val="0"/>
             </a:ext>
           </a:extLst>
         </p:spPr>
@@ -8738,7 +8970,7 @@
           <a:p>
             <a:pPr algn="l"/>
             <a:fld id="{F7021451-1387-4CA6-816F-3879F97B5CBC}" type="slidenum">
-              <a:rPr b="0" lang="en-US"/>
+              <a:rPr lang="en-US" b="0"/>
               <a:t>17</a:t>
             </a:fld>
             <a:endParaRPr lang="en-US"/>
@@ -8773,9 +9005,11 @@
       <p:sp>
         <p:nvSpPr>
           <p:cNvPr id="2" name="Text 0"/>
-          <p:cNvSpPr/>
+          <p:cNvSpPr>
+            <a:spLocks noGrp="1"/>
+          </p:cNvSpPr>
           <p:nvPr>
-            <p:ph idx="100" type="title" hasCustomPrompt="1"/>
+            <p:ph type="title" idx="100" hasCustomPrompt="1"/>
           </p:nvPr>
         </p:nvSpPr>
         <p:spPr>
@@ -8793,7 +9027,7 @@
           <a:bodyPr wrap="square" lIns="0" tIns="0" rIns="0" bIns="0" rtlCol="0" anchor="ctr"/>
           <a:lstStyle/>
           <a:p>
-            <a:pPr algn="l" indent="0" marL="0">
+            <a:pPr marL="0" indent="0" algn="l">
               <a:buNone/>
             </a:pPr>
             <a:r>
@@ -8865,14 +9099,14 @@
       </p:sp>
       <p:pic>
         <p:nvPicPr>
-          <p:cNvPr id="5" name="icon-193" descr="preencoded.png">    </p:cNvPr>
+          <p:cNvPr id="5" name="icon-193" descr="preencoded.png"/>
           <p:cNvPicPr>
             <a:picLocks noChangeAspect="1"/>
           </p:cNvPicPr>
           <p:nvPr/>
         </p:nvPicPr>
         <p:blipFill>
-          <a:blip r:embed="rId1"/>
+          <a:blip r:embed="rId3"/>
           <a:stretch>
             <a:fillRect/>
           </a:stretch>
@@ -8908,7 +9142,7 @@
           <a:bodyPr wrap="square" lIns="0" tIns="0" rIns="0" bIns="0" rtlCol="0" anchor="t"/>
           <a:lstStyle/>
           <a:p>
-            <a:pPr indent="0" marL="0">
+            <a:pPr marL="0" indent="0">
               <a:buNone/>
             </a:pPr>
             <a:r>
@@ -9071,14 +9305,14 @@
       </p:sp>
       <p:pic>
         <p:nvPicPr>
-          <p:cNvPr id="10" name="icon-198" descr="preencoded.png">    </p:cNvPr>
+          <p:cNvPr id="10" name="icon-198" descr="preencoded.png"/>
           <p:cNvPicPr>
             <a:picLocks noChangeAspect="1"/>
           </p:cNvPicPr>
           <p:nvPr/>
         </p:nvPicPr>
         <p:blipFill>
-          <a:blip r:embed="rId2"/>
+          <a:blip r:embed="rId4"/>
           <a:stretch>
             <a:fillRect/>
           </a:stretch>
@@ -9114,7 +9348,7 @@
           <a:bodyPr wrap="square" lIns="0" tIns="0" rIns="0" bIns="0" rtlCol="0" anchor="t"/>
           <a:lstStyle/>
           <a:p>
-            <a:pPr indent="0" marL="0">
+            <a:pPr marL="0" indent="0">
               <a:buNone/>
             </a:pPr>
             <a:r>
@@ -9243,7 +9477,7 @@
           </a:prstGeom>
           <a:extLst>
             <a:ext uri="{C572A759-6A51-4108-AA02-DFA0A04FC94B}">
-              <ma14:wrappingTextBoxFlag xmlns:ma14="http://schemas.microsoft.com/office/mac/drawingml/2011/main" val="0"/>
+              <ma14:wrappingTextBoxFlag xmlns:ma14="http://schemas.microsoft.com/office/mac/drawingml/2011/main" xmlns="" val="0"/>
             </a:ext>
           </a:extLst>
         </p:spPr>
@@ -9261,7 +9495,7 @@
           <a:p>
             <a:pPr algn="l"/>
             <a:fld id="{F7021451-1387-4CA6-816F-3879F97B5CBC}" type="slidenum">
-              <a:rPr b="0" lang="en-US"/>
+              <a:rPr lang="en-US" b="0"/>
               <a:t>18</a:t>
             </a:fld>
             <a:endParaRPr lang="en-US"/>
@@ -9296,9 +9530,11 @@
       <p:sp>
         <p:nvSpPr>
           <p:cNvPr id="2" name="Text 0"/>
-          <p:cNvSpPr/>
+          <p:cNvSpPr>
+            <a:spLocks noGrp="1"/>
+          </p:cNvSpPr>
           <p:nvPr>
-            <p:ph idx="100" type="title" hasCustomPrompt="1"/>
+            <p:ph type="title" idx="100" hasCustomPrompt="1"/>
           </p:nvPr>
         </p:nvSpPr>
         <p:spPr>
@@ -9316,7 +9552,7 @@
           <a:bodyPr wrap="square" rtlCol="0" anchor="ctr"/>
           <a:lstStyle/>
           <a:p>
-            <a:pPr algn="l" indent="0" marL="0">
+            <a:pPr marL="0" indent="0" algn="l">
               <a:buNone/>
             </a:pPr>
             <a:r>
@@ -9337,9 +9573,11 @@
       <p:sp>
         <p:nvSpPr>
           <p:cNvPr id="3" name="Text 0"/>
-          <p:cNvSpPr/>
+          <p:cNvSpPr>
+            <a:spLocks noGrp="1"/>
+          </p:cNvSpPr>
           <p:nvPr>
-            <p:ph idx="101" type="body" hasCustomPrompt="1"/>
+            <p:ph type="body" idx="101" hasCustomPrompt="1"/>
           </p:nvPr>
         </p:nvSpPr>
         <p:spPr>
@@ -9357,7 +9595,7 @@
           <a:bodyPr wrap="square" rtlCol="0" anchor="t"/>
           <a:lstStyle/>
           <a:p>
-            <a:pPr algn="l" marL="342900" indent="-342900">
+            <a:pPr marL="342900" indent="-342900" algn="l">
               <a:spcAft>
                 <a:spcPts val="600"/>
               </a:spcAft>
@@ -9375,7 +9613,7 @@
             <a:endParaRPr lang="en-US" sz="1800" dirty="0"/>
           </a:p>
           <a:p>
-            <a:pPr algn="l" marL="342900" indent="-342900">
+            <a:pPr marL="342900" indent="-342900" algn="l">
               <a:spcAft>
                 <a:spcPts val="600"/>
               </a:spcAft>
@@ -9393,7 +9631,7 @@
             <a:endParaRPr lang="en-US" sz="1800" dirty="0"/>
           </a:p>
           <a:p>
-            <a:pPr algn="l" marL="342900" indent="-342900">
+            <a:pPr marL="342900" indent="-342900" algn="l">
               <a:spcAft>
                 <a:spcPts val="600"/>
               </a:spcAft>
@@ -9411,7 +9649,7 @@
             <a:endParaRPr lang="en-US" sz="1800" dirty="0"/>
           </a:p>
           <a:p>
-            <a:pPr algn="l" indent="0" marL="0">
+            <a:pPr marL="0" indent="0" algn="l">
               <a:spcAft>
                 <a:spcPts val="600"/>
               </a:spcAft>
@@ -9428,7 +9666,7 @@
             <a:endParaRPr lang="en-US" sz="1800" dirty="0"/>
           </a:p>
           <a:p>
-            <a:pPr algn="l" indent="0" marL="0">
+            <a:pPr marL="0" indent="0" algn="l">
               <a:spcAft>
                 <a:spcPts val="600"/>
               </a:spcAft>
@@ -9474,9 +9712,11 @@
       <p:sp>
         <p:nvSpPr>
           <p:cNvPr id="2" name="Text 0"/>
-          <p:cNvSpPr/>
+          <p:cNvSpPr>
+            <a:spLocks noGrp="1"/>
+          </p:cNvSpPr>
           <p:nvPr>
-            <p:ph idx="100" type="title" hasCustomPrompt="1"/>
+            <p:ph type="title" idx="100" hasCustomPrompt="1"/>
           </p:nvPr>
         </p:nvSpPr>
         <p:spPr>
@@ -9494,7 +9734,7 @@
           <a:bodyPr wrap="square" lIns="0" tIns="0" rIns="0" bIns="0" rtlCol="0" anchor="ctr"/>
           <a:lstStyle/>
           <a:p>
-            <a:pPr algn="l" indent="0" marL="0">
+            <a:pPr marL="0" indent="0" algn="l">
               <a:buNone/>
             </a:pPr>
             <a:r>
@@ -9566,14 +9806,14 @@
       </p:sp>
       <p:pic>
         <p:nvPicPr>
-          <p:cNvPr id="5" name="icon-3" descr="preencoded.png">    </p:cNvPr>
+          <p:cNvPr id="5" name="icon-3" descr="preencoded.png"/>
           <p:cNvPicPr>
             <a:picLocks noChangeAspect="1"/>
           </p:cNvPicPr>
           <p:nvPr/>
         </p:nvPicPr>
         <p:blipFill>
-          <a:blip r:embed="rId1"/>
+          <a:blip r:embed="rId3"/>
           <a:stretch>
             <a:fillRect/>
           </a:stretch>
@@ -9609,7 +9849,7 @@
           <a:bodyPr wrap="square" lIns="0" tIns="0" rIns="0" bIns="0" rtlCol="0" anchor="t"/>
           <a:lstStyle/>
           <a:p>
-            <a:pPr indent="0" marL="0">
+            <a:pPr marL="0" indent="0">
               <a:buNone/>
             </a:pPr>
             <a:r>
@@ -9754,14 +9994,14 @@
       </p:sp>
       <p:pic>
         <p:nvPicPr>
-          <p:cNvPr id="10" name="icon-8" descr="preencoded.png">    </p:cNvPr>
+          <p:cNvPr id="10" name="icon-8" descr="preencoded.png"/>
           <p:cNvPicPr>
             <a:picLocks noChangeAspect="1"/>
           </p:cNvPicPr>
           <p:nvPr/>
         </p:nvPicPr>
         <p:blipFill>
-          <a:blip r:embed="rId2"/>
+          <a:blip r:embed="rId4"/>
           <a:stretch>
             <a:fillRect/>
           </a:stretch>
@@ -9797,7 +10037,7 @@
           <a:bodyPr wrap="square" lIns="0" tIns="0" rIns="0" bIns="0" rtlCol="0" anchor="t"/>
           <a:lstStyle/>
           <a:p>
-            <a:pPr indent="0" marL="0">
+            <a:pPr marL="0" indent="0">
               <a:buNone/>
             </a:pPr>
             <a:r>
@@ -9833,7 +10073,7 @@
           <a:bodyPr wrap="square" lIns="0" tIns="0" rIns="0" bIns="0" rtlCol="0" anchor="t"/>
           <a:lstStyle/>
           <a:p>
-            <a:pPr indent="0" marL="0">
+            <a:pPr marL="0" indent="0">
               <a:buNone/>
             </a:pPr>
             <a:r>
@@ -9869,7 +10109,7 @@
           <a:bodyPr wrap="square" lIns="0" tIns="0" rIns="0" bIns="0" rtlCol="0" anchor="t"/>
           <a:lstStyle/>
           <a:p>
-            <a:pPr indent="0" marL="0">
+            <a:pPr marL="0" indent="0">
               <a:buNone/>
             </a:pPr>
             <a:r>
@@ -9905,7 +10145,7 @@
           <a:bodyPr wrap="square" lIns="0" tIns="0" rIns="0" bIns="0" rtlCol="0" anchor="t"/>
           <a:lstStyle/>
           <a:p>
-            <a:pPr indent="0" marL="0">
+            <a:pPr marL="0" indent="0">
               <a:buNone/>
             </a:pPr>
             <a:r>
@@ -9940,7 +10180,7 @@
           </a:prstGeom>
           <a:extLst>
             <a:ext uri="{C572A759-6A51-4108-AA02-DFA0A04FC94B}">
-              <ma14:wrappingTextBoxFlag xmlns:ma14="http://schemas.microsoft.com/office/mac/drawingml/2011/main" val="0"/>
+              <ma14:wrappingTextBoxFlag xmlns:ma14="http://schemas.microsoft.com/office/mac/drawingml/2011/main" xmlns="" val="0"/>
             </a:ext>
           </a:extLst>
         </p:spPr>
@@ -9958,7 +10198,7 @@
           <a:p>
             <a:pPr algn="l"/>
             <a:fld id="{F7021451-1387-4CA6-816F-3879F97B5CBC}" type="slidenum">
-              <a:rPr b="0" lang="en-US"/>
+              <a:rPr lang="en-US" b="0"/>
               <a:t>2</a:t>
             </a:fld>
             <a:endParaRPr lang="en-US"/>
@@ -9993,9 +10233,11 @@
       <p:sp>
         <p:nvSpPr>
           <p:cNvPr id="2" name="Text 0"/>
-          <p:cNvSpPr/>
+          <p:cNvSpPr>
+            <a:spLocks noGrp="1"/>
+          </p:cNvSpPr>
           <p:nvPr>
-            <p:ph idx="100" type="title" hasCustomPrompt="1"/>
+            <p:ph type="title" idx="100" hasCustomPrompt="1"/>
           </p:nvPr>
         </p:nvSpPr>
         <p:spPr>
@@ -10013,7 +10255,7 @@
           <a:bodyPr wrap="square" lIns="0" tIns="0" rIns="0" bIns="0" rtlCol="0" anchor="ctr"/>
           <a:lstStyle/>
           <a:p>
-            <a:pPr algn="l" indent="0" marL="0">
+            <a:pPr marL="0" indent="0" algn="l">
               <a:buNone/>
             </a:pPr>
             <a:r>
@@ -10085,14 +10327,14 @@
       </p:sp>
       <p:pic>
         <p:nvPicPr>
-          <p:cNvPr id="5" name="icon-15" descr="preencoded.png">    </p:cNvPr>
+          <p:cNvPr id="5" name="icon-15" descr="preencoded.png"/>
           <p:cNvPicPr>
             <a:picLocks noChangeAspect="1"/>
           </p:cNvPicPr>
           <p:nvPr/>
         </p:nvPicPr>
         <p:blipFill>
-          <a:blip r:embed="rId1"/>
+          <a:blip r:embed="rId3"/>
           <a:stretch>
             <a:fillRect/>
           </a:stretch>
@@ -10128,7 +10370,7 @@
           <a:bodyPr wrap="square" lIns="0" tIns="0" rIns="0" bIns="0" rtlCol="0" anchor="t"/>
           <a:lstStyle/>
           <a:p>
-            <a:pPr indent="0" marL="0">
+            <a:pPr marL="0" indent="0">
               <a:buNone/>
             </a:pPr>
             <a:r>
@@ -10164,7 +10406,7 @@
           <a:bodyPr wrap="square" lIns="0" tIns="0" rIns="0" bIns="0" rtlCol="0" anchor="t"/>
           <a:lstStyle/>
           <a:p>
-            <a:pPr indent="0" marL="0">
+            <a:pPr marL="0" indent="0">
               <a:buNone/>
             </a:pPr>
             <a:r>
@@ -10233,14 +10475,14 @@
       </p:sp>
       <p:pic>
         <p:nvPicPr>
-          <p:cNvPr id="10" name="icon-20" descr="preencoded.png">    </p:cNvPr>
+          <p:cNvPr id="10" name="icon-20" descr="preencoded.png"/>
           <p:cNvPicPr>
             <a:picLocks noChangeAspect="1"/>
           </p:cNvPicPr>
           <p:nvPr/>
         </p:nvPicPr>
         <p:blipFill>
-          <a:blip r:embed="rId2"/>
+          <a:blip r:embed="rId4"/>
           <a:stretch>
             <a:fillRect/>
           </a:stretch>
@@ -10276,7 +10518,7 @@
           <a:bodyPr wrap="square" lIns="0" tIns="0" rIns="0" bIns="0" rtlCol="0" anchor="t"/>
           <a:lstStyle/>
           <a:p>
-            <a:pPr indent="0" marL="0">
+            <a:pPr marL="0" indent="0">
               <a:buNone/>
             </a:pPr>
             <a:r>
@@ -10312,7 +10554,7 @@
           <a:bodyPr wrap="square" lIns="0" tIns="0" rIns="0" bIns="0" rtlCol="0" anchor="t"/>
           <a:lstStyle/>
           <a:p>
-            <a:pPr indent="0" marL="0">
+            <a:pPr marL="0" indent="0">
               <a:buNone/>
             </a:pPr>
             <a:r>
@@ -10381,14 +10623,14 @@
       </p:sp>
       <p:pic>
         <p:nvPicPr>
-          <p:cNvPr id="15" name="icon-25" descr="preencoded.png">    </p:cNvPr>
+          <p:cNvPr id="15" name="icon-25" descr="preencoded.png"/>
           <p:cNvPicPr>
             <a:picLocks noChangeAspect="1"/>
           </p:cNvPicPr>
           <p:nvPr/>
         </p:nvPicPr>
         <p:blipFill>
-          <a:blip r:embed="rId3"/>
+          <a:blip r:embed="rId5"/>
           <a:stretch>
             <a:fillRect/>
           </a:stretch>
@@ -10424,7 +10666,7 @@
           <a:bodyPr wrap="square" lIns="0" tIns="0" rIns="0" bIns="0" rtlCol="0" anchor="t"/>
           <a:lstStyle/>
           <a:p>
-            <a:pPr indent="0" marL="0">
+            <a:pPr marL="0" indent="0">
               <a:buNone/>
             </a:pPr>
             <a:r>
@@ -10460,7 +10702,7 @@
           <a:bodyPr wrap="square" lIns="0" tIns="0" rIns="0" bIns="0" rtlCol="0" anchor="t"/>
           <a:lstStyle/>
           <a:p>
-            <a:pPr indent="0" marL="0">
+            <a:pPr marL="0" indent="0">
               <a:buNone/>
             </a:pPr>
             <a:r>
@@ -10495,7 +10737,7 @@
           </a:prstGeom>
           <a:extLst>
             <a:ext uri="{C572A759-6A51-4108-AA02-DFA0A04FC94B}">
-              <ma14:wrappingTextBoxFlag xmlns:ma14="http://schemas.microsoft.com/office/mac/drawingml/2011/main" val="0"/>
+              <ma14:wrappingTextBoxFlag xmlns:ma14="http://schemas.microsoft.com/office/mac/drawingml/2011/main" xmlns="" val="0"/>
             </a:ext>
           </a:extLst>
         </p:spPr>
@@ -10513,7 +10755,7 @@
           <a:p>
             <a:pPr algn="l"/>
             <a:fld id="{F7021451-1387-4CA6-816F-3879F97B5CBC}" type="slidenum">
-              <a:rPr b="0" lang="en-US"/>
+              <a:rPr lang="en-US" b="0"/>
               <a:t>3</a:t>
             </a:fld>
             <a:endParaRPr lang="en-US"/>
@@ -10548,9 +10790,11 @@
       <p:sp>
         <p:nvSpPr>
           <p:cNvPr id="2" name="Text 0"/>
-          <p:cNvSpPr/>
+          <p:cNvSpPr>
+            <a:spLocks noGrp="1"/>
+          </p:cNvSpPr>
           <p:nvPr>
-            <p:ph idx="100" type="title" hasCustomPrompt="1"/>
+            <p:ph type="title" idx="100" hasCustomPrompt="1"/>
           </p:nvPr>
         </p:nvSpPr>
         <p:spPr>
@@ -10568,7 +10812,7 @@
           <a:bodyPr wrap="square" lIns="0" tIns="0" rIns="0" bIns="0" rtlCol="0" anchor="ctr"/>
           <a:lstStyle/>
           <a:p>
-            <a:pPr algn="l" indent="0" marL="0">
+            <a:pPr marL="0" indent="0" algn="l">
               <a:buNone/>
             </a:pPr>
             <a:r>
@@ -10613,14 +10857,14 @@
       </p:sp>
       <p:pic>
         <p:nvPicPr>
-          <p:cNvPr id="4" name="icon-29" descr="preencoded.png">    </p:cNvPr>
+          <p:cNvPr id="4" name="icon-29" descr="preencoded.png"/>
           <p:cNvPicPr>
             <a:picLocks noChangeAspect="1"/>
           </p:cNvPicPr>
           <p:nvPr/>
         </p:nvPicPr>
         <p:blipFill>
-          <a:blip r:embed="rId1"/>
+          <a:blip r:embed="rId3"/>
           <a:stretch>
             <a:fillRect/>
           </a:stretch>
@@ -10656,7 +10900,7 @@
           <a:bodyPr wrap="square" lIns="0" tIns="0" rIns="0" bIns="0" rtlCol="0" anchor="t"/>
           <a:lstStyle/>
           <a:p>
-            <a:pPr algn="ctr" indent="0" marL="0">
+            <a:pPr marL="0" indent="0" algn="ctr">
               <a:buNone/>
             </a:pPr>
             <a:r>
@@ -10692,7 +10936,7 @@
           <a:bodyPr wrap="square" lIns="0" tIns="0" rIns="0" bIns="0" rtlCol="0" anchor="t"/>
           <a:lstStyle/>
           <a:p>
-            <a:pPr algn="ctr" indent="0" marL="0">
+            <a:pPr marL="0" indent="0" algn="ctr">
               <a:buNone/>
             </a:pPr>
             <a:r>
@@ -10759,14 +11003,14 @@
       </p:sp>
       <p:pic>
         <p:nvPicPr>
-          <p:cNvPr id="9" name="icon-34" descr="preencoded.png">    </p:cNvPr>
+          <p:cNvPr id="9" name="icon-34" descr="preencoded.png"/>
           <p:cNvPicPr>
             <a:picLocks noChangeAspect="1"/>
           </p:cNvPicPr>
           <p:nvPr/>
         </p:nvPicPr>
         <p:blipFill>
-          <a:blip r:embed="rId2"/>
+          <a:blip r:embed="rId4"/>
           <a:stretch>
             <a:fillRect/>
           </a:stretch>
@@ -10802,7 +11046,7 @@
           <a:bodyPr wrap="square" lIns="0" tIns="0" rIns="0" bIns="0" rtlCol="0" anchor="t"/>
           <a:lstStyle/>
           <a:p>
-            <a:pPr algn="ctr" indent="0" marL="0">
+            <a:pPr marL="0" indent="0" algn="ctr">
               <a:buNone/>
             </a:pPr>
             <a:r>
@@ -10838,7 +11082,7 @@
           <a:bodyPr wrap="square" lIns="0" tIns="0" rIns="0" bIns="0" rtlCol="0" anchor="t"/>
           <a:lstStyle/>
           <a:p>
-            <a:pPr algn="ctr" indent="0" marL="0">
+            <a:pPr marL="0" indent="0" algn="ctr">
               <a:buNone/>
             </a:pPr>
             <a:r>
@@ -10905,14 +11149,14 @@
       </p:sp>
       <p:pic>
         <p:nvPicPr>
-          <p:cNvPr id="14" name="icon-39" descr="preencoded.png">    </p:cNvPr>
+          <p:cNvPr id="14" name="icon-39" descr="preencoded.png"/>
           <p:cNvPicPr>
             <a:picLocks noChangeAspect="1"/>
           </p:cNvPicPr>
           <p:nvPr/>
         </p:nvPicPr>
         <p:blipFill>
-          <a:blip r:embed="rId3"/>
+          <a:blip r:embed="rId5"/>
           <a:stretch>
             <a:fillRect/>
           </a:stretch>
@@ -10948,7 +11192,7 @@
           <a:bodyPr wrap="square" lIns="0" tIns="0" rIns="0" bIns="0" rtlCol="0" anchor="t"/>
           <a:lstStyle/>
           <a:p>
-            <a:pPr algn="ctr" indent="0" marL="0">
+            <a:pPr marL="0" indent="0" algn="ctr">
               <a:buNone/>
             </a:pPr>
             <a:r>
@@ -10984,7 +11228,7 @@
           <a:bodyPr wrap="square" lIns="0" tIns="0" rIns="0" bIns="0" rtlCol="0" anchor="t"/>
           <a:lstStyle/>
           <a:p>
-            <a:pPr algn="ctr" indent="0" marL="0">
+            <a:pPr marL="0" indent="0" algn="ctr">
               <a:buNone/>
             </a:pPr>
             <a:r>
@@ -11051,14 +11295,14 @@
       </p:sp>
       <p:pic>
         <p:nvPicPr>
-          <p:cNvPr id="19" name="icon-44" descr="preencoded.png">    </p:cNvPr>
+          <p:cNvPr id="19" name="icon-44" descr="preencoded.png"/>
           <p:cNvPicPr>
             <a:picLocks noChangeAspect="1"/>
           </p:cNvPicPr>
           <p:nvPr/>
         </p:nvPicPr>
         <p:blipFill>
-          <a:blip r:embed="rId4"/>
+          <a:blip r:embed="rId6"/>
           <a:stretch>
             <a:fillRect/>
           </a:stretch>
@@ -11094,7 +11338,7 @@
           <a:bodyPr wrap="square" lIns="0" tIns="0" rIns="0" bIns="0" rtlCol="0" anchor="t"/>
           <a:lstStyle/>
           <a:p>
-            <a:pPr algn="ctr" indent="0" marL="0">
+            <a:pPr marL="0" indent="0" algn="ctr">
               <a:buNone/>
             </a:pPr>
             <a:r>
@@ -11130,7 +11374,7 @@
           <a:bodyPr wrap="square" lIns="0" tIns="0" rIns="0" bIns="0" rtlCol="0" anchor="t"/>
           <a:lstStyle/>
           <a:p>
-            <a:pPr algn="ctr" indent="0" marL="0">
+            <a:pPr marL="0" indent="0" algn="ctr">
               <a:buNone/>
             </a:pPr>
             <a:r>
@@ -11166,7 +11410,7 @@
           <a:bodyPr wrap="square" lIns="0" tIns="0" rIns="0" bIns="0" rtlCol="0" anchor="t"/>
           <a:lstStyle/>
           <a:p>
-            <a:pPr algn="ctr" indent="0" marL="0">
+            <a:pPr marL="0" indent="0" algn="ctr">
               <a:buNone/>
             </a:pPr>
             <a:r>
@@ -11201,7 +11445,7 @@
           </a:prstGeom>
           <a:extLst>
             <a:ext uri="{C572A759-6A51-4108-AA02-DFA0A04FC94B}">
-              <ma14:wrappingTextBoxFlag xmlns:ma14="http://schemas.microsoft.com/office/mac/drawingml/2011/main" val="0"/>
+              <ma14:wrappingTextBoxFlag xmlns:ma14="http://schemas.microsoft.com/office/mac/drawingml/2011/main" xmlns="" val="0"/>
             </a:ext>
           </a:extLst>
         </p:spPr>
@@ -11219,7 +11463,7 @@
           <a:p>
             <a:pPr algn="l"/>
             <a:fld id="{F7021451-1387-4CA6-816F-3879F97B5CBC}" type="slidenum">
-              <a:rPr b="0" lang="en-US"/>
+              <a:rPr lang="en-US" b="0"/>
               <a:t>4</a:t>
             </a:fld>
             <a:endParaRPr lang="en-US"/>
@@ -11254,9 +11498,11 @@
       <p:sp>
         <p:nvSpPr>
           <p:cNvPr id="2" name="Text 0"/>
-          <p:cNvSpPr/>
+          <p:cNvSpPr>
+            <a:spLocks noGrp="1"/>
+          </p:cNvSpPr>
           <p:nvPr>
-            <p:ph idx="100" type="title" hasCustomPrompt="1"/>
+            <p:ph type="title" idx="100" hasCustomPrompt="1"/>
           </p:nvPr>
         </p:nvSpPr>
         <p:spPr>
@@ -11274,7 +11520,7 @@
           <a:bodyPr wrap="square" lIns="0" tIns="0" rIns="0" bIns="0" rtlCol="0" anchor="ctr"/>
           <a:lstStyle/>
           <a:p>
-            <a:pPr algn="l" indent="0" marL="0">
+            <a:pPr marL="0" indent="0" algn="l">
               <a:buNone/>
             </a:pPr>
             <a:r>
@@ -11313,7 +11559,7 @@
           <a:bodyPr wrap="square" lIns="0" tIns="0" rIns="0" bIns="0" rtlCol="0" anchor="t"/>
           <a:lstStyle/>
           <a:p>
-            <a:pPr indent="0" marL="0">
+            <a:pPr marL="0" indent="0">
               <a:buNone/>
             </a:pPr>
             <a:r>
@@ -11352,7 +11598,7 @@
           <a:bodyPr wrap="square" lIns="0" tIns="0" rIns="0" bIns="0" rtlCol="0" anchor="t"/>
           <a:lstStyle/>
           <a:p>
-            <a:pPr indent="0" marL="0">
+            <a:pPr marL="0" indent="0">
               <a:buNone/>
             </a:pPr>
             <a:r>
@@ -11388,7 +11634,7 @@
           <a:bodyPr wrap="square" lIns="0" tIns="0" rIns="0" bIns="0" rtlCol="0" anchor="t"/>
           <a:lstStyle/>
           <a:p>
-            <a:pPr indent="0" marL="0">
+            <a:pPr marL="0" indent="0">
               <a:buNone/>
             </a:pPr>
             <a:r>
@@ -11427,7 +11673,7 @@
           <a:bodyPr wrap="square" lIns="0" tIns="0" rIns="0" bIns="0" rtlCol="0" anchor="t"/>
           <a:lstStyle/>
           <a:p>
-            <a:pPr indent="0" marL="0">
+            <a:pPr marL="0" indent="0">
               <a:buNone/>
             </a:pPr>
             <a:r>
@@ -11463,7 +11709,7 @@
           <a:bodyPr wrap="square" lIns="0" tIns="0" rIns="0" bIns="0" rtlCol="0" anchor="t"/>
           <a:lstStyle/>
           <a:p>
-            <a:pPr indent="0" marL="0">
+            <a:pPr marL="0" indent="0">
               <a:buNone/>
             </a:pPr>
             <a:r>
@@ -11502,7 +11748,7 @@
           <a:bodyPr wrap="square" lIns="0" tIns="0" rIns="0" bIns="0" rtlCol="0" anchor="t"/>
           <a:lstStyle/>
           <a:p>
-            <a:pPr indent="0" marL="0">
+            <a:pPr marL="0" indent="0">
               <a:buNone/>
             </a:pPr>
             <a:r>
@@ -11571,14 +11817,14 @@
       </p:sp>
       <p:pic>
         <p:nvPicPr>
-          <p:cNvPr id="11" name="icon-56" descr="preencoded.png">    </p:cNvPr>
+          <p:cNvPr id="11" name="icon-56" descr="preencoded.png"/>
           <p:cNvPicPr>
             <a:picLocks noChangeAspect="1"/>
           </p:cNvPicPr>
           <p:nvPr/>
         </p:nvPicPr>
         <p:blipFill>
-          <a:blip r:embed="rId1"/>
+          <a:blip r:embed="rId3"/>
           <a:stretch>
             <a:fillRect/>
           </a:stretch>
@@ -11614,7 +11860,7 @@
           <a:bodyPr wrap="square" lIns="0" tIns="0" rIns="0" bIns="0" rtlCol="0" anchor="t"/>
           <a:lstStyle/>
           <a:p>
-            <a:pPr indent="0" marL="0">
+            <a:pPr marL="0" indent="0">
               <a:spcAft>
                 <a:spcPts val="600"/>
               </a:spcAft>
@@ -11628,43 +11874,31 @@
               </a:rPr>
               <a:t>Nguồn: </a:t>
             </a:r>
-            <a:pPr indent="0" marL="0">
+            <a:r>
+              <a:rPr lang="en-US" sz="1400" dirty="0">
+                <a:solidFill>
+                  <a:schemeClr val="tx1"/>
+                </a:solidFill>
+              </a:rPr>
+              <a:t>danh mục “Architecture of Vietnam” trên Wikimedia Commons, tất cả có giấy phép tự do.</a:t>
+            </a:r>
+            <a:endParaRPr lang="en-US" sz="1400" dirty="0"/>
+          </a:p>
+          <a:p>
+            <a:pPr marL="0" indent="0">
               <a:spcAft>
                 <a:spcPts val="600"/>
               </a:spcAft>
               <a:buNone/>
             </a:pPr>
             <a:r>
-              <a:rPr lang="en-US" sz="1400" dirty="0">
+              <a:rPr lang="en-US" sz="1400" b="1" dirty="0">
                 <a:solidFill>
                   <a:schemeClr val="tx1"/>
                 </a:solidFill>
               </a:rPr>
-              <a:t>danh mục “Architecture of Vietnam” trên Wikimedia Commons, tất cả có giấy phép tự do.</a:t>
-            </a:r>
-            <a:endParaRPr lang="en-US" sz="1400" dirty="0"/>
-          </a:p>
-          <a:p>
-            <a:pPr indent="0" marL="0">
-              <a:spcAft>
-                <a:spcPts val="600"/>
-              </a:spcAft>
-              <a:buNone/>
-            </a:pPr>
-            <a:r>
-              <a:rPr lang="en-US" sz="1400" b="1" dirty="0">
-                <a:solidFill>
-                  <a:schemeClr val="tx1"/>
-                </a:solidFill>
-              </a:rPr>
               <a:t>Lọc: </a:t>
             </a:r>
-            <a:pPr indent="0" marL="0">
-              <a:spcAft>
-                <a:spcPts val="600"/>
-              </a:spcAft>
-              <a:buNone/>
-            </a:pPr>
             <a:r>
               <a:rPr lang="en-US" sz="1400" dirty="0">
                 <a:solidFill>
@@ -11697,7 +11931,7 @@
           </a:prstGeom>
           <a:extLst>
             <a:ext uri="{C572A759-6A51-4108-AA02-DFA0A04FC94B}">
-              <ma14:wrappingTextBoxFlag xmlns:ma14="http://schemas.microsoft.com/office/mac/drawingml/2011/main" val="0"/>
+              <ma14:wrappingTextBoxFlag xmlns:ma14="http://schemas.microsoft.com/office/mac/drawingml/2011/main" xmlns="" val="0"/>
             </a:ext>
           </a:extLst>
         </p:spPr>
@@ -11715,7 +11949,7 @@
           <a:p>
             <a:pPr algn="l"/>
             <a:fld id="{F7021451-1387-4CA6-816F-3879F97B5CBC}" type="slidenum">
-              <a:rPr b="0" lang="en-US"/>
+              <a:rPr lang="en-US" b="0"/>
               <a:t>5</a:t>
             </a:fld>
             <a:endParaRPr lang="en-US"/>
@@ -11750,9 +11984,11 @@
       <p:sp>
         <p:nvSpPr>
           <p:cNvPr id="2" name="Text 0"/>
-          <p:cNvSpPr/>
+          <p:cNvSpPr>
+            <a:spLocks noGrp="1"/>
+          </p:cNvSpPr>
           <p:nvPr>
-            <p:ph idx="100" type="title" hasCustomPrompt="1"/>
+            <p:ph type="title" idx="100" hasCustomPrompt="1"/>
           </p:nvPr>
         </p:nvSpPr>
         <p:spPr>
@@ -11770,7 +12006,7 @@
           <a:bodyPr wrap="square" lIns="0" tIns="0" rIns="0" bIns="0" rtlCol="0" anchor="ctr"/>
           <a:lstStyle/>
           <a:p>
-            <a:pPr algn="l" indent="0" marL="0">
+            <a:pPr marL="0" indent="0" algn="l">
               <a:buNone/>
             </a:pPr>
             <a:r>
@@ -11815,14 +12051,14 @@
       </p:sp>
       <p:pic>
         <p:nvPicPr>
-          <p:cNvPr id="4" name="icon-59" descr="preencoded.png">    </p:cNvPr>
+          <p:cNvPr id="4" name="icon-59" descr="preencoded.png"/>
           <p:cNvPicPr>
             <a:picLocks noChangeAspect="1"/>
           </p:cNvPicPr>
           <p:nvPr/>
         </p:nvPicPr>
         <p:blipFill>
-          <a:blip r:embed="rId1"/>
+          <a:blip r:embed="rId3"/>
           <a:stretch>
             <a:fillRect/>
           </a:stretch>
@@ -11858,7 +12094,7 @@
           <a:bodyPr wrap="square" lIns="0" tIns="0" rIns="0" bIns="0" rtlCol="0" anchor="t"/>
           <a:lstStyle/>
           <a:p>
-            <a:pPr indent="0" marL="0">
+            <a:pPr marL="0" indent="0">
               <a:buNone/>
             </a:pPr>
             <a:r>
@@ -12015,7 +12251,7 @@
           <a:bodyPr wrap="square" lIns="0" tIns="0" rIns="0" bIns="0" rtlCol="0" anchor="t"/>
           <a:lstStyle/>
           <a:p>
-            <a:pPr indent="0" marL="0">
+            <a:pPr marL="0" indent="0">
               <a:buNone/>
             </a:pPr>
             <a:r>
@@ -12051,7 +12287,7 @@
           <a:bodyPr wrap="square" lIns="0" tIns="0" rIns="0" bIns="0" rtlCol="0" anchor="t"/>
           <a:lstStyle/>
           <a:p>
-            <a:pPr indent="0" marL="0">
+            <a:pPr marL="0" indent="0">
               <a:buNone/>
             </a:pPr>
             <a:r>
@@ -12087,7 +12323,7 @@
           <a:bodyPr wrap="square" lIns="0" tIns="0" rIns="0" bIns="0" rtlCol="0" anchor="t"/>
           <a:lstStyle/>
           <a:p>
-            <a:pPr indent="0" marL="0">
+            <a:pPr marL="0" indent="0">
               <a:buNone/>
             </a:pPr>
             <a:r>
@@ -12123,7 +12359,7 @@
           <a:bodyPr wrap="square" lIns="0" tIns="0" rIns="0" bIns="0" rtlCol="0" anchor="t"/>
           <a:lstStyle/>
           <a:p>
-            <a:pPr indent="0" marL="0">
+            <a:pPr marL="0" indent="0">
               <a:buNone/>
             </a:pPr>
             <a:r>
@@ -12158,7 +12394,7 @@
           </a:prstGeom>
           <a:extLst>
             <a:ext uri="{C572A759-6A51-4108-AA02-DFA0A04FC94B}">
-              <ma14:wrappingTextBoxFlag xmlns:ma14="http://schemas.microsoft.com/office/mac/drawingml/2011/main" val="0"/>
+              <ma14:wrappingTextBoxFlag xmlns:ma14="http://schemas.microsoft.com/office/mac/drawingml/2011/main" xmlns="" val="0"/>
             </a:ext>
           </a:extLst>
         </p:spPr>
@@ -12176,7 +12412,7 @@
           <a:p>
             <a:pPr algn="l"/>
             <a:fld id="{F7021451-1387-4CA6-816F-3879F97B5CBC}" type="slidenum">
-              <a:rPr b="0" lang="en-US"/>
+              <a:rPr lang="en-US" b="0"/>
               <a:t>6</a:t>
             </a:fld>
             <a:endParaRPr lang="en-US"/>
@@ -12211,9 +12447,11 @@
       <p:sp>
         <p:nvSpPr>
           <p:cNvPr id="2" name="Text 0"/>
-          <p:cNvSpPr/>
+          <p:cNvSpPr>
+            <a:spLocks noGrp="1"/>
+          </p:cNvSpPr>
           <p:nvPr>
-            <p:ph idx="100" type="title" hasCustomPrompt="1"/>
+            <p:ph type="title" idx="100" hasCustomPrompt="1"/>
           </p:nvPr>
         </p:nvSpPr>
         <p:spPr>
@@ -12231,7 +12469,7 @@
           <a:bodyPr wrap="square" lIns="0" tIns="0" rIns="0" bIns="0" rtlCol="0" anchor="ctr"/>
           <a:lstStyle/>
           <a:p>
-            <a:pPr algn="l" indent="0" marL="0">
+            <a:pPr marL="0" indent="0" algn="l">
               <a:buNone/>
             </a:pPr>
             <a:r>
@@ -12270,7 +12508,7 @@
           <a:bodyPr wrap="square" lIns="0" tIns="0" rIns="0" bIns="0" rtlCol="0" anchor="t"/>
           <a:lstStyle/>
           <a:p>
-            <a:pPr indent="0" marL="0">
+            <a:pPr marL="0" indent="0">
               <a:buNone/>
             </a:pPr>
             <a:r>
@@ -12284,7 +12522,7 @@
             <a:endParaRPr lang="en-US" sz="1500" dirty="0"/>
           </a:p>
           <a:p>
-            <a:pPr indent="0" marL="0">
+            <a:pPr marL="0" indent="0">
               <a:buNone/>
             </a:pPr>
             <a:r>
@@ -12298,7 +12536,7 @@
             <a:endParaRPr lang="en-US" sz="1500" dirty="0"/>
           </a:p>
           <a:p>
-            <a:pPr indent="0" marL="0">
+            <a:pPr marL="0" indent="0">
               <a:buNone/>
             </a:pPr>
             <a:r>
@@ -12312,7 +12550,7 @@
             <a:endParaRPr lang="en-US" sz="1500" dirty="0"/>
           </a:p>
           <a:p>
-            <a:pPr indent="0" marL="0">
+            <a:pPr marL="0" indent="0">
               <a:buNone/>
             </a:pPr>
             <a:r>
@@ -12326,7 +12564,7 @@
             <a:endParaRPr lang="en-US" sz="1500" dirty="0"/>
           </a:p>
           <a:p>
-            <a:pPr indent="0" marL="0">
+            <a:pPr marL="0" indent="0">
               <a:buNone/>
             </a:pPr>
             <a:r>
@@ -12362,7 +12600,7 @@
           <a:bodyPr wrap="square" lIns="0" tIns="0" rIns="0" bIns="0" rtlCol="0" anchor="t"/>
           <a:lstStyle/>
           <a:p>
-            <a:pPr indent="0" marL="0">
+            <a:pPr marL="0" indent="0">
               <a:buNone/>
             </a:pPr>
             <a:r>
@@ -12379,7 +12617,7 @@
       </p:sp>
       <p:graphicFrame>
         <p:nvGraphicFramePr>
-          <p:cNvPr id="5" name="chart-69" descr=""/>
+          <p:cNvPr id="5" name="chart-69"/>
           <p:cNvGraphicFramePr/>
           <p:nvPr/>
         </p:nvGraphicFramePr>
@@ -12387,9 +12625,9 @@
           <a:off x="4572000" y="1188720"/>
           <a:ext cx="4114800" cy="3291840"/>
         </p:xfrm>
-        <a:graphic xmlns:a="http://schemas.openxmlformats.org/drawingml/2006/main">
+        <a:graphic>
           <a:graphicData uri="http://schemas.openxmlformats.org/drawingml/2006/chart">
-            <c:chart xmlns:c="http://schemas.openxmlformats.org/drawingml/2006/chart" r:id="rId1"/>
+            <c:chart xmlns:c="http://schemas.openxmlformats.org/drawingml/2006/chart" xmlns:r="http://schemas.openxmlformats.org/officeDocument/2006/relationships" r:id="rId3"/>
           </a:graphicData>
         </a:graphic>
       </p:graphicFrame>
@@ -12413,7 +12651,7 @@
           </a:prstGeom>
           <a:extLst>
             <a:ext uri="{C572A759-6A51-4108-AA02-DFA0A04FC94B}">
-              <ma14:wrappingTextBoxFlag xmlns:ma14="http://schemas.microsoft.com/office/mac/drawingml/2011/main" val="0"/>
+              <ma14:wrappingTextBoxFlag xmlns:ma14="http://schemas.microsoft.com/office/mac/drawingml/2011/main" xmlns="" val="0"/>
             </a:ext>
           </a:extLst>
         </p:spPr>
@@ -12431,7 +12669,7 @@
           <a:p>
             <a:pPr algn="l"/>
             <a:fld id="{F7021451-1387-4CA6-816F-3879F97B5CBC}" type="slidenum">
-              <a:rPr b="0" lang="en-US"/>
+              <a:rPr lang="en-US" b="0"/>
               <a:t>7</a:t>
             </a:fld>
             <a:endParaRPr lang="en-US"/>
@@ -12466,9 +12704,11 @@
       <p:sp>
         <p:nvSpPr>
           <p:cNvPr id="2" name="Text 0"/>
-          <p:cNvSpPr/>
+          <p:cNvSpPr>
+            <a:spLocks noGrp="1"/>
+          </p:cNvSpPr>
           <p:nvPr>
-            <p:ph idx="100" type="title" hasCustomPrompt="1"/>
+            <p:ph type="title" idx="100" hasCustomPrompt="1"/>
           </p:nvPr>
         </p:nvSpPr>
         <p:spPr>
@@ -12486,7 +12726,7 @@
           <a:bodyPr wrap="square" lIns="0" tIns="0" rIns="0" bIns="0" rtlCol="0" anchor="ctr"/>
           <a:lstStyle/>
           <a:p>
-            <a:pPr algn="l" indent="0" marL="0">
+            <a:pPr marL="0" indent="0" algn="l">
               <a:buNone/>
             </a:pPr>
             <a:r>
@@ -12520,17 +12760,41 @@
         </p:nvGraphicFramePr>
         <p:xfrm>
           <a:off x="457200" y="1280160"/>
-          <a:ext cx="8229600" cy="914400"/>
+          <a:ext cx="8229600" cy="2267712"/>
         </p:xfrm>
         <a:graphic>
           <a:graphicData uri="http://schemas.openxmlformats.org/drawingml/2006/table">
             <a:tbl>
               <a:tblPr/>
               <a:tblGrid>
-                <a:gridCol w="1828800"/>
-                <a:gridCol w="2560320"/>
-                <a:gridCol w="2377440"/>
-                <a:gridCol w="1463040"/>
+                <a:gridCol w="1828800">
+                  <a:extLst>
+                    <a:ext uri="{9D8B030D-6E8A-4147-A177-3AD203B41FA5}">
+                      <a16:colId xmlns:a16="http://schemas.microsoft.com/office/drawing/2014/main" val="20000"/>
+                    </a:ext>
+                  </a:extLst>
+                </a:gridCol>
+                <a:gridCol w="2560320">
+                  <a:extLst>
+                    <a:ext uri="{9D8B030D-6E8A-4147-A177-3AD203B41FA5}">
+                      <a16:colId xmlns:a16="http://schemas.microsoft.com/office/drawing/2014/main" val="20001"/>
+                    </a:ext>
+                  </a:extLst>
+                </a:gridCol>
+                <a:gridCol w="2377440">
+                  <a:extLst>
+                    <a:ext uri="{9D8B030D-6E8A-4147-A177-3AD203B41FA5}">
+                      <a16:colId xmlns:a16="http://schemas.microsoft.com/office/drawing/2014/main" val="20002"/>
+                    </a:ext>
+                  </a:extLst>
+                </a:gridCol>
+                <a:gridCol w="1463040">
+                  <a:extLst>
+                    <a:ext uri="{9D8B030D-6E8A-4147-A177-3AD203B41FA5}">
+                      <a16:colId xmlns:a16="http://schemas.microsoft.com/office/drawing/2014/main" val="20003"/>
+                    </a:ext>
+                  </a:extLst>
+                </a:gridCol>
               </a:tblGrid>
               <a:tr h="566928">
                 <a:tc>
@@ -12538,7 +12802,7 @@
                     <a:bodyPr/>
                     <a:lstStyle/>
                     <a:p>
-                      <a:pPr indent="0" marL="0">
+                      <a:pPr marL="0" indent="0">
                         <a:buNone/>
                       </a:pPr>
                       <a:r>
@@ -12559,7 +12823,7 @@
                       </a:endParaRPr>
                     </a:p>
                   </a:txBody>
-                  <a:tcPr marL="91440" marR="91440" marT="45720" marB="45720" anchor="ctr">
+                  <a:tcPr anchor="ctr">
                     <a:lnL w="6350" cap="flat" cmpd="sng" algn="ctr">
                       <a:solidFill>
                         <a:srgbClr val="D3D8CF"/>
@@ -12606,7 +12870,7 @@
                     <a:bodyPr/>
                     <a:lstStyle/>
                     <a:p>
-                      <a:pPr indent="0" marL="0">
+                      <a:pPr marL="0" indent="0">
                         <a:buNone/>
                       </a:pPr>
                       <a:r>
@@ -12627,7 +12891,7 @@
                       </a:endParaRPr>
                     </a:p>
                   </a:txBody>
-                  <a:tcPr marL="91440" marR="91440" marT="45720" marB="45720" anchor="ctr">
+                  <a:tcPr anchor="ctr">
                     <a:lnL w="6350" cap="flat" cmpd="sng" algn="ctr">
                       <a:solidFill>
                         <a:srgbClr val="D3D8CF"/>
@@ -12674,7 +12938,7 @@
                     <a:bodyPr/>
                     <a:lstStyle/>
                     <a:p>
-                      <a:pPr indent="0" marL="0">
+                      <a:pPr marL="0" indent="0">
                         <a:buNone/>
                       </a:pPr>
                       <a:r>
@@ -12695,7 +12959,7 @@
                       </a:endParaRPr>
                     </a:p>
                   </a:txBody>
-                  <a:tcPr marL="91440" marR="91440" marT="45720" marB="45720" anchor="ctr">
+                  <a:tcPr anchor="ctr">
                     <a:lnL w="6350" cap="flat" cmpd="sng" algn="ctr">
                       <a:solidFill>
                         <a:srgbClr val="D3D8CF"/>
@@ -12742,7 +13006,7 @@
                     <a:bodyPr/>
                     <a:lstStyle/>
                     <a:p>
-                      <a:pPr indent="0" marL="0">
+                      <a:pPr marL="0" indent="0">
                         <a:buNone/>
                       </a:pPr>
                       <a:r>
@@ -12763,7 +13027,7 @@
                       </a:endParaRPr>
                     </a:p>
                   </a:txBody>
-                  <a:tcPr marL="91440" marR="91440" marT="45720" marB="45720" anchor="ctr">
+                  <a:tcPr anchor="ctr">
                     <a:lnL w="6350" cap="flat" cmpd="sng" algn="ctr">
                       <a:solidFill>
                         <a:srgbClr val="D3D8CF"/>
@@ -12805,6 +13069,11 @@
                     </a:solidFill>
                   </a:tcPr>
                 </a:tc>
+                <a:extLst>
+                  <a:ext uri="{0D108BD9-81ED-4DB2-BD59-A6C34878D82A}">
+                    <a16:rowId xmlns:a16="http://schemas.microsoft.com/office/drawing/2014/main" val="10000"/>
+                  </a:ext>
+                </a:extLst>
               </a:tr>
               <a:tr h="566928">
                 <a:tc>
@@ -12812,7 +13081,7 @@
                     <a:bodyPr/>
                     <a:lstStyle/>
                     <a:p>
-                      <a:pPr indent="0" marL="0">
+                      <a:pPr marL="0" indent="0">
                         <a:buNone/>
                       </a:pPr>
                       <a:r>
@@ -12833,7 +13102,7 @@
                       </a:endParaRPr>
                     </a:p>
                   </a:txBody>
-                  <a:tcPr marL="91440" marR="91440" marT="45720" marB="45720" anchor="ctr">
+                  <a:tcPr anchor="ctr">
                     <a:lnL w="6350" cap="flat" cmpd="sng" algn="ctr">
                       <a:solidFill>
                         <a:srgbClr val="D3D8CF"/>
@@ -12877,7 +13146,7 @@
                     <a:bodyPr/>
                     <a:lstStyle/>
                     <a:p>
-                      <a:pPr indent="0" marL="0">
+                      <a:pPr marL="0" indent="0">
                         <a:buNone/>
                       </a:pPr>
                       <a:r>
@@ -12898,7 +13167,7 @@
                       </a:endParaRPr>
                     </a:p>
                   </a:txBody>
-                  <a:tcPr marL="91440" marR="91440" marT="45720" marB="45720" anchor="ctr">
+                  <a:tcPr anchor="ctr">
                     <a:lnL w="6350" cap="flat" cmpd="sng" algn="ctr">
                       <a:solidFill>
                         <a:srgbClr val="D3D8CF"/>
@@ -12942,7 +13211,7 @@
                     <a:bodyPr/>
                     <a:lstStyle/>
                     <a:p>
-                      <a:pPr indent="0" marL="0">
+                      <a:pPr marL="0" indent="0">
                         <a:buNone/>
                       </a:pPr>
                       <a:r>
@@ -12963,7 +13232,7 @@
                       </a:endParaRPr>
                     </a:p>
                   </a:txBody>
-                  <a:tcPr marL="91440" marR="91440" marT="45720" marB="45720" anchor="ctr">
+                  <a:tcPr anchor="ctr">
                     <a:lnL w="6350" cap="flat" cmpd="sng" algn="ctr">
                       <a:solidFill>
                         <a:srgbClr val="D3D8CF"/>
@@ -13007,7 +13276,7 @@
                     <a:bodyPr/>
                     <a:lstStyle/>
                     <a:p>
-                      <a:pPr indent="0" marL="0">
+                      <a:pPr marL="0" indent="0">
                         <a:buNone/>
                       </a:pPr>
                       <a:r>
@@ -13028,7 +13297,7 @@
                       </a:endParaRPr>
                     </a:p>
                   </a:txBody>
-                  <a:tcPr marL="91440" marR="91440" marT="45720" marB="45720" anchor="ctr">
+                  <a:tcPr anchor="ctr">
                     <a:lnL w="6350" cap="flat" cmpd="sng" algn="ctr">
                       <a:solidFill>
                         <a:srgbClr val="D3D8CF"/>
@@ -13067,6 +13336,11 @@
                     </a:lnB>
                   </a:tcPr>
                 </a:tc>
+                <a:extLst>
+                  <a:ext uri="{0D108BD9-81ED-4DB2-BD59-A6C34878D82A}">
+                    <a16:rowId xmlns:a16="http://schemas.microsoft.com/office/drawing/2014/main" val="10001"/>
+                  </a:ext>
+                </a:extLst>
               </a:tr>
               <a:tr h="566928">
                 <a:tc>
@@ -13074,7 +13348,7 @@
                     <a:bodyPr/>
                     <a:lstStyle/>
                     <a:p>
-                      <a:pPr indent="0" marL="0">
+                      <a:pPr marL="0" indent="0">
                         <a:buNone/>
                       </a:pPr>
                       <a:r>
@@ -13095,7 +13369,7 @@
                       </a:endParaRPr>
                     </a:p>
                   </a:txBody>
-                  <a:tcPr marL="91440" marR="91440" marT="45720" marB="45720" anchor="ctr">
+                  <a:tcPr anchor="ctr">
                     <a:lnL w="6350" cap="flat" cmpd="sng" algn="ctr">
                       <a:solidFill>
                         <a:srgbClr val="D3D8CF"/>
@@ -13139,7 +13413,7 @@
                     <a:bodyPr/>
                     <a:lstStyle/>
                     <a:p>
-                      <a:pPr indent="0" marL="0">
+                      <a:pPr marL="0" indent="0">
                         <a:buNone/>
                       </a:pPr>
                       <a:r>
@@ -13160,7 +13434,7 @@
                       </a:endParaRPr>
                     </a:p>
                   </a:txBody>
-                  <a:tcPr marL="91440" marR="91440" marT="45720" marB="45720" anchor="ctr">
+                  <a:tcPr anchor="ctr">
                     <a:lnL w="6350" cap="flat" cmpd="sng" algn="ctr">
                       <a:solidFill>
                         <a:srgbClr val="D3D8CF"/>
@@ -13204,7 +13478,7 @@
                     <a:bodyPr/>
                     <a:lstStyle/>
                     <a:p>
-                      <a:pPr indent="0" marL="0">
+                      <a:pPr marL="0" indent="0">
                         <a:buNone/>
                       </a:pPr>
                       <a:r>
@@ -13225,7 +13499,7 @@
                       </a:endParaRPr>
                     </a:p>
                   </a:txBody>
-                  <a:tcPr marL="91440" marR="91440" marT="45720" marB="45720" anchor="ctr">
+                  <a:tcPr anchor="ctr">
                     <a:lnL w="6350" cap="flat" cmpd="sng" algn="ctr">
                       <a:solidFill>
                         <a:srgbClr val="D3D8CF"/>
@@ -13269,7 +13543,7 @@
                     <a:bodyPr/>
                     <a:lstStyle/>
                     <a:p>
-                      <a:pPr indent="0" marL="0">
+                      <a:pPr marL="0" indent="0">
                         <a:buNone/>
                       </a:pPr>
                       <a:r>
@@ -13290,7 +13564,7 @@
                       </a:endParaRPr>
                     </a:p>
                   </a:txBody>
-                  <a:tcPr marL="91440" marR="91440" marT="45720" marB="45720" anchor="ctr">
+                  <a:tcPr anchor="ctr">
                     <a:lnL w="6350" cap="flat" cmpd="sng" algn="ctr">
                       <a:solidFill>
                         <a:srgbClr val="D3D8CF"/>
@@ -13329,6 +13603,11 @@
                     </a:lnB>
                   </a:tcPr>
                 </a:tc>
+                <a:extLst>
+                  <a:ext uri="{0D108BD9-81ED-4DB2-BD59-A6C34878D82A}">
+                    <a16:rowId xmlns:a16="http://schemas.microsoft.com/office/drawing/2014/main" val="10002"/>
+                  </a:ext>
+                </a:extLst>
               </a:tr>
               <a:tr h="566928">
                 <a:tc>
@@ -13336,7 +13615,7 @@
                     <a:bodyPr/>
                     <a:lstStyle/>
                     <a:p>
-                      <a:pPr indent="0" marL="0">
+                      <a:pPr marL="0" indent="0">
                         <a:buNone/>
                       </a:pPr>
                       <a:r>
@@ -13357,7 +13636,7 @@
                       </a:endParaRPr>
                     </a:p>
                   </a:txBody>
-                  <a:tcPr marL="91440" marR="91440" marT="45720" marB="45720" anchor="ctr">
+                  <a:tcPr anchor="ctr">
                     <a:lnL w="6350" cap="flat" cmpd="sng" algn="ctr">
                       <a:solidFill>
                         <a:srgbClr val="D3D8CF"/>
@@ -13401,7 +13680,7 @@
                     <a:bodyPr/>
                     <a:lstStyle/>
                     <a:p>
-                      <a:pPr indent="0" marL="0">
+                      <a:pPr marL="0" indent="0">
                         <a:buNone/>
                       </a:pPr>
                       <a:r>
@@ -13422,7 +13701,7 @@
                       </a:endParaRPr>
                     </a:p>
                   </a:txBody>
-                  <a:tcPr marL="91440" marR="91440" marT="45720" marB="45720" anchor="ctr">
+                  <a:tcPr anchor="ctr">
                     <a:lnL w="6350" cap="flat" cmpd="sng" algn="ctr">
                       <a:solidFill>
                         <a:srgbClr val="D3D8CF"/>
@@ -13466,7 +13745,7 @@
                     <a:bodyPr/>
                     <a:lstStyle/>
                     <a:p>
-                      <a:pPr indent="0" marL="0">
+                      <a:pPr marL="0" indent="0">
                         <a:buNone/>
                       </a:pPr>
                       <a:r>
@@ -13487,7 +13766,7 @@
                       </a:endParaRPr>
                     </a:p>
                   </a:txBody>
-                  <a:tcPr marL="91440" marR="91440" marT="45720" marB="45720" anchor="ctr">
+                  <a:tcPr anchor="ctr">
                     <a:lnL w="6350" cap="flat" cmpd="sng" algn="ctr">
                       <a:solidFill>
                         <a:srgbClr val="D3D8CF"/>
@@ -13531,7 +13810,7 @@
                     <a:bodyPr/>
                     <a:lstStyle/>
                     <a:p>
-                      <a:pPr indent="0" marL="0">
+                      <a:pPr marL="0" indent="0">
                         <a:buNone/>
                       </a:pPr>
                       <a:r>
@@ -13552,7 +13831,7 @@
                       </a:endParaRPr>
                     </a:p>
                   </a:txBody>
-                  <a:tcPr marL="91440" marR="91440" marT="45720" marB="45720" anchor="ctr">
+                  <a:tcPr anchor="ctr">
                     <a:lnL w="6350" cap="flat" cmpd="sng" algn="ctr">
                       <a:solidFill>
                         <a:srgbClr val="D3D8CF"/>
@@ -13591,6 +13870,11 @@
                     </a:lnB>
                   </a:tcPr>
                 </a:tc>
+                <a:extLst>
+                  <a:ext uri="{0D108BD9-81ED-4DB2-BD59-A6C34878D82A}">
+                    <a16:rowId xmlns:a16="http://schemas.microsoft.com/office/drawing/2014/main" val="10003"/>
+                  </a:ext>
+                </a:extLst>
               </a:tr>
             </a:tbl>
           </a:graphicData>
@@ -13617,7 +13901,7 @@
           <a:bodyPr wrap="square" lIns="0" tIns="0" rIns="0" bIns="0" rtlCol="0" anchor="t"/>
           <a:lstStyle/>
           <a:p>
-            <a:pPr indent="0" marL="0">
+            <a:pPr marL="0" indent="0">
               <a:buNone/>
             </a:pPr>
             <a:r>
@@ -13652,7 +13936,7 @@
           </a:prstGeom>
           <a:extLst>
             <a:ext uri="{C572A759-6A51-4108-AA02-DFA0A04FC94B}">
-              <ma14:wrappingTextBoxFlag xmlns:ma14="http://schemas.microsoft.com/office/mac/drawingml/2011/main" val="0"/>
+              <ma14:wrappingTextBoxFlag xmlns:ma14="http://schemas.microsoft.com/office/mac/drawingml/2011/main" xmlns="" val="0"/>
             </a:ext>
           </a:extLst>
         </p:spPr>
@@ -13670,7 +13954,7 @@
           <a:p>
             <a:pPr algn="l"/>
             <a:fld id="{F7021451-1387-4CA6-816F-3879F97B5CBC}" type="slidenum">
-              <a:rPr b="0" lang="en-US"/>
+              <a:rPr lang="en-US" b="0"/>
               <a:t>8</a:t>
             </a:fld>
             <a:endParaRPr lang="en-US"/>
@@ -13705,9 +13989,11 @@
       <p:sp>
         <p:nvSpPr>
           <p:cNvPr id="2" name="Text 0"/>
-          <p:cNvSpPr/>
+          <p:cNvSpPr>
+            <a:spLocks noGrp="1"/>
+          </p:cNvSpPr>
           <p:nvPr>
-            <p:ph idx="100" type="title" hasCustomPrompt="1"/>
+            <p:ph type="title" idx="100" hasCustomPrompt="1"/>
           </p:nvPr>
         </p:nvSpPr>
         <p:spPr>
@@ -13725,7 +14011,7 @@
           <a:bodyPr wrap="square" lIns="0" tIns="0" rIns="0" bIns="0" rtlCol="0" anchor="ctr"/>
           <a:lstStyle/>
           <a:p>
-            <a:pPr algn="l" indent="0" marL="0">
+            <a:pPr marL="0" indent="0" algn="l">
               <a:buNone/>
             </a:pPr>
             <a:r>
@@ -13764,7 +14050,7 @@
           <a:bodyPr wrap="square" lIns="0" tIns="0" rIns="0" bIns="0" rtlCol="0" anchor="t"/>
           <a:lstStyle/>
           <a:p>
-            <a:pPr indent="0" marL="0">
+            <a:pPr marL="0" indent="0">
               <a:buNone/>
             </a:pPr>
             <a:r>
@@ -13803,7 +14089,7 @@
           <a:bodyPr wrap="square" lIns="0" tIns="0" rIns="0" bIns="0" rtlCol="0" anchor="t"/>
           <a:lstStyle/>
           <a:p>
-            <a:pPr indent="0" marL="0">
+            <a:pPr marL="0" indent="0">
               <a:buNone/>
             </a:pPr>
             <a:r>
@@ -13839,7 +14125,7 @@
           <a:bodyPr wrap="square" lIns="0" tIns="0" rIns="0" bIns="0" rtlCol="0" anchor="t"/>
           <a:lstStyle/>
           <a:p>
-            <a:pPr indent="0" marL="0">
+            <a:pPr marL="0" indent="0">
               <a:buNone/>
             </a:pPr>
             <a:r>
@@ -13878,7 +14164,7 @@
           <a:bodyPr wrap="square" lIns="0" tIns="0" rIns="0" bIns="0" rtlCol="0" anchor="t"/>
           <a:lstStyle/>
           <a:p>
-            <a:pPr indent="0" marL="0">
+            <a:pPr marL="0" indent="0">
               <a:buNone/>
             </a:pPr>
             <a:r>
@@ -13914,7 +14200,7 @@
           <a:bodyPr wrap="square" lIns="0" tIns="0" rIns="0" bIns="0" rtlCol="0" anchor="t"/>
           <a:lstStyle/>
           <a:p>
-            <a:pPr indent="0" marL="0">
+            <a:pPr marL="0" indent="0">
               <a:buNone/>
             </a:pPr>
             <a:r>
@@ -13931,7 +14217,7 @@
       </p:sp>
       <p:graphicFrame>
         <p:nvGraphicFramePr>
-          <p:cNvPr id="8" name="chart-77" descr=""/>
+          <p:cNvPr id="8" name="chart-77"/>
           <p:cNvGraphicFramePr/>
           <p:nvPr/>
         </p:nvGraphicFramePr>
@@ -13939,9 +14225,9 @@
           <a:off x="3840480" y="1188720"/>
           <a:ext cx="4846320" cy="3383280"/>
         </p:xfrm>
-        <a:graphic xmlns:a="http://schemas.openxmlformats.org/drawingml/2006/main">
+        <a:graphic>
           <a:graphicData uri="http://schemas.openxmlformats.org/drawingml/2006/chart">
-            <c:chart xmlns:c="http://schemas.openxmlformats.org/drawingml/2006/chart" r:id="rId1"/>
+            <c:chart xmlns:c="http://schemas.openxmlformats.org/drawingml/2006/chart" xmlns:r="http://schemas.openxmlformats.org/officeDocument/2006/relationships" r:id="rId3"/>
           </a:graphicData>
         </a:graphic>
       </p:graphicFrame>
@@ -13965,7 +14251,7 @@
           </a:prstGeom>
           <a:extLst>
             <a:ext uri="{C572A759-6A51-4108-AA02-DFA0A04FC94B}">
-              <ma14:wrappingTextBoxFlag xmlns:ma14="http://schemas.microsoft.com/office/mac/drawingml/2011/main" val="0"/>
+              <ma14:wrappingTextBoxFlag xmlns:ma14="http://schemas.microsoft.com/office/mac/drawingml/2011/main" xmlns="" val="0"/>
             </a:ext>
           </a:extLst>
         </p:spPr>
@@ -13983,7 +14269,7 @@
           <a:p>
             <a:pPr algn="l"/>
             <a:fld id="{F7021451-1387-4CA6-816F-3879F97B5CBC}" type="slidenum">
-              <a:rPr b="0" lang="en-US"/>
+              <a:rPr lang="en-US" b="0"/>
               <a:t>9</a:t>
             </a:fld>
             <a:endParaRPr lang="en-US"/>
@@ -14291,4 +14577,299 @@
     </a:ext>
   </a:extLst>
 </a:theme>
+</file>
+
+<file path=ppt/theme/theme2.xml><?xml version="1.0" encoding="utf-8"?>
+<a:theme xmlns:a="http://schemas.openxmlformats.org/drawingml/2006/main" name="Office Theme">
+  <a:themeElements>
+    <a:clrScheme name="Office">
+      <a:dk1>
+        <a:sysClr val="windowText" lastClr="000000"/>
+      </a:dk1>
+      <a:lt1>
+        <a:sysClr val="window" lastClr="FFFFFF"/>
+      </a:lt1>
+      <a:dk2>
+        <a:srgbClr val="44546A"/>
+      </a:dk2>
+      <a:lt2>
+        <a:srgbClr val="E7E6E6"/>
+      </a:lt2>
+      <a:accent1>
+        <a:srgbClr val="4472C4"/>
+      </a:accent1>
+      <a:accent2>
+        <a:srgbClr val="ED7D31"/>
+      </a:accent2>
+      <a:accent3>
+        <a:srgbClr val="A5A5A5"/>
+      </a:accent3>
+      <a:accent4>
+        <a:srgbClr val="FFC000"/>
+      </a:accent4>
+      <a:accent5>
+        <a:srgbClr val="5B9BD5"/>
+      </a:accent5>
+      <a:accent6>
+        <a:srgbClr val="70AD47"/>
+      </a:accent6>
+      <a:hlink>
+        <a:srgbClr val="0563C1"/>
+      </a:hlink>
+      <a:folHlink>
+        <a:srgbClr val="954F72"/>
+      </a:folHlink>
+    </a:clrScheme>
+    <a:fontScheme name="Office">
+      <a:majorFont>
+        <a:latin typeface="Calibri Light" panose="020F0302020204030204"/>
+        <a:ea typeface=""/>
+        <a:cs typeface=""/>
+        <a:font script="Jpan" typeface="游ゴシック Light"/>
+        <a:font script="Hang" typeface="맑은 고딕"/>
+        <a:font script="Hans" typeface="等线 Light"/>
+        <a:font script="Hant" typeface="新細明體"/>
+        <a:font script="Arab" typeface="Times New Roman"/>
+        <a:font script="Hebr" typeface="Times New Roman"/>
+        <a:font script="Thai" typeface="Angsana New"/>
+        <a:font script="Ethi" typeface="Nyala"/>
+        <a:font script="Beng" typeface="Vrinda"/>
+        <a:font script="Gujr" typeface="Shruti"/>
+        <a:font script="Khmr" typeface="MoolBoran"/>
+        <a:font script="Knda" typeface="Tunga"/>
+        <a:font script="Guru" typeface="Raavi"/>
+        <a:font script="Cans" typeface="Euphemia"/>
+        <a:font script="Cher" typeface="Plantagenet Cherokee"/>
+        <a:font script="Yiii" typeface="Microsoft Yi Baiti"/>
+        <a:font script="Tibt" typeface="Microsoft Himalaya"/>
+        <a:font script="Thaa" typeface="MV Boli"/>
+        <a:font script="Deva" typeface="Mangal"/>
+        <a:font script="Telu" typeface="Gautami"/>
+        <a:font script="Taml" typeface="Latha"/>
+        <a:font script="Syrc" typeface="Estrangelo Edessa"/>
+        <a:font script="Orya" typeface="Kalinga"/>
+        <a:font script="Mlym" typeface="Kartika"/>
+        <a:font script="Laoo" typeface="DokChampa"/>
+        <a:font script="Sinh" typeface="Iskoola Pota"/>
+        <a:font script="Mong" typeface="Mongolian Baiti"/>
+        <a:font script="Viet" typeface="Times New Roman"/>
+        <a:font script="Uigh" typeface="Microsoft Uighur"/>
+        <a:font script="Geor" typeface="Sylfaen"/>
+        <a:font script="Armn" typeface="Arial"/>
+        <a:font script="Bugi" typeface="Leelawadee UI"/>
+        <a:font script="Bopo" typeface="Microsoft JhengHei"/>
+        <a:font script="Java" typeface="Javanese Text"/>
+        <a:font script="Lisu" typeface="Segoe UI"/>
+        <a:font script="Mymr" typeface="Myanmar Text"/>
+        <a:font script="Nkoo" typeface="Ebrima"/>
+        <a:font script="Olck" typeface="Nirmala UI"/>
+        <a:font script="Osma" typeface="Ebrima"/>
+        <a:font script="Phag" typeface="Phagspa"/>
+        <a:font script="Syrn" typeface="Estrangelo Edessa"/>
+        <a:font script="Syrj" typeface="Estrangelo Edessa"/>
+        <a:font script="Syre" typeface="Estrangelo Edessa"/>
+        <a:font script="Sora" typeface="Nirmala UI"/>
+        <a:font script="Tale" typeface="Microsoft Tai Le"/>
+        <a:font script="Talu" typeface="Microsoft New Tai Lue"/>
+        <a:font script="Tfng" typeface="Ebrima"/>
+      </a:majorFont>
+      <a:minorFont>
+        <a:latin typeface="Calibri" panose="020F0502020204030204"/>
+        <a:ea typeface=""/>
+        <a:cs typeface=""/>
+        <a:font script="Jpan" typeface="游ゴシック"/>
+        <a:font script="Hang" typeface="맑은 고딕"/>
+        <a:font script="Hans" typeface="等线"/>
+        <a:font script="Hant" typeface="新細明體"/>
+        <a:font script="Arab" typeface="Arial"/>
+        <a:font script="Hebr" typeface="Arial"/>
+        <a:font script="Thai" typeface="Cordia New"/>
+        <a:font script="Ethi" typeface="Nyala"/>
+        <a:font script="Beng" typeface="Vrinda"/>
+        <a:font script="Gujr" typeface="Shruti"/>
+        <a:font script="Khmr" typeface="DaunPenh"/>
+        <a:font script="Knda" typeface="Tunga"/>
+        <a:font script="Guru" typeface="Raavi"/>
+        <a:font script="Cans" typeface="Euphemia"/>
+        <a:font script="Cher" typeface="Plantagenet Cherokee"/>
+        <a:font script="Yiii" typeface="Microsoft Yi Baiti"/>
+        <a:font script="Tibt" typeface="Microsoft Himalaya"/>
+        <a:font script="Thaa" typeface="MV Boli"/>
+        <a:font script="Deva" typeface="Mangal"/>
+        <a:font script="Telu" typeface="Gautami"/>
+        <a:font script="Taml" typeface="Latha"/>
+        <a:font script="Syrc" typeface="Estrangelo Edessa"/>
+        <a:font script="Orya" typeface="Kalinga"/>
+        <a:font script="Mlym" typeface="Kartika"/>
+        <a:font script="Laoo" typeface="DokChampa"/>
+        <a:font script="Sinh" typeface="Iskoola Pota"/>
+        <a:font script="Mong" typeface="Mongolian Baiti"/>
+        <a:font script="Viet" typeface="Arial"/>
+        <a:font script="Uigh" typeface="Microsoft Uighur"/>
+        <a:font script="Geor" typeface="Sylfaen"/>
+        <a:font script="Armn" typeface="Arial"/>
+        <a:font script="Bugi" typeface="Leelawadee UI"/>
+        <a:font script="Bopo" typeface="Microsoft JhengHei"/>
+        <a:font script="Java" typeface="Javanese Text"/>
+        <a:font script="Lisu" typeface="Segoe UI"/>
+        <a:font script="Mymr" typeface="Myanmar Text"/>
+        <a:font script="Nkoo" typeface="Ebrima"/>
+        <a:font script="Olck" typeface="Nirmala UI"/>
+        <a:font script="Osma" typeface="Ebrima"/>
+        <a:font script="Phag" typeface="Phagspa"/>
+        <a:font script="Syrn" typeface="Estrangelo Edessa"/>
+        <a:font script="Syrj" typeface="Estrangelo Edessa"/>
+        <a:font script="Syre" typeface="Estrangelo Edessa"/>
+        <a:font script="Sora" typeface="Nirmala UI"/>
+        <a:font script="Tale" typeface="Microsoft Tai Le"/>
+        <a:font script="Talu" typeface="Microsoft New Tai Lue"/>
+        <a:font script="Tfng" typeface="Ebrima"/>
+      </a:minorFont>
+    </a:fontScheme>
+    <a:fmtScheme name="Office">
+      <a:fillStyleLst>
+        <a:solidFill>
+          <a:schemeClr val="phClr"/>
+        </a:solidFill>
+        <a:gradFill rotWithShape="1">
+          <a:gsLst>
+            <a:gs pos="0">
+              <a:schemeClr val="phClr">
+                <a:lumMod val="110000"/>
+                <a:satMod val="105000"/>
+                <a:tint val="67000"/>
+              </a:schemeClr>
+            </a:gs>
+            <a:gs pos="50000">
+              <a:schemeClr val="phClr">
+                <a:lumMod val="105000"/>
+                <a:satMod val="103000"/>
+                <a:tint val="73000"/>
+              </a:schemeClr>
+            </a:gs>
+            <a:gs pos="100000">
+              <a:schemeClr val="phClr">
+                <a:lumMod val="105000"/>
+                <a:satMod val="109000"/>
+                <a:tint val="81000"/>
+              </a:schemeClr>
+            </a:gs>
+          </a:gsLst>
+          <a:lin ang="5400000" scaled="0"/>
+        </a:gradFill>
+        <a:gradFill rotWithShape="1">
+          <a:gsLst>
+            <a:gs pos="0">
+              <a:schemeClr val="phClr">
+                <a:satMod val="103000"/>
+                <a:lumMod val="102000"/>
+                <a:tint val="94000"/>
+              </a:schemeClr>
+            </a:gs>
+            <a:gs pos="50000">
+              <a:schemeClr val="phClr">
+                <a:satMod val="110000"/>
+                <a:lumMod val="100000"/>
+                <a:shade val="100000"/>
+              </a:schemeClr>
+            </a:gs>
+            <a:gs pos="100000">
+              <a:schemeClr val="phClr">
+                <a:lumMod val="99000"/>
+                <a:satMod val="120000"/>
+                <a:shade val="78000"/>
+              </a:schemeClr>
+            </a:gs>
+          </a:gsLst>
+          <a:lin ang="5400000" scaled="0"/>
+        </a:gradFill>
+      </a:fillStyleLst>
+      <a:lnStyleLst>
+        <a:ln w="6350" cap="flat" cmpd="sng" algn="ctr">
+          <a:solidFill>
+            <a:schemeClr val="phClr"/>
+          </a:solidFill>
+          <a:prstDash val="solid"/>
+          <a:miter lim="800000"/>
+        </a:ln>
+        <a:ln w="12700" cap="flat" cmpd="sng" algn="ctr">
+          <a:solidFill>
+            <a:schemeClr val="phClr"/>
+          </a:solidFill>
+          <a:prstDash val="solid"/>
+          <a:miter lim="800000"/>
+        </a:ln>
+        <a:ln w="19050" cap="flat" cmpd="sng" algn="ctr">
+          <a:solidFill>
+            <a:schemeClr val="phClr"/>
+          </a:solidFill>
+          <a:prstDash val="solid"/>
+          <a:miter lim="800000"/>
+        </a:ln>
+      </a:lnStyleLst>
+      <a:effectStyleLst>
+        <a:effectStyle>
+          <a:effectLst/>
+        </a:effectStyle>
+        <a:effectStyle>
+          <a:effectLst/>
+        </a:effectStyle>
+        <a:effectStyle>
+          <a:effectLst>
+            <a:outerShdw blurRad="57150" dist="19050" dir="5400000" algn="ctr" rotWithShape="0">
+              <a:srgbClr val="000000">
+                <a:alpha val="63000"/>
+              </a:srgbClr>
+            </a:outerShdw>
+          </a:effectLst>
+        </a:effectStyle>
+      </a:effectStyleLst>
+      <a:bgFillStyleLst>
+        <a:solidFill>
+          <a:schemeClr val="phClr"/>
+        </a:solidFill>
+        <a:solidFill>
+          <a:schemeClr val="phClr">
+            <a:tint val="95000"/>
+            <a:satMod val="170000"/>
+          </a:schemeClr>
+        </a:solidFill>
+        <a:gradFill rotWithShape="1">
+          <a:gsLst>
+            <a:gs pos="0">
+              <a:schemeClr val="phClr">
+                <a:tint val="93000"/>
+                <a:satMod val="150000"/>
+                <a:shade val="98000"/>
+                <a:lumMod val="102000"/>
+              </a:schemeClr>
+            </a:gs>
+            <a:gs pos="50000">
+              <a:schemeClr val="phClr">
+                <a:tint val="98000"/>
+                <a:satMod val="130000"/>
+                <a:shade val="90000"/>
+                <a:lumMod val="103000"/>
+              </a:schemeClr>
+            </a:gs>
+            <a:gs pos="100000">
+              <a:schemeClr val="phClr">
+                <a:shade val="63000"/>
+                <a:satMod val="120000"/>
+              </a:schemeClr>
+            </a:gs>
+          </a:gsLst>
+          <a:lin ang="5400000" scaled="0"/>
+        </a:gradFill>
+      </a:bgFillStyleLst>
+    </a:fmtScheme>
+  </a:themeElements>
+  <a:objectDefaults/>
+  <a:extraClrSchemeLst/>
+  <a:extLst>
+    <a:ext uri="{05A4C25C-085E-4340-85A3-A5531E510DB2}">
+      <thm15:themeFamily xmlns:thm15="http://schemas.microsoft.com/office/thememl/2012/main" name="Office Theme" id="{62F939B6-93AF-4DB8-9C6B-D6C7DFDC589F}" vid="{4A3C46E8-61CC-4603-A589-7422A47A8E4A}"/>
+    </a:ext>
+  </a:extLst>
+</a:theme>
 </file>